--- a/wien_talks/FunMap_Presentation.pptx
+++ b/wien_talks/FunMap_Presentation.pptx
@@ -17,8 +17,8 @@
 </file>
 
 <file path=ppt/slideLayouts/slideLayout1.xml><?xml version="1.0" encoding="utf-8"?>
-<p:sldLayout xmlns:a="http://schemas.openxmlformats.org/drawingml/2006/main" xmlns:p="http://schemas.openxmlformats.org/presentationml/2006/main" xmlns:r="http://schemas.openxmlformats.org/officeDocument/2006/relationships" xmlns:p14="http://schemas.microsoft.com/office/powerpoint/2010/main" xmlns:p15="http://schemas.microsoft.com/office/powerpoint/2012/main" xmlns:mc="http://schemas.openxmlformats.org/markup-compatibility/2006" type="title" preserve="1">
-  <p:cSld name="Title Slide">
+<p:sldLayout xmlns:a="http://schemas.openxmlformats.org/drawingml/2006/main" xmlns:p="http://schemas.openxmlformats.org/presentationml/2006/main" xmlns:r="http://schemas.openxmlformats.org/officeDocument/2006/relationships" xmlns:p14="http://schemas.microsoft.com/office/powerpoint/2010/main" xmlns:p15="http://schemas.microsoft.com/office/powerpoint/2012/main" xmlns:mc="http://schemas.openxmlformats.org/markup-compatibility/2006" type="blank" preserve="1">
+  <p:cSld name="Blank">
     <p:bg>
       <p:bgPr>
         <a:solidFill>
@@ -47,69 +47,13 @@
             <a:spLocks noGrp="1"/>
           </p:cNvSpPr>
           <p:nvPr>
-            <p:ph type="title"/>
-          </p:nvPr>
-        </p:nvSpPr>
-        <p:spPr>
-          <a:xfrm>
-            <a:off x="685800" y="2130480"/>
-            <a:ext cx="7772040" cy="1469520"/>
-          </a:xfrm>
-          <a:prstGeom prst="rect">
-            <a:avLst/>
-          </a:prstGeom>
-          <a:noFill/>
-          <a:ln w="0">
-            <a:noFill/>
-          </a:ln>
-        </p:spPr>
-        <p:txBody>
-          <a:bodyPr lIns="91440" rIns="91440" tIns="45720" bIns="45720" anchor="ctr">
-            <a:noAutofit/>
-          </a:bodyPr>
-          <a:p>
-            <a:pPr indent="0" algn="ctr" defTabSz="457200">
-              <a:lnSpc>
-                <a:spcPct val="100000"/>
-              </a:lnSpc>
-              <a:buNone/>
-            </a:pPr>
-            <a:r>
-              <a:rPr b="0" lang="en-US" sz="4400" strike="noStrike" u="none">
-                <a:solidFill>
-                  <a:schemeClr val="dk1"/>
-                </a:solidFill>
-                <a:effectLst/>
-                <a:uFillTx/>
-                <a:latin typeface="Calibri"/>
-              </a:rPr>
-              <a:t>Click to edit Master title style</a:t>
-            </a:r>
-            <a:endParaRPr b="0" lang="en-US" sz="4400" strike="noStrike" u="none">
-              <a:solidFill>
-                <a:schemeClr val="dk1"/>
-              </a:solidFill>
-              <a:effectLst/>
-              <a:uFillTx/>
-              <a:latin typeface="Calibri"/>
-            </a:endParaRPr>
-          </a:p>
-        </p:txBody>
-      </p:sp>
-      <p:sp>
-        <p:nvSpPr>
-          <p:cNvPr id="1" name="PlaceHolder 2"/>
-          <p:cNvSpPr>
-            <a:spLocks noGrp="1"/>
-          </p:cNvSpPr>
-          <p:nvPr>
             <p:ph type="dt" idx="1"/>
           </p:nvPr>
         </p:nvSpPr>
         <p:spPr>
           <a:xfrm>
             <a:off x="457200" y="6356520"/>
-            <a:ext cx="2133360" cy="364680"/>
+            <a:ext cx="2133000" cy="364320"/>
           </a:xfrm>
           <a:prstGeom prst="rect">
             <a:avLst/>
@@ -129,6 +73,9 @@
                 <a:spcPct val="100000"/>
               </a:lnSpc>
               <a:buNone/>
+              <a:tabLst>
+                <a:tab algn="l" pos="0"/>
+              </a:tabLst>
               <a:defRPr b="0" lang="en-US" sz="1200" strike="noStrike" u="none">
                 <a:solidFill>
                   <a:schemeClr val="dk1">
@@ -147,6 +94,9 @@
                 <a:spcPct val="100000"/>
               </a:lnSpc>
               <a:buNone/>
+              <a:tabLst>
+                <a:tab algn="l" pos="0"/>
+              </a:tabLst>
             </a:pPr>
             <a:r>
               <a:rPr b="0" lang="en-US" sz="1200" strike="noStrike" u="none">
@@ -174,7 +124,7 @@
       </p:sp>
       <p:sp>
         <p:nvSpPr>
-          <p:cNvPr id="2" name="PlaceHolder 3"/>
+          <p:cNvPr id="1" name="PlaceHolder 2"/>
           <p:cNvSpPr>
             <a:spLocks noGrp="1"/>
           </p:cNvSpPr>
@@ -185,7 +135,7 @@
         <p:spPr>
           <a:xfrm>
             <a:off x="3124080" y="6356520"/>
-            <a:ext cx="2895120" cy="364680"/>
+            <a:ext cx="2894760" cy="364320"/>
           </a:xfrm>
           <a:prstGeom prst="rect">
             <a:avLst/>
@@ -201,7 +151,13 @@
           </a:bodyPr>
           <a:lstStyle>
             <a:lvl1pPr indent="0" algn="ctr">
-              <a:buNone/>
+              <a:lnSpc>
+                <a:spcPct val="100000"/>
+              </a:lnSpc>
+              <a:buNone/>
+              <a:tabLst>
+                <a:tab algn="l" pos="0"/>
+              </a:tabLst>
               <a:defRPr b="0" lang="de-AT" sz="1400" strike="noStrike" u="none">
                 <a:solidFill>
                   <a:srgbClr val="000000"/>
@@ -214,7 +170,13 @@
           </a:lstStyle>
           <a:p>
             <a:pPr indent="0" algn="ctr">
-              <a:buNone/>
+              <a:lnSpc>
+                <a:spcPct val="100000"/>
+              </a:lnSpc>
+              <a:buNone/>
+              <a:tabLst>
+                <a:tab algn="l" pos="0"/>
+              </a:tabLst>
             </a:pPr>
             <a:r>
               <a:rPr b="0" lang="de-AT" sz="1400" strike="noStrike" u="none">
@@ -240,7 +202,7 @@
       </p:sp>
       <p:sp>
         <p:nvSpPr>
-          <p:cNvPr id="3" name="PlaceHolder 4"/>
+          <p:cNvPr id="2" name="PlaceHolder 3"/>
           <p:cNvSpPr>
             <a:spLocks noGrp="1"/>
           </p:cNvSpPr>
@@ -251,7 +213,7 @@
         <p:spPr>
           <a:xfrm>
             <a:off x="6553080" y="6356520"/>
-            <a:ext cx="2133360" cy="364680"/>
+            <a:ext cx="2133000" cy="364320"/>
           </a:xfrm>
           <a:prstGeom prst="rect">
             <a:avLst/>
@@ -271,6 +233,9 @@
                 <a:spcPct val="100000"/>
               </a:lnSpc>
               <a:buNone/>
+              <a:tabLst>
+                <a:tab algn="l" pos="0"/>
+              </a:tabLst>
               <a:defRPr b="0" lang="en-US" sz="1200" strike="noStrike" u="none">
                 <a:solidFill>
                   <a:schemeClr val="dk1">
@@ -289,8 +254,11 @@
                 <a:spcPct val="100000"/>
               </a:lnSpc>
               <a:buNone/>
-            </a:pPr>
-            <a:fld id="{CF463577-021C-4333-B6B2-62365017A6E3}" type="slidenum">
+              <a:tabLst>
+                <a:tab algn="l" pos="0"/>
+              </a:tabLst>
+            </a:pPr>
+            <a:fld id="{EAE208A9-CDE0-42D8-8DE3-E444D3ABA589}" type="slidenum">
               <a:rPr b="0" lang="en-US" sz="1200" strike="noStrike" u="none">
                 <a:solidFill>
                   <a:schemeClr val="dk1">
@@ -310,259 +278,6 @@
               <a:effectLst/>
               <a:uFillTx/>
               <a:latin typeface="Times New Roman"/>
-            </a:endParaRPr>
-          </a:p>
-        </p:txBody>
-      </p:sp>
-      <p:sp>
-        <p:nvSpPr>
-          <p:cNvPr id="4" name="PlaceHolder 5"/>
-          <p:cNvSpPr>
-            <a:spLocks noGrp="1"/>
-          </p:cNvSpPr>
-          <p:nvPr>
-            <p:ph type="body"/>
-          </p:nvPr>
-        </p:nvSpPr>
-        <p:spPr>
-          <a:xfrm>
-            <a:off x="457200" y="1604520"/>
-            <a:ext cx="8229240" cy="3977280"/>
-          </a:xfrm>
-          <a:prstGeom prst="rect">
-            <a:avLst/>
-          </a:prstGeom>
-          <a:noFill/>
-          <a:ln w="0">
-            <a:noFill/>
-          </a:ln>
-        </p:spPr>
-        <p:txBody>
-          <a:bodyPr lIns="0" rIns="0" tIns="0" bIns="0" anchor="t">
-            <a:normAutofit/>
-          </a:bodyPr>
-          <a:p>
-            <a:pPr marL="432000" indent="-324000">
-              <a:spcBef>
-                <a:spcPts val="1417"/>
-              </a:spcBef>
-              <a:buClr>
-                <a:srgbClr val="000000"/>
-              </a:buClr>
-              <a:buSzPct val="45000"/>
-              <a:buFont typeface="Wingdings" charset="2"/>
-              <a:buChar char=""/>
-            </a:pPr>
-            <a:r>
-              <a:rPr b="0" lang="en-US" sz="3200" strike="noStrike" u="none">
-                <a:solidFill>
-                  <a:schemeClr val="dk1"/>
-                </a:solidFill>
-                <a:effectLst/>
-                <a:uFillTx/>
-                <a:latin typeface="Calibri"/>
-              </a:rPr>
-              <a:t>Format des Gliederungstextes durch Klicken bearbeiten</a:t>
-            </a:r>
-            <a:endParaRPr b="0" lang="en-US" sz="3200" strike="noStrike" u="none">
-              <a:solidFill>
-                <a:schemeClr val="dk1"/>
-              </a:solidFill>
-              <a:effectLst/>
-              <a:uFillTx/>
-              <a:latin typeface="Calibri"/>
-            </a:endParaRPr>
-          </a:p>
-          <a:p>
-            <a:pPr lvl="1" marL="864000" indent="-324000">
-              <a:spcBef>
-                <a:spcPts val="1134"/>
-              </a:spcBef>
-              <a:buClr>
-                <a:srgbClr val="000000"/>
-              </a:buClr>
-              <a:buSzPct val="75000"/>
-              <a:buFont typeface="Symbol" charset="2"/>
-              <a:buChar char=""/>
-            </a:pPr>
-            <a:r>
-              <a:rPr b="0" lang="en-US" sz="2400" strike="noStrike" u="none">
-                <a:solidFill>
-                  <a:schemeClr val="dk1"/>
-                </a:solidFill>
-                <a:effectLst/>
-                <a:uFillTx/>
-                <a:latin typeface="Calibri"/>
-              </a:rPr>
-              <a:t>Zweite Gliederungsebene</a:t>
-            </a:r>
-            <a:endParaRPr b="0" lang="en-US" sz="2400" strike="noStrike" u="none">
-              <a:solidFill>
-                <a:schemeClr val="dk1"/>
-              </a:solidFill>
-              <a:effectLst/>
-              <a:uFillTx/>
-              <a:latin typeface="Calibri"/>
-            </a:endParaRPr>
-          </a:p>
-          <a:p>
-            <a:pPr lvl="2" marL="1296000" indent="-288000">
-              <a:spcBef>
-                <a:spcPts val="850"/>
-              </a:spcBef>
-              <a:buClr>
-                <a:srgbClr val="000000"/>
-              </a:buClr>
-              <a:buSzPct val="45000"/>
-              <a:buFont typeface="Wingdings" charset="2"/>
-              <a:buChar char=""/>
-            </a:pPr>
-            <a:r>
-              <a:rPr b="0" lang="en-US" sz="2000" strike="noStrike" u="none">
-                <a:solidFill>
-                  <a:schemeClr val="dk1"/>
-                </a:solidFill>
-                <a:effectLst/>
-                <a:uFillTx/>
-                <a:latin typeface="Calibri"/>
-              </a:rPr>
-              <a:t>Dritte Gliederungsebene</a:t>
-            </a:r>
-            <a:endParaRPr b="0" lang="en-US" sz="2000" strike="noStrike" u="none">
-              <a:solidFill>
-                <a:schemeClr val="dk1"/>
-              </a:solidFill>
-              <a:effectLst/>
-              <a:uFillTx/>
-              <a:latin typeface="Calibri"/>
-            </a:endParaRPr>
-          </a:p>
-          <a:p>
-            <a:pPr lvl="3" marL="1728000" indent="-216000">
-              <a:spcBef>
-                <a:spcPts val="567"/>
-              </a:spcBef>
-              <a:buClr>
-                <a:srgbClr val="000000"/>
-              </a:buClr>
-              <a:buSzPct val="75000"/>
-              <a:buFont typeface="Symbol" charset="2"/>
-              <a:buChar char=""/>
-            </a:pPr>
-            <a:r>
-              <a:rPr b="0" lang="en-US" sz="2000" strike="noStrike" u="none">
-                <a:solidFill>
-                  <a:schemeClr val="dk1"/>
-                </a:solidFill>
-                <a:effectLst/>
-                <a:uFillTx/>
-                <a:latin typeface="Calibri"/>
-              </a:rPr>
-              <a:t>Vierte Gliederungsebene</a:t>
-            </a:r>
-            <a:endParaRPr b="0" lang="en-US" sz="2000" strike="noStrike" u="none">
-              <a:solidFill>
-                <a:schemeClr val="dk1"/>
-              </a:solidFill>
-              <a:effectLst/>
-              <a:uFillTx/>
-              <a:latin typeface="Calibri"/>
-            </a:endParaRPr>
-          </a:p>
-          <a:p>
-            <a:pPr lvl="4" marL="2160000" indent="-216000">
-              <a:spcBef>
-                <a:spcPts val="283"/>
-              </a:spcBef>
-              <a:buClr>
-                <a:srgbClr val="000000"/>
-              </a:buClr>
-              <a:buSzPct val="45000"/>
-              <a:buFont typeface="Wingdings" charset="2"/>
-              <a:buChar char=""/>
-            </a:pPr>
-            <a:r>
-              <a:rPr b="0" lang="en-US" sz="2000" strike="noStrike" u="none">
-                <a:solidFill>
-                  <a:schemeClr val="dk1"/>
-                </a:solidFill>
-                <a:effectLst/>
-                <a:uFillTx/>
-                <a:latin typeface="Calibri"/>
-              </a:rPr>
-              <a:t>Fünfte Gliederungsebene</a:t>
-            </a:r>
-            <a:endParaRPr b="0" lang="en-US" sz="2000" strike="noStrike" u="none">
-              <a:solidFill>
-                <a:schemeClr val="dk1"/>
-              </a:solidFill>
-              <a:effectLst/>
-              <a:uFillTx/>
-              <a:latin typeface="Calibri"/>
-            </a:endParaRPr>
-          </a:p>
-          <a:p>
-            <a:pPr lvl="5" marL="2592000" indent="-216000">
-              <a:spcBef>
-                <a:spcPts val="283"/>
-              </a:spcBef>
-              <a:buClr>
-                <a:srgbClr val="000000"/>
-              </a:buClr>
-              <a:buSzPct val="45000"/>
-              <a:buFont typeface="Wingdings" charset="2"/>
-              <a:buChar char=""/>
-            </a:pPr>
-            <a:r>
-              <a:rPr b="0" lang="en-US" sz="2000" strike="noStrike" u="none">
-                <a:solidFill>
-                  <a:schemeClr val="dk1"/>
-                </a:solidFill>
-                <a:effectLst/>
-                <a:uFillTx/>
-                <a:latin typeface="Calibri"/>
-              </a:rPr>
-              <a:t>Sechste Gliederungsebene</a:t>
-            </a:r>
-            <a:endParaRPr b="0" lang="en-US" sz="2000" strike="noStrike" u="none">
-              <a:solidFill>
-                <a:schemeClr val="dk1"/>
-              </a:solidFill>
-              <a:effectLst/>
-              <a:uFillTx/>
-              <a:latin typeface="Calibri"/>
-            </a:endParaRPr>
-          </a:p>
-          <a:p>
-            <a:pPr lvl="6" marL="3024000" indent="-216000">
-              <a:spcBef>
-                <a:spcPts val="283"/>
-              </a:spcBef>
-              <a:buClr>
-                <a:srgbClr val="000000"/>
-              </a:buClr>
-              <a:buSzPct val="45000"/>
-              <a:buFont typeface="Wingdings" charset="2"/>
-              <a:buChar char=""/>
-            </a:pPr>
-            <a:r>
-              <a:rPr b="0" lang="en-US" sz="2000" strike="noStrike" u="none">
-                <a:solidFill>
-                  <a:schemeClr val="dk1"/>
-                </a:solidFill>
-                <a:effectLst/>
-                <a:uFillTx/>
-                <a:latin typeface="Calibri"/>
-              </a:rPr>
-              <a:t>Siebte Gliederungsebene</a:t>
-            </a:r>
-            <a:endParaRPr b="0" lang="en-US" sz="2000" strike="noStrike" u="none">
-              <a:solidFill>
-                <a:schemeClr val="dk1"/>
-              </a:solidFill>
-              <a:effectLst/>
-              <a:uFillTx/>
-              <a:latin typeface="Calibri"/>
             </a:endParaRPr>
           </a:p>
         </p:txBody>
@@ -574,7 +289,7 @@
 
 <file path=ppt/slideLayouts/slideLayout10.xml><?xml version="1.0" encoding="utf-8"?>
 <p:sldLayout xmlns:a="http://schemas.openxmlformats.org/drawingml/2006/main" xmlns:p="http://schemas.openxmlformats.org/presentationml/2006/main" xmlns:r="http://schemas.openxmlformats.org/officeDocument/2006/relationships" xmlns:p14="http://schemas.microsoft.com/office/powerpoint/2010/main" xmlns:p15="http://schemas.microsoft.com/office/powerpoint/2012/main" xmlns:mc="http://schemas.openxmlformats.org/markup-compatibility/2006" type="blank" preserve="1">
-  <p:cSld name="Content with Caption">
+  <p:cSld name="Comparison">
     <p:bg>
       <p:bgPr>
         <a:solidFill>
@@ -608,8 +323,8 @@
         </p:nvSpPr>
         <p:spPr>
           <a:xfrm>
-            <a:off x="457200" y="272880"/>
-            <a:ext cx="3007800" cy="1161720"/>
+            <a:off x="457200" y="274680"/>
+            <a:ext cx="8228880" cy="1142280"/>
           </a:xfrm>
           <a:prstGeom prst="rect">
             <a:avLst/>
@@ -620,18 +335,21 @@
           </a:ln>
         </p:spPr>
         <p:txBody>
-          <a:bodyPr lIns="91440" rIns="91440" tIns="45720" bIns="45720" anchor="b">
+          <a:bodyPr lIns="91440" rIns="91440" tIns="45720" bIns="45720" anchor="ctr">
             <a:noAutofit/>
           </a:bodyPr>
           <a:p>
-            <a:pPr indent="0" defTabSz="457200">
-              <a:lnSpc>
-                <a:spcPct val="100000"/>
-              </a:lnSpc>
-              <a:buNone/>
-            </a:pPr>
-            <a:r>
-              <a:rPr b="1" lang="en-US" sz="2000" strike="noStrike" u="none">
+            <a:pPr indent="0" algn="ctr" defTabSz="457200">
+              <a:lnSpc>
+                <a:spcPct val="100000"/>
+              </a:lnSpc>
+              <a:buNone/>
+              <a:tabLst>
+                <a:tab algn="l" pos="0"/>
+              </a:tabLst>
+            </a:pPr>
+            <a:r>
+              <a:rPr b="0" lang="en-US" sz="4400" strike="noStrike" u="none">
                 <a:solidFill>
                   <a:schemeClr val="dk1"/>
                 </a:solidFill>
@@ -641,13 +359,13 @@
               </a:rPr>
               <a:t>Click to edit Master title style</a:t>
             </a:r>
-            <a:endParaRPr b="0" lang="en-US" sz="2000" strike="noStrike" u="none">
-              <a:solidFill>
-                <a:schemeClr val="dk1"/>
-              </a:solidFill>
-              <a:effectLst/>
-              <a:uFillTx/>
-              <a:latin typeface="Calibri"/>
+            <a:endParaRPr b="0" lang="de-AT" sz="4400" strike="noStrike" u="none">
+              <a:solidFill>
+                <a:srgbClr val="000000"/>
+              </a:solidFill>
+              <a:effectLst/>
+              <a:uFillTx/>
+              <a:latin typeface="Arial"/>
             </a:endParaRPr>
           </a:p>
         </p:txBody>
@@ -664,8 +382,8 @@
         </p:nvSpPr>
         <p:spPr>
           <a:xfrm>
-            <a:off x="3575160" y="272880"/>
-            <a:ext cx="5111280" cy="5852880"/>
+            <a:off x="457200" y="1535040"/>
+            <a:ext cx="4039560" cy="639000"/>
           </a:xfrm>
           <a:prstGeom prst="rect">
             <a:avLst/>
@@ -676,177 +394,40 @@
           </a:ln>
         </p:spPr>
         <p:txBody>
-          <a:bodyPr lIns="91440" rIns="91440" tIns="45720" bIns="45720" anchor="t">
+          <a:bodyPr lIns="91440" rIns="91440" tIns="45720" bIns="45720" anchor="b">
             <a:noAutofit/>
           </a:bodyPr>
           <a:p>
-            <a:pPr marL="343080" indent="-343080" defTabSz="457200">
-              <a:lnSpc>
-                <a:spcPct val="100000"/>
-              </a:lnSpc>
-              <a:spcBef>
-                <a:spcPts val="641"/>
-              </a:spcBef>
-              <a:buClr>
-                <a:srgbClr val="000000"/>
-              </a:buClr>
-              <a:buFont typeface="Arial"/>
-              <a:buChar char="•"/>
-            </a:pPr>
-            <a:r>
-              <a:rPr b="0" lang="en-US" sz="3200" strike="noStrike" u="none">
-                <a:solidFill>
-                  <a:schemeClr val="dk1"/>
-                </a:solidFill>
-                <a:effectLst/>
-                <a:uFillTx/>
-                <a:latin typeface="Calibri"/>
-              </a:rPr>
-              <a:t>Click to edit Master text styles</a:t>
-            </a:r>
-            <a:endParaRPr b="0" lang="en-US" sz="3200" strike="noStrike" u="none">
-              <a:solidFill>
-                <a:schemeClr val="dk1"/>
-              </a:solidFill>
-              <a:effectLst/>
-              <a:uFillTx/>
-              <a:latin typeface="Calibri"/>
-            </a:endParaRPr>
-          </a:p>
-          <a:p>
-            <a:pPr lvl="1" marL="743040" indent="-285840" defTabSz="457200">
-              <a:lnSpc>
-                <a:spcPct val="100000"/>
-              </a:lnSpc>
-              <a:spcBef>
-                <a:spcPts val="561"/>
-              </a:spcBef>
-              <a:buClr>
-                <a:srgbClr val="000000"/>
-              </a:buClr>
-              <a:buFont typeface="Arial"/>
-              <a:buChar char="–"/>
-            </a:pPr>
-            <a:r>
-              <a:rPr b="0" lang="en-US" sz="2800" strike="noStrike" u="none">
-                <a:solidFill>
-                  <a:schemeClr val="dk1"/>
-                </a:solidFill>
-                <a:effectLst/>
-                <a:uFillTx/>
-                <a:latin typeface="Calibri"/>
-              </a:rPr>
-              <a:t>Second level</a:t>
-            </a:r>
-            <a:endParaRPr b="0" lang="en-US" sz="2800" strike="noStrike" u="none">
-              <a:solidFill>
-                <a:schemeClr val="dk1"/>
-              </a:solidFill>
-              <a:effectLst/>
-              <a:uFillTx/>
-              <a:latin typeface="Calibri"/>
-            </a:endParaRPr>
-          </a:p>
-          <a:p>
-            <a:pPr lvl="2" marL="1143000" indent="-228600" defTabSz="457200">
+            <a:pPr indent="0" defTabSz="457200">
               <a:lnSpc>
                 <a:spcPct val="100000"/>
               </a:lnSpc>
               <a:spcBef>
                 <a:spcPts val="479"/>
               </a:spcBef>
-              <a:buClr>
-                <a:srgbClr val="000000"/>
-              </a:buClr>
-              <a:buFont typeface="Arial"/>
-              <a:buChar char="•"/>
-            </a:pPr>
-            <a:r>
-              <a:rPr b="0" lang="en-US" sz="2400" strike="noStrike" u="none">
-                <a:solidFill>
-                  <a:schemeClr val="dk1"/>
-                </a:solidFill>
-                <a:effectLst/>
-                <a:uFillTx/>
-                <a:latin typeface="Calibri"/>
-              </a:rPr>
-              <a:t>Third level</a:t>
-            </a:r>
-            <a:endParaRPr b="0" lang="en-US" sz="2400" strike="noStrike" u="none">
-              <a:solidFill>
-                <a:schemeClr val="dk1"/>
-              </a:solidFill>
-              <a:effectLst/>
-              <a:uFillTx/>
-              <a:latin typeface="Calibri"/>
-            </a:endParaRPr>
-          </a:p>
-          <a:p>
-            <a:pPr lvl="3" marL="1600200" indent="-228600" defTabSz="457200">
-              <a:lnSpc>
-                <a:spcPct val="100000"/>
-              </a:lnSpc>
-              <a:spcBef>
-                <a:spcPts val="400"/>
-              </a:spcBef>
-              <a:buClr>
-                <a:srgbClr val="000000"/>
-              </a:buClr>
-              <a:buFont typeface="Arial"/>
-              <a:buChar char="–"/>
-            </a:pPr>
-            <a:r>
-              <a:rPr b="0" lang="en-US" sz="2000" strike="noStrike" u="none">
-                <a:solidFill>
-                  <a:schemeClr val="dk1"/>
-                </a:solidFill>
-                <a:effectLst/>
-                <a:uFillTx/>
-                <a:latin typeface="Calibri"/>
-              </a:rPr>
-              <a:t>Fourth level</a:t>
-            </a:r>
-            <a:endParaRPr b="0" lang="en-US" sz="2000" strike="noStrike" u="none">
-              <a:solidFill>
-                <a:schemeClr val="dk1"/>
-              </a:solidFill>
-              <a:effectLst/>
-              <a:uFillTx/>
-              <a:latin typeface="Calibri"/>
-            </a:endParaRPr>
-          </a:p>
-          <a:p>
-            <a:pPr lvl="4" marL="2057400" indent="-228600" defTabSz="457200">
-              <a:lnSpc>
-                <a:spcPct val="100000"/>
-              </a:lnSpc>
-              <a:spcBef>
-                <a:spcPts val="400"/>
-              </a:spcBef>
-              <a:buClr>
-                <a:srgbClr val="000000"/>
-              </a:buClr>
-              <a:buFont typeface="Arial"/>
-              <a:buChar char="»"/>
-            </a:pPr>
-            <a:r>
-              <a:rPr b="0" lang="en-US" sz="2000" strike="noStrike" u="none">
-                <a:solidFill>
-                  <a:schemeClr val="dk1"/>
-                </a:solidFill>
-                <a:effectLst/>
-                <a:uFillTx/>
-                <a:latin typeface="Calibri"/>
-              </a:rPr>
-              <a:t>Fifth level</a:t>
-            </a:r>
-            <a:endParaRPr b="0" lang="en-US" sz="2000" strike="noStrike" u="none">
-              <a:solidFill>
-                <a:schemeClr val="dk1"/>
-              </a:solidFill>
-              <a:effectLst/>
-              <a:uFillTx/>
-              <a:latin typeface="Calibri"/>
+              <a:buNone/>
+              <a:tabLst>
+                <a:tab algn="l" pos="0"/>
+              </a:tabLst>
+            </a:pPr>
+            <a:r>
+              <a:rPr b="1" lang="en-US" sz="2400" strike="noStrike" u="none">
+                <a:solidFill>
+                  <a:schemeClr val="dk1"/>
+                </a:solidFill>
+                <a:effectLst/>
+                <a:uFillTx/>
+                <a:latin typeface="Calibri"/>
+              </a:rPr>
+              <a:t>Click to edit Master text styles</a:t>
+            </a:r>
+            <a:endParaRPr b="0" lang="de-AT" sz="2400" strike="noStrike" u="none">
+              <a:solidFill>
+                <a:srgbClr val="000000"/>
+              </a:solidFill>
+              <a:effectLst/>
+              <a:uFillTx/>
+              <a:latin typeface="Arial"/>
             </a:endParaRPr>
           </a:p>
         </p:txBody>
@@ -863,8 +444,8 @@
         </p:nvSpPr>
         <p:spPr>
           <a:xfrm>
-            <a:off x="457200" y="1434960"/>
-            <a:ext cx="3007800" cy="4690800"/>
+            <a:off x="457200" y="2174760"/>
+            <a:ext cx="4039560" cy="3950640"/>
           </a:xfrm>
           <a:prstGeom prst="rect">
             <a:avLst/>
@@ -879,20 +460,21 @@
             <a:noAutofit/>
           </a:bodyPr>
           <a:p>
-            <a:pPr indent="0" defTabSz="457200">
+            <a:pPr marL="343080" indent="-343080" defTabSz="457200">
               <a:lnSpc>
                 <a:spcPct val="100000"/>
               </a:lnSpc>
               <a:spcBef>
-                <a:spcPts val="281"/>
+                <a:spcPts val="479"/>
               </a:spcBef>
-              <a:buNone/>
-              <a:tabLst>
-                <a:tab algn="l" pos="0"/>
-              </a:tabLst>
-            </a:pPr>
-            <a:r>
-              <a:rPr b="0" lang="en-US" sz="1400" strike="noStrike" u="none">
+              <a:buClr>
+                <a:srgbClr val="000000"/>
+              </a:buClr>
+              <a:buFont typeface="Arial"/>
+              <a:buChar char="•"/>
+            </a:pPr>
+            <a:r>
+              <a:rPr b="0" lang="en-US" sz="2400" strike="noStrike" u="none">
                 <a:solidFill>
                   <a:schemeClr val="dk1"/>
                 </a:solidFill>
@@ -902,13 +484,149 @@
               </a:rPr>
               <a:t>Click to edit Master text styles</a:t>
             </a:r>
-            <a:endParaRPr b="0" lang="en-US" sz="1400" strike="noStrike" u="none">
-              <a:solidFill>
-                <a:schemeClr val="dk1"/>
-              </a:solidFill>
-              <a:effectLst/>
-              <a:uFillTx/>
-              <a:latin typeface="Calibri"/>
+            <a:endParaRPr b="0" lang="de-AT" sz="2400" strike="noStrike" u="none">
+              <a:solidFill>
+                <a:srgbClr val="000000"/>
+              </a:solidFill>
+              <a:effectLst/>
+              <a:uFillTx/>
+              <a:latin typeface="Arial"/>
+            </a:endParaRPr>
+          </a:p>
+          <a:p>
+            <a:pPr lvl="1" marL="743040" indent="-285840" defTabSz="457200">
+              <a:lnSpc>
+                <a:spcPct val="100000"/>
+              </a:lnSpc>
+              <a:spcBef>
+                <a:spcPts val="400"/>
+              </a:spcBef>
+              <a:buClr>
+                <a:srgbClr val="000000"/>
+              </a:buClr>
+              <a:buFont typeface="Arial"/>
+              <a:buChar char="–"/>
+            </a:pPr>
+            <a:r>
+              <a:rPr b="0" lang="en-US" sz="2000" strike="noStrike" u="none">
+                <a:solidFill>
+                  <a:schemeClr val="dk1"/>
+                </a:solidFill>
+                <a:effectLst/>
+                <a:uFillTx/>
+                <a:latin typeface="Calibri"/>
+              </a:rPr>
+              <a:t>Second level</a:t>
+            </a:r>
+            <a:endParaRPr b="0" lang="de-AT" sz="2000" strike="noStrike" u="none">
+              <a:solidFill>
+                <a:srgbClr val="000000"/>
+              </a:solidFill>
+              <a:effectLst/>
+              <a:uFillTx/>
+              <a:latin typeface="Arial"/>
+            </a:endParaRPr>
+          </a:p>
+          <a:p>
+            <a:pPr lvl="2" marL="1143000" indent="-228600" defTabSz="457200">
+              <a:lnSpc>
+                <a:spcPct val="100000"/>
+              </a:lnSpc>
+              <a:spcBef>
+                <a:spcPts val="360"/>
+              </a:spcBef>
+              <a:buClr>
+                <a:srgbClr val="000000"/>
+              </a:buClr>
+              <a:buFont typeface="Arial"/>
+              <a:buChar char="•"/>
+            </a:pPr>
+            <a:r>
+              <a:rPr b="0" lang="en-US" sz="1800" strike="noStrike" u="none">
+                <a:solidFill>
+                  <a:schemeClr val="dk1"/>
+                </a:solidFill>
+                <a:effectLst/>
+                <a:uFillTx/>
+                <a:latin typeface="Calibri"/>
+              </a:rPr>
+              <a:t>Third level</a:t>
+            </a:r>
+            <a:endParaRPr b="0" lang="de-AT" sz="1800" strike="noStrike" u="none">
+              <a:solidFill>
+                <a:srgbClr val="000000"/>
+              </a:solidFill>
+              <a:effectLst/>
+              <a:uFillTx/>
+              <a:latin typeface="Arial"/>
+            </a:endParaRPr>
+          </a:p>
+          <a:p>
+            <a:pPr lvl="3" marL="1600200" indent="-228600" defTabSz="457200">
+              <a:lnSpc>
+                <a:spcPct val="100000"/>
+              </a:lnSpc>
+              <a:spcBef>
+                <a:spcPts val="320"/>
+              </a:spcBef>
+              <a:buClr>
+                <a:srgbClr val="000000"/>
+              </a:buClr>
+              <a:buFont typeface="Arial"/>
+              <a:buChar char="–"/>
+            </a:pPr>
+            <a:r>
+              <a:rPr b="0" lang="en-US" sz="1600" strike="noStrike" u="none">
+                <a:solidFill>
+                  <a:schemeClr val="dk1"/>
+                </a:solidFill>
+                <a:effectLst/>
+                <a:uFillTx/>
+                <a:latin typeface="Calibri"/>
+              </a:rPr>
+              <a:t>Fourth level</a:t>
+            </a:r>
+            <a:endParaRPr b="0" lang="de-AT" sz="1600" strike="noStrike" u="none">
+              <a:solidFill>
+                <a:srgbClr val="000000"/>
+              </a:solidFill>
+              <a:effectLst/>
+              <a:uFillTx/>
+              <a:latin typeface="Arial"/>
+            </a:endParaRPr>
+          </a:p>
+          <a:p>
+            <a:pPr lvl="4" marL="2057400" indent="-228600" defTabSz="457200">
+              <a:lnSpc>
+                <a:spcPct val="100000"/>
+              </a:lnSpc>
+              <a:spcBef>
+                <a:spcPts val="320"/>
+              </a:spcBef>
+              <a:buClr>
+                <a:srgbClr val="000000"/>
+              </a:buClr>
+              <a:buFont typeface="Arial"/>
+              <a:buChar char="»"/>
+            </a:pPr>
+            <a:r>
+              <a:rPr b="0" lang="en-US" sz="1600" strike="noStrike" u="none">
+                <a:solidFill>
+                  <a:schemeClr val="dk1"/>
+                </a:solidFill>
+                <a:effectLst/>
+                <a:uFillTx/>
+                <a:latin typeface="Calibri"/>
+              </a:rPr>
+              <a:t>Fifth level</a:t>
+            </a:r>
+            <a:endParaRPr b="0" lang="de-AT" sz="1600" strike="noStrike" u="none">
+              <a:solidFill>
+                <a:srgbClr val="000000"/>
+              </a:solidFill>
+              <a:effectLst/>
+              <a:uFillTx/>
+              <a:latin typeface="Arial"/>
             </a:endParaRPr>
           </a:p>
         </p:txBody>
@@ -916,6 +634,267 @@
       <p:sp>
         <p:nvSpPr>
           <p:cNvPr id="49" name="PlaceHolder 4"/>
+          <p:cNvSpPr>
+            <a:spLocks noGrp="1"/>
+          </p:cNvSpPr>
+          <p:nvPr>
+            <p:ph type="body"/>
+          </p:nvPr>
+        </p:nvSpPr>
+        <p:spPr>
+          <a:xfrm>
+            <a:off x="4645080" y="1535040"/>
+            <a:ext cx="4041000" cy="639000"/>
+          </a:xfrm>
+          <a:prstGeom prst="rect">
+            <a:avLst/>
+          </a:prstGeom>
+          <a:noFill/>
+          <a:ln w="0">
+            <a:noFill/>
+          </a:ln>
+        </p:spPr>
+        <p:txBody>
+          <a:bodyPr lIns="91440" rIns="91440" tIns="45720" bIns="45720" anchor="b">
+            <a:noAutofit/>
+          </a:bodyPr>
+          <a:p>
+            <a:pPr indent="0" defTabSz="457200">
+              <a:lnSpc>
+                <a:spcPct val="100000"/>
+              </a:lnSpc>
+              <a:spcBef>
+                <a:spcPts val="479"/>
+              </a:spcBef>
+              <a:buNone/>
+              <a:tabLst>
+                <a:tab algn="l" pos="0"/>
+              </a:tabLst>
+            </a:pPr>
+            <a:r>
+              <a:rPr b="1" lang="en-US" sz="2400" strike="noStrike" u="none">
+                <a:solidFill>
+                  <a:schemeClr val="dk1"/>
+                </a:solidFill>
+                <a:effectLst/>
+                <a:uFillTx/>
+                <a:latin typeface="Calibri"/>
+              </a:rPr>
+              <a:t>Click to edit Master text styles</a:t>
+            </a:r>
+            <a:endParaRPr b="0" lang="de-AT" sz="2400" strike="noStrike" u="none">
+              <a:solidFill>
+                <a:srgbClr val="000000"/>
+              </a:solidFill>
+              <a:effectLst/>
+              <a:uFillTx/>
+              <a:latin typeface="Arial"/>
+            </a:endParaRPr>
+          </a:p>
+        </p:txBody>
+      </p:sp>
+      <p:sp>
+        <p:nvSpPr>
+          <p:cNvPr id="50" name="PlaceHolder 5"/>
+          <p:cNvSpPr>
+            <a:spLocks noGrp="1"/>
+          </p:cNvSpPr>
+          <p:nvPr>
+            <p:ph type="body"/>
+          </p:nvPr>
+        </p:nvSpPr>
+        <p:spPr>
+          <a:xfrm>
+            <a:off x="4645080" y="2174760"/>
+            <a:ext cx="4041000" cy="3950640"/>
+          </a:xfrm>
+          <a:prstGeom prst="rect">
+            <a:avLst/>
+          </a:prstGeom>
+          <a:noFill/>
+          <a:ln w="0">
+            <a:noFill/>
+          </a:ln>
+        </p:spPr>
+        <p:txBody>
+          <a:bodyPr lIns="91440" rIns="91440" tIns="45720" bIns="45720" anchor="t">
+            <a:noAutofit/>
+          </a:bodyPr>
+          <a:p>
+            <a:pPr marL="343080" indent="-343080" defTabSz="457200">
+              <a:lnSpc>
+                <a:spcPct val="100000"/>
+              </a:lnSpc>
+              <a:spcBef>
+                <a:spcPts val="479"/>
+              </a:spcBef>
+              <a:buClr>
+                <a:srgbClr val="000000"/>
+              </a:buClr>
+              <a:buFont typeface="Arial"/>
+              <a:buChar char="•"/>
+            </a:pPr>
+            <a:r>
+              <a:rPr b="0" lang="en-US" sz="2400" strike="noStrike" u="none">
+                <a:solidFill>
+                  <a:schemeClr val="dk1"/>
+                </a:solidFill>
+                <a:effectLst/>
+                <a:uFillTx/>
+                <a:latin typeface="Calibri"/>
+              </a:rPr>
+              <a:t>Click to edit Master text styles</a:t>
+            </a:r>
+            <a:endParaRPr b="0" lang="de-AT" sz="2400" strike="noStrike" u="none">
+              <a:solidFill>
+                <a:srgbClr val="000000"/>
+              </a:solidFill>
+              <a:effectLst/>
+              <a:uFillTx/>
+              <a:latin typeface="Arial"/>
+            </a:endParaRPr>
+          </a:p>
+          <a:p>
+            <a:pPr lvl="1" marL="743040" indent="-285840" defTabSz="457200">
+              <a:lnSpc>
+                <a:spcPct val="100000"/>
+              </a:lnSpc>
+              <a:spcBef>
+                <a:spcPts val="400"/>
+              </a:spcBef>
+              <a:buClr>
+                <a:srgbClr val="000000"/>
+              </a:buClr>
+              <a:buFont typeface="Arial"/>
+              <a:buChar char="–"/>
+            </a:pPr>
+            <a:r>
+              <a:rPr b="0" lang="en-US" sz="2000" strike="noStrike" u="none">
+                <a:solidFill>
+                  <a:schemeClr val="dk1"/>
+                </a:solidFill>
+                <a:effectLst/>
+                <a:uFillTx/>
+                <a:latin typeface="Calibri"/>
+              </a:rPr>
+              <a:t>Second level</a:t>
+            </a:r>
+            <a:endParaRPr b="0" lang="de-AT" sz="2000" strike="noStrike" u="none">
+              <a:solidFill>
+                <a:srgbClr val="000000"/>
+              </a:solidFill>
+              <a:effectLst/>
+              <a:uFillTx/>
+              <a:latin typeface="Arial"/>
+            </a:endParaRPr>
+          </a:p>
+          <a:p>
+            <a:pPr lvl="2" marL="1143000" indent="-228600" defTabSz="457200">
+              <a:lnSpc>
+                <a:spcPct val="100000"/>
+              </a:lnSpc>
+              <a:spcBef>
+                <a:spcPts val="360"/>
+              </a:spcBef>
+              <a:buClr>
+                <a:srgbClr val="000000"/>
+              </a:buClr>
+              <a:buFont typeface="Arial"/>
+              <a:buChar char="•"/>
+            </a:pPr>
+            <a:r>
+              <a:rPr b="0" lang="en-US" sz="1800" strike="noStrike" u="none">
+                <a:solidFill>
+                  <a:schemeClr val="dk1"/>
+                </a:solidFill>
+                <a:effectLst/>
+                <a:uFillTx/>
+                <a:latin typeface="Calibri"/>
+              </a:rPr>
+              <a:t>Third level</a:t>
+            </a:r>
+            <a:endParaRPr b="0" lang="de-AT" sz="1800" strike="noStrike" u="none">
+              <a:solidFill>
+                <a:srgbClr val="000000"/>
+              </a:solidFill>
+              <a:effectLst/>
+              <a:uFillTx/>
+              <a:latin typeface="Arial"/>
+            </a:endParaRPr>
+          </a:p>
+          <a:p>
+            <a:pPr lvl="3" marL="1600200" indent="-228600" defTabSz="457200">
+              <a:lnSpc>
+                <a:spcPct val="100000"/>
+              </a:lnSpc>
+              <a:spcBef>
+                <a:spcPts val="320"/>
+              </a:spcBef>
+              <a:buClr>
+                <a:srgbClr val="000000"/>
+              </a:buClr>
+              <a:buFont typeface="Arial"/>
+              <a:buChar char="–"/>
+            </a:pPr>
+            <a:r>
+              <a:rPr b="0" lang="en-US" sz="1600" strike="noStrike" u="none">
+                <a:solidFill>
+                  <a:schemeClr val="dk1"/>
+                </a:solidFill>
+                <a:effectLst/>
+                <a:uFillTx/>
+                <a:latin typeface="Calibri"/>
+              </a:rPr>
+              <a:t>Fourth level</a:t>
+            </a:r>
+            <a:endParaRPr b="0" lang="de-AT" sz="1600" strike="noStrike" u="none">
+              <a:solidFill>
+                <a:srgbClr val="000000"/>
+              </a:solidFill>
+              <a:effectLst/>
+              <a:uFillTx/>
+              <a:latin typeface="Arial"/>
+            </a:endParaRPr>
+          </a:p>
+          <a:p>
+            <a:pPr lvl="4" marL="2057400" indent="-228600" defTabSz="457200">
+              <a:lnSpc>
+                <a:spcPct val="100000"/>
+              </a:lnSpc>
+              <a:spcBef>
+                <a:spcPts val="320"/>
+              </a:spcBef>
+              <a:buClr>
+                <a:srgbClr val="000000"/>
+              </a:buClr>
+              <a:buFont typeface="Arial"/>
+              <a:buChar char="»"/>
+            </a:pPr>
+            <a:r>
+              <a:rPr b="0" lang="en-US" sz="1600" strike="noStrike" u="none">
+                <a:solidFill>
+                  <a:schemeClr val="dk1"/>
+                </a:solidFill>
+                <a:effectLst/>
+                <a:uFillTx/>
+                <a:latin typeface="Calibri"/>
+              </a:rPr>
+              <a:t>Fifth level</a:t>
+            </a:r>
+            <a:endParaRPr b="0" lang="de-AT" sz="1600" strike="noStrike" u="none">
+              <a:solidFill>
+                <a:srgbClr val="000000"/>
+              </a:solidFill>
+              <a:effectLst/>
+              <a:uFillTx/>
+              <a:latin typeface="Arial"/>
+            </a:endParaRPr>
+          </a:p>
+        </p:txBody>
+      </p:sp>
+      <p:sp>
+        <p:nvSpPr>
+          <p:cNvPr id="51" name="PlaceHolder 6"/>
           <p:cNvSpPr>
             <a:spLocks noGrp="1"/>
           </p:cNvSpPr>
@@ -926,7 +905,7 @@
         <p:spPr>
           <a:xfrm>
             <a:off x="457200" y="6356520"/>
-            <a:ext cx="2133360" cy="364680"/>
+            <a:ext cx="2133000" cy="364320"/>
           </a:xfrm>
           <a:prstGeom prst="rect">
             <a:avLst/>
@@ -946,6 +925,9 @@
                 <a:spcPct val="100000"/>
               </a:lnSpc>
               <a:buNone/>
+              <a:tabLst>
+                <a:tab algn="l" pos="0"/>
+              </a:tabLst>
               <a:defRPr b="0" lang="en-US" sz="1200" strike="noStrike" u="none">
                 <a:solidFill>
                   <a:schemeClr val="dk1">
@@ -964,6 +946,9 @@
                 <a:spcPct val="100000"/>
               </a:lnSpc>
               <a:buNone/>
+              <a:tabLst>
+                <a:tab algn="l" pos="0"/>
+              </a:tabLst>
             </a:pPr>
             <a:r>
               <a:rPr b="0" lang="en-US" sz="1200" strike="noStrike" u="none">
@@ -991,7 +976,7 @@
       </p:sp>
       <p:sp>
         <p:nvSpPr>
-          <p:cNvPr id="50" name="PlaceHolder 5"/>
+          <p:cNvPr id="52" name="PlaceHolder 7"/>
           <p:cNvSpPr>
             <a:spLocks noGrp="1"/>
           </p:cNvSpPr>
@@ -1002,7 +987,7 @@
         <p:spPr>
           <a:xfrm>
             <a:off x="3124080" y="6356520"/>
-            <a:ext cx="2895120" cy="364680"/>
+            <a:ext cx="2894760" cy="364320"/>
           </a:xfrm>
           <a:prstGeom prst="rect">
             <a:avLst/>
@@ -1018,7 +1003,13 @@
           </a:bodyPr>
           <a:lstStyle>
             <a:lvl1pPr indent="0" algn="ctr">
-              <a:buNone/>
+              <a:lnSpc>
+                <a:spcPct val="100000"/>
+              </a:lnSpc>
+              <a:buNone/>
+              <a:tabLst>
+                <a:tab algn="l" pos="0"/>
+              </a:tabLst>
               <a:defRPr b="0" lang="de-AT" sz="1400" strike="noStrike" u="none">
                 <a:solidFill>
                   <a:srgbClr val="000000"/>
@@ -1031,7 +1022,13 @@
           </a:lstStyle>
           <a:p>
             <a:pPr indent="0" algn="ctr">
-              <a:buNone/>
+              <a:lnSpc>
+                <a:spcPct val="100000"/>
+              </a:lnSpc>
+              <a:buNone/>
+              <a:tabLst>
+                <a:tab algn="l" pos="0"/>
+              </a:tabLst>
             </a:pPr>
             <a:r>
               <a:rPr b="0" lang="de-AT" sz="1400" strike="noStrike" u="none">
@@ -1057,7 +1054,7 @@
       </p:sp>
       <p:sp>
         <p:nvSpPr>
-          <p:cNvPr id="51" name="PlaceHolder 6"/>
+          <p:cNvPr id="53" name="PlaceHolder 8"/>
           <p:cNvSpPr>
             <a:spLocks noGrp="1"/>
           </p:cNvSpPr>
@@ -1068,7 +1065,7 @@
         <p:spPr>
           <a:xfrm>
             <a:off x="6553080" y="6356520"/>
-            <a:ext cx="2133360" cy="364680"/>
+            <a:ext cx="2133000" cy="364320"/>
           </a:xfrm>
           <a:prstGeom prst="rect">
             <a:avLst/>
@@ -1088,6 +1085,9 @@
                 <a:spcPct val="100000"/>
               </a:lnSpc>
               <a:buNone/>
+              <a:tabLst>
+                <a:tab algn="l" pos="0"/>
+              </a:tabLst>
               <a:defRPr b="0" lang="en-US" sz="1200" strike="noStrike" u="none">
                 <a:solidFill>
                   <a:schemeClr val="dk1">
@@ -1106,8 +1106,11 @@
                 <a:spcPct val="100000"/>
               </a:lnSpc>
               <a:buNone/>
-            </a:pPr>
-            <a:fld id="{B0516BF5-D3ED-47C6-8EB5-3E23C5D38433}" type="slidenum">
+              <a:tabLst>
+                <a:tab algn="l" pos="0"/>
+              </a:tabLst>
+            </a:pPr>
+            <a:fld id="{50D5F8FA-7ADB-4112-AEF8-C7821CB7EB65}" type="slidenum">
               <a:rPr b="0" lang="en-US" sz="1200" strike="noStrike" u="none">
                 <a:solidFill>
                   <a:schemeClr val="dk1">
@@ -1137,6 +1140,927 @@
 </file>
 
 <file path=ppt/slideLayouts/slideLayout11.xml><?xml version="1.0" encoding="utf-8"?>
+<p:sldLayout xmlns:a="http://schemas.openxmlformats.org/drawingml/2006/main" xmlns:p="http://schemas.openxmlformats.org/presentationml/2006/main" xmlns:r="http://schemas.openxmlformats.org/officeDocument/2006/relationships" xmlns:p14="http://schemas.microsoft.com/office/powerpoint/2010/main" xmlns:p15="http://schemas.microsoft.com/office/powerpoint/2012/main" xmlns:mc="http://schemas.openxmlformats.org/markup-compatibility/2006" type="titleOnly" preserve="1">
+  <p:cSld name="Title Only">
+    <p:bg>
+      <p:bgPr>
+        <a:solidFill>
+          <a:srgbClr val="ffffff"/>
+        </a:solidFill>
+      </p:bgPr>
+    </p:bg>
+    <p:spTree>
+      <p:nvGrpSpPr>
+        <p:cNvPr id="1" name=""/>
+        <p:cNvGrpSpPr/>
+        <p:nvPr/>
+      </p:nvGrpSpPr>
+      <p:grpSpPr>
+        <a:xfrm>
+          <a:off x="0" y="0"/>
+          <a:ext cx="0" cy="0"/>
+          <a:chOff x="0" y="0"/>
+          <a:chExt cx="0" cy="0"/>
+        </a:xfrm>
+      </p:grpSpPr>
+      <p:sp>
+        <p:nvSpPr>
+          <p:cNvPr id="54" name="PlaceHolder 1"/>
+          <p:cNvSpPr>
+            <a:spLocks noGrp="1"/>
+          </p:cNvSpPr>
+          <p:nvPr>
+            <p:ph type="title"/>
+          </p:nvPr>
+        </p:nvSpPr>
+        <p:spPr>
+          <a:xfrm>
+            <a:off x="457200" y="274680"/>
+            <a:ext cx="8228880" cy="1142280"/>
+          </a:xfrm>
+          <a:prstGeom prst="rect">
+            <a:avLst/>
+          </a:prstGeom>
+          <a:noFill/>
+          <a:ln w="0">
+            <a:noFill/>
+          </a:ln>
+        </p:spPr>
+        <p:txBody>
+          <a:bodyPr lIns="91440" rIns="91440" tIns="45720" bIns="45720" anchor="ctr">
+            <a:noAutofit/>
+          </a:bodyPr>
+          <a:p>
+            <a:pPr indent="0" algn="ctr" defTabSz="457200">
+              <a:lnSpc>
+                <a:spcPct val="100000"/>
+              </a:lnSpc>
+              <a:buNone/>
+              <a:tabLst>
+                <a:tab algn="l" pos="0"/>
+              </a:tabLst>
+            </a:pPr>
+            <a:r>
+              <a:rPr b="0" lang="en-US" sz="4400" strike="noStrike" u="none">
+                <a:solidFill>
+                  <a:schemeClr val="dk1"/>
+                </a:solidFill>
+                <a:effectLst/>
+                <a:uFillTx/>
+                <a:latin typeface="Calibri"/>
+              </a:rPr>
+              <a:t>Click to edit Master title style</a:t>
+            </a:r>
+            <a:endParaRPr b="0" lang="de-AT" sz="4400" strike="noStrike" u="none">
+              <a:solidFill>
+                <a:srgbClr val="000000"/>
+              </a:solidFill>
+              <a:effectLst/>
+              <a:uFillTx/>
+              <a:latin typeface="Arial"/>
+            </a:endParaRPr>
+          </a:p>
+        </p:txBody>
+      </p:sp>
+      <p:sp>
+        <p:nvSpPr>
+          <p:cNvPr id="55" name="PlaceHolder 2"/>
+          <p:cNvSpPr>
+            <a:spLocks noGrp="1"/>
+          </p:cNvSpPr>
+          <p:nvPr>
+            <p:ph type="dt" idx="31"/>
+          </p:nvPr>
+        </p:nvSpPr>
+        <p:spPr>
+          <a:xfrm>
+            <a:off x="457200" y="6356520"/>
+            <a:ext cx="2133000" cy="364320"/>
+          </a:xfrm>
+          <a:prstGeom prst="rect">
+            <a:avLst/>
+          </a:prstGeom>
+          <a:noFill/>
+          <a:ln w="0">
+            <a:noFill/>
+          </a:ln>
+        </p:spPr>
+        <p:txBody>
+          <a:bodyPr lIns="91440" rIns="91440" tIns="45720" bIns="45720" anchor="ctr">
+            <a:noAutofit/>
+          </a:bodyPr>
+          <a:lstStyle>
+            <a:lvl1pPr indent="0" defTabSz="457200">
+              <a:lnSpc>
+                <a:spcPct val="100000"/>
+              </a:lnSpc>
+              <a:buNone/>
+              <a:tabLst>
+                <a:tab algn="l" pos="0"/>
+              </a:tabLst>
+              <a:defRPr b="0" lang="en-US" sz="1200" strike="noStrike" u="none">
+                <a:solidFill>
+                  <a:schemeClr val="dk1">
+                    <a:tint val="75000"/>
+                  </a:schemeClr>
+                </a:solidFill>
+                <a:effectLst/>
+                <a:uFillTx/>
+                <a:latin typeface="Calibri"/>
+              </a:defRPr>
+            </a:lvl1pPr>
+          </a:lstStyle>
+          <a:p>
+            <a:pPr indent="0" defTabSz="457200">
+              <a:lnSpc>
+                <a:spcPct val="100000"/>
+              </a:lnSpc>
+              <a:buNone/>
+              <a:tabLst>
+                <a:tab algn="l" pos="0"/>
+              </a:tabLst>
+            </a:pPr>
+            <a:r>
+              <a:rPr b="0" lang="en-US" sz="1200" strike="noStrike" u="none">
+                <a:solidFill>
+                  <a:schemeClr val="dk1">
+                    <a:tint val="75000"/>
+                  </a:schemeClr>
+                </a:solidFill>
+                <a:effectLst/>
+                <a:uFillTx/>
+                <a:latin typeface="Calibri"/>
+              </a:rPr>
+              <a:t>&lt;Datum/Uhrzeit&gt;</a:t>
+            </a:r>
+            <a:endParaRPr b="0" lang="de-AT" sz="1200" strike="noStrike" u="none">
+              <a:solidFill>
+                <a:srgbClr val="000000"/>
+              </a:solidFill>
+              <a:effectLst/>
+              <a:uFillTx/>
+              <a:latin typeface="Times New Roman"/>
+            </a:endParaRPr>
+          </a:p>
+        </p:txBody>
+      </p:sp>
+      <p:sp>
+        <p:nvSpPr>
+          <p:cNvPr id="56" name="PlaceHolder 3"/>
+          <p:cNvSpPr>
+            <a:spLocks noGrp="1"/>
+          </p:cNvSpPr>
+          <p:nvPr>
+            <p:ph type="ftr" idx="32"/>
+          </p:nvPr>
+        </p:nvSpPr>
+        <p:spPr>
+          <a:xfrm>
+            <a:off x="3124080" y="6356520"/>
+            <a:ext cx="2894760" cy="364320"/>
+          </a:xfrm>
+          <a:prstGeom prst="rect">
+            <a:avLst/>
+          </a:prstGeom>
+          <a:noFill/>
+          <a:ln w="0">
+            <a:noFill/>
+          </a:ln>
+        </p:spPr>
+        <p:txBody>
+          <a:bodyPr lIns="91440" rIns="91440" tIns="45720" bIns="45720" anchor="ctr">
+            <a:noAutofit/>
+          </a:bodyPr>
+          <a:lstStyle>
+            <a:lvl1pPr indent="0" algn="ctr">
+              <a:lnSpc>
+                <a:spcPct val="100000"/>
+              </a:lnSpc>
+              <a:buNone/>
+              <a:tabLst>
+                <a:tab algn="l" pos="0"/>
+              </a:tabLst>
+              <a:defRPr b="0" lang="de-AT" sz="1400" strike="noStrike" u="none">
+                <a:solidFill>
+                  <a:srgbClr val="000000"/>
+                </a:solidFill>
+                <a:effectLst/>
+                <a:uFillTx/>
+                <a:latin typeface="Times New Roman"/>
+              </a:defRPr>
+            </a:lvl1pPr>
+          </a:lstStyle>
+          <a:p>
+            <a:pPr indent="0" algn="ctr">
+              <a:lnSpc>
+                <a:spcPct val="100000"/>
+              </a:lnSpc>
+              <a:buNone/>
+              <a:tabLst>
+                <a:tab algn="l" pos="0"/>
+              </a:tabLst>
+            </a:pPr>
+            <a:r>
+              <a:rPr b="0" lang="de-AT" sz="1400" strike="noStrike" u="none">
+                <a:solidFill>
+                  <a:srgbClr val="000000"/>
+                </a:solidFill>
+                <a:effectLst/>
+                <a:uFillTx/>
+                <a:latin typeface="Times New Roman"/>
+              </a:rPr>
+              <a:t>&lt;Fußzeile&gt;</a:t>
+            </a:r>
+            <a:endParaRPr b="0" lang="de-AT" sz="1400" strike="noStrike" u="none">
+              <a:solidFill>
+                <a:srgbClr val="000000"/>
+              </a:solidFill>
+              <a:effectLst/>
+              <a:uFillTx/>
+              <a:latin typeface="Times New Roman"/>
+            </a:endParaRPr>
+          </a:p>
+        </p:txBody>
+      </p:sp>
+      <p:sp>
+        <p:nvSpPr>
+          <p:cNvPr id="57" name="PlaceHolder 4"/>
+          <p:cNvSpPr>
+            <a:spLocks noGrp="1"/>
+          </p:cNvSpPr>
+          <p:nvPr>
+            <p:ph type="sldNum" idx="33"/>
+          </p:nvPr>
+        </p:nvSpPr>
+        <p:spPr>
+          <a:xfrm>
+            <a:off x="6553080" y="6356520"/>
+            <a:ext cx="2133000" cy="364320"/>
+          </a:xfrm>
+          <a:prstGeom prst="rect">
+            <a:avLst/>
+          </a:prstGeom>
+          <a:noFill/>
+          <a:ln w="0">
+            <a:noFill/>
+          </a:ln>
+        </p:spPr>
+        <p:txBody>
+          <a:bodyPr lIns="91440" rIns="91440" tIns="45720" bIns="45720" anchor="ctr">
+            <a:noAutofit/>
+          </a:bodyPr>
+          <a:lstStyle>
+            <a:lvl1pPr indent="0" algn="r" defTabSz="457200">
+              <a:lnSpc>
+                <a:spcPct val="100000"/>
+              </a:lnSpc>
+              <a:buNone/>
+              <a:tabLst>
+                <a:tab algn="l" pos="0"/>
+              </a:tabLst>
+              <a:defRPr b="0" lang="en-US" sz="1200" strike="noStrike" u="none">
+                <a:solidFill>
+                  <a:schemeClr val="dk1">
+                    <a:tint val="75000"/>
+                  </a:schemeClr>
+                </a:solidFill>
+                <a:effectLst/>
+                <a:uFillTx/>
+                <a:latin typeface="Calibri"/>
+              </a:defRPr>
+            </a:lvl1pPr>
+          </a:lstStyle>
+          <a:p>
+            <a:pPr indent="0" algn="r" defTabSz="457200">
+              <a:lnSpc>
+                <a:spcPct val="100000"/>
+              </a:lnSpc>
+              <a:buNone/>
+              <a:tabLst>
+                <a:tab algn="l" pos="0"/>
+              </a:tabLst>
+            </a:pPr>
+            <a:fld id="{60C76100-E05F-4E85-A35E-5806B5C3988D}" type="slidenum">
+              <a:rPr b="0" lang="en-US" sz="1200" strike="noStrike" u="none">
+                <a:solidFill>
+                  <a:schemeClr val="dk1">
+                    <a:tint val="75000"/>
+                  </a:schemeClr>
+                </a:solidFill>
+                <a:effectLst/>
+                <a:uFillTx/>
+                <a:latin typeface="Calibri"/>
+              </a:rPr>
+              <a:t>&lt;Foliennummer&gt;</a:t>
+            </a:fld>
+            <a:endParaRPr b="0" lang="de-AT" sz="1200" strike="noStrike" u="none">
+              <a:solidFill>
+                <a:srgbClr val="000000"/>
+              </a:solidFill>
+              <a:effectLst/>
+              <a:uFillTx/>
+              <a:latin typeface="Times New Roman"/>
+            </a:endParaRPr>
+          </a:p>
+        </p:txBody>
+      </p:sp>
+    </p:spTree>
+  </p:cSld>
+</p:sldLayout>
+</file>
+
+<file path=ppt/slideLayouts/slideLayout2.xml><?xml version="1.0" encoding="utf-8"?>
+<p:sldLayout xmlns:a="http://schemas.openxmlformats.org/drawingml/2006/main" xmlns:p="http://schemas.openxmlformats.org/presentationml/2006/main" xmlns:r="http://schemas.openxmlformats.org/officeDocument/2006/relationships" xmlns:p14="http://schemas.microsoft.com/office/powerpoint/2010/main" xmlns:p15="http://schemas.microsoft.com/office/powerpoint/2012/main" xmlns:mc="http://schemas.openxmlformats.org/markup-compatibility/2006" type="blank" preserve="1">
+  <p:cSld name="Content with Caption">
+    <p:bg>
+      <p:bgPr>
+        <a:solidFill>
+          <a:srgbClr val="ffffff"/>
+        </a:solidFill>
+      </p:bgPr>
+    </p:bg>
+    <p:spTree>
+      <p:nvGrpSpPr>
+        <p:cNvPr id="1" name=""/>
+        <p:cNvGrpSpPr/>
+        <p:nvPr/>
+      </p:nvGrpSpPr>
+      <p:grpSpPr>
+        <a:xfrm>
+          <a:off x="0" y="0"/>
+          <a:ext cx="0" cy="0"/>
+          <a:chOff x="0" y="0"/>
+          <a:chExt cx="0" cy="0"/>
+        </a:xfrm>
+      </p:grpSpPr>
+      <p:sp>
+        <p:nvSpPr>
+          <p:cNvPr id="3" name="PlaceHolder 1"/>
+          <p:cNvSpPr>
+            <a:spLocks noGrp="1"/>
+          </p:cNvSpPr>
+          <p:nvPr>
+            <p:ph type="title"/>
+          </p:nvPr>
+        </p:nvSpPr>
+        <p:spPr>
+          <a:xfrm>
+            <a:off x="457200" y="272880"/>
+            <a:ext cx="3007440" cy="1161360"/>
+          </a:xfrm>
+          <a:prstGeom prst="rect">
+            <a:avLst/>
+          </a:prstGeom>
+          <a:noFill/>
+          <a:ln w="0">
+            <a:noFill/>
+          </a:ln>
+        </p:spPr>
+        <p:txBody>
+          <a:bodyPr lIns="91440" rIns="91440" tIns="45720" bIns="45720" anchor="b">
+            <a:noAutofit/>
+          </a:bodyPr>
+          <a:p>
+            <a:pPr indent="0" defTabSz="457200">
+              <a:lnSpc>
+                <a:spcPct val="100000"/>
+              </a:lnSpc>
+              <a:buNone/>
+              <a:tabLst>
+                <a:tab algn="l" pos="0"/>
+              </a:tabLst>
+            </a:pPr>
+            <a:r>
+              <a:rPr b="1" lang="en-US" sz="2000" strike="noStrike" u="none">
+                <a:solidFill>
+                  <a:schemeClr val="dk1"/>
+                </a:solidFill>
+                <a:effectLst/>
+                <a:uFillTx/>
+                <a:latin typeface="Calibri"/>
+              </a:rPr>
+              <a:t>Click to edit Master title style</a:t>
+            </a:r>
+            <a:endParaRPr b="0" lang="de-AT" sz="2000" strike="noStrike" u="none">
+              <a:solidFill>
+                <a:srgbClr val="000000"/>
+              </a:solidFill>
+              <a:effectLst/>
+              <a:uFillTx/>
+              <a:latin typeface="Arial"/>
+            </a:endParaRPr>
+          </a:p>
+        </p:txBody>
+      </p:sp>
+      <p:sp>
+        <p:nvSpPr>
+          <p:cNvPr id="4" name="PlaceHolder 2"/>
+          <p:cNvSpPr>
+            <a:spLocks noGrp="1"/>
+          </p:cNvSpPr>
+          <p:nvPr>
+            <p:ph type="body"/>
+          </p:nvPr>
+        </p:nvSpPr>
+        <p:spPr>
+          <a:xfrm>
+            <a:off x="3575160" y="272880"/>
+            <a:ext cx="5110920" cy="5852520"/>
+          </a:xfrm>
+          <a:prstGeom prst="rect">
+            <a:avLst/>
+          </a:prstGeom>
+          <a:noFill/>
+          <a:ln w="0">
+            <a:noFill/>
+          </a:ln>
+        </p:spPr>
+        <p:txBody>
+          <a:bodyPr lIns="91440" rIns="91440" tIns="45720" bIns="45720" anchor="t">
+            <a:noAutofit/>
+          </a:bodyPr>
+          <a:p>
+            <a:pPr marL="343080" indent="-343080" defTabSz="457200">
+              <a:lnSpc>
+                <a:spcPct val="100000"/>
+              </a:lnSpc>
+              <a:spcBef>
+                <a:spcPts val="641"/>
+              </a:spcBef>
+              <a:buClr>
+                <a:srgbClr val="000000"/>
+              </a:buClr>
+              <a:buFont typeface="Arial"/>
+              <a:buChar char="•"/>
+            </a:pPr>
+            <a:r>
+              <a:rPr b="0" lang="en-US" sz="3200" strike="noStrike" u="none">
+                <a:solidFill>
+                  <a:schemeClr val="dk1"/>
+                </a:solidFill>
+                <a:effectLst/>
+                <a:uFillTx/>
+                <a:latin typeface="Calibri"/>
+              </a:rPr>
+              <a:t>Click to edit Master text styles</a:t>
+            </a:r>
+            <a:endParaRPr b="0" lang="de-AT" sz="3200" strike="noStrike" u="none">
+              <a:solidFill>
+                <a:srgbClr val="000000"/>
+              </a:solidFill>
+              <a:effectLst/>
+              <a:uFillTx/>
+              <a:latin typeface="Arial"/>
+            </a:endParaRPr>
+          </a:p>
+          <a:p>
+            <a:pPr lvl="1" marL="743040" indent="-285840" defTabSz="457200">
+              <a:lnSpc>
+                <a:spcPct val="100000"/>
+              </a:lnSpc>
+              <a:spcBef>
+                <a:spcPts val="561"/>
+              </a:spcBef>
+              <a:buClr>
+                <a:srgbClr val="000000"/>
+              </a:buClr>
+              <a:buFont typeface="Arial"/>
+              <a:buChar char="–"/>
+            </a:pPr>
+            <a:r>
+              <a:rPr b="0" lang="en-US" sz="2800" strike="noStrike" u="none">
+                <a:solidFill>
+                  <a:schemeClr val="dk1"/>
+                </a:solidFill>
+                <a:effectLst/>
+                <a:uFillTx/>
+                <a:latin typeface="Calibri"/>
+              </a:rPr>
+              <a:t>Second level</a:t>
+            </a:r>
+            <a:endParaRPr b="0" lang="de-AT" sz="2800" strike="noStrike" u="none">
+              <a:solidFill>
+                <a:srgbClr val="000000"/>
+              </a:solidFill>
+              <a:effectLst/>
+              <a:uFillTx/>
+              <a:latin typeface="Arial"/>
+            </a:endParaRPr>
+          </a:p>
+          <a:p>
+            <a:pPr lvl="2" marL="1143000" indent="-228600" defTabSz="457200">
+              <a:lnSpc>
+                <a:spcPct val="100000"/>
+              </a:lnSpc>
+              <a:spcBef>
+                <a:spcPts val="479"/>
+              </a:spcBef>
+              <a:buClr>
+                <a:srgbClr val="000000"/>
+              </a:buClr>
+              <a:buFont typeface="Arial"/>
+              <a:buChar char="•"/>
+            </a:pPr>
+            <a:r>
+              <a:rPr b="0" lang="en-US" sz="2400" strike="noStrike" u="none">
+                <a:solidFill>
+                  <a:schemeClr val="dk1"/>
+                </a:solidFill>
+                <a:effectLst/>
+                <a:uFillTx/>
+                <a:latin typeface="Calibri"/>
+              </a:rPr>
+              <a:t>Third level</a:t>
+            </a:r>
+            <a:endParaRPr b="0" lang="de-AT" sz="2400" strike="noStrike" u="none">
+              <a:solidFill>
+                <a:srgbClr val="000000"/>
+              </a:solidFill>
+              <a:effectLst/>
+              <a:uFillTx/>
+              <a:latin typeface="Arial"/>
+            </a:endParaRPr>
+          </a:p>
+          <a:p>
+            <a:pPr lvl="3" marL="1600200" indent="-228600" defTabSz="457200">
+              <a:lnSpc>
+                <a:spcPct val="100000"/>
+              </a:lnSpc>
+              <a:spcBef>
+                <a:spcPts val="400"/>
+              </a:spcBef>
+              <a:buClr>
+                <a:srgbClr val="000000"/>
+              </a:buClr>
+              <a:buFont typeface="Arial"/>
+              <a:buChar char="–"/>
+            </a:pPr>
+            <a:r>
+              <a:rPr b="0" lang="en-US" sz="2000" strike="noStrike" u="none">
+                <a:solidFill>
+                  <a:schemeClr val="dk1"/>
+                </a:solidFill>
+                <a:effectLst/>
+                <a:uFillTx/>
+                <a:latin typeface="Calibri"/>
+              </a:rPr>
+              <a:t>Fourth level</a:t>
+            </a:r>
+            <a:endParaRPr b="0" lang="de-AT" sz="2000" strike="noStrike" u="none">
+              <a:solidFill>
+                <a:srgbClr val="000000"/>
+              </a:solidFill>
+              <a:effectLst/>
+              <a:uFillTx/>
+              <a:latin typeface="Arial"/>
+            </a:endParaRPr>
+          </a:p>
+          <a:p>
+            <a:pPr lvl="4" marL="2057400" indent="-228600" defTabSz="457200">
+              <a:lnSpc>
+                <a:spcPct val="100000"/>
+              </a:lnSpc>
+              <a:spcBef>
+                <a:spcPts val="400"/>
+              </a:spcBef>
+              <a:buClr>
+                <a:srgbClr val="000000"/>
+              </a:buClr>
+              <a:buFont typeface="Arial"/>
+              <a:buChar char="»"/>
+            </a:pPr>
+            <a:r>
+              <a:rPr b="0" lang="en-US" sz="2000" strike="noStrike" u="none">
+                <a:solidFill>
+                  <a:schemeClr val="dk1"/>
+                </a:solidFill>
+                <a:effectLst/>
+                <a:uFillTx/>
+                <a:latin typeface="Calibri"/>
+              </a:rPr>
+              <a:t>Fifth level</a:t>
+            </a:r>
+            <a:endParaRPr b="0" lang="de-AT" sz="2000" strike="noStrike" u="none">
+              <a:solidFill>
+                <a:srgbClr val="000000"/>
+              </a:solidFill>
+              <a:effectLst/>
+              <a:uFillTx/>
+              <a:latin typeface="Arial"/>
+            </a:endParaRPr>
+          </a:p>
+        </p:txBody>
+      </p:sp>
+      <p:sp>
+        <p:nvSpPr>
+          <p:cNvPr id="5" name="PlaceHolder 3"/>
+          <p:cNvSpPr>
+            <a:spLocks noGrp="1"/>
+          </p:cNvSpPr>
+          <p:nvPr>
+            <p:ph type="body"/>
+          </p:nvPr>
+        </p:nvSpPr>
+        <p:spPr>
+          <a:xfrm>
+            <a:off x="457200" y="1434960"/>
+            <a:ext cx="3007440" cy="4690440"/>
+          </a:xfrm>
+          <a:prstGeom prst="rect">
+            <a:avLst/>
+          </a:prstGeom>
+          <a:noFill/>
+          <a:ln w="0">
+            <a:noFill/>
+          </a:ln>
+        </p:spPr>
+        <p:txBody>
+          <a:bodyPr lIns="91440" rIns="91440" tIns="45720" bIns="45720" anchor="t">
+            <a:noAutofit/>
+          </a:bodyPr>
+          <a:p>
+            <a:pPr indent="0" defTabSz="457200">
+              <a:lnSpc>
+                <a:spcPct val="100000"/>
+              </a:lnSpc>
+              <a:spcBef>
+                <a:spcPts val="281"/>
+              </a:spcBef>
+              <a:buNone/>
+              <a:tabLst>
+                <a:tab algn="l" pos="0"/>
+              </a:tabLst>
+            </a:pPr>
+            <a:r>
+              <a:rPr b="0" lang="en-US" sz="1400" strike="noStrike" u="none">
+                <a:solidFill>
+                  <a:schemeClr val="dk1"/>
+                </a:solidFill>
+                <a:effectLst/>
+                <a:uFillTx/>
+                <a:latin typeface="Calibri"/>
+              </a:rPr>
+              <a:t>Click to edit Master text styles</a:t>
+            </a:r>
+            <a:endParaRPr b="0" lang="de-AT" sz="1400" strike="noStrike" u="none">
+              <a:solidFill>
+                <a:srgbClr val="000000"/>
+              </a:solidFill>
+              <a:effectLst/>
+              <a:uFillTx/>
+              <a:latin typeface="Arial"/>
+            </a:endParaRPr>
+          </a:p>
+        </p:txBody>
+      </p:sp>
+      <p:sp>
+        <p:nvSpPr>
+          <p:cNvPr id="6" name="PlaceHolder 4"/>
+          <p:cNvSpPr>
+            <a:spLocks noGrp="1"/>
+          </p:cNvSpPr>
+          <p:nvPr>
+            <p:ph type="dt" idx="4"/>
+          </p:nvPr>
+        </p:nvSpPr>
+        <p:spPr>
+          <a:xfrm>
+            <a:off x="457200" y="6356520"/>
+            <a:ext cx="2133000" cy="364320"/>
+          </a:xfrm>
+          <a:prstGeom prst="rect">
+            <a:avLst/>
+          </a:prstGeom>
+          <a:noFill/>
+          <a:ln w="0">
+            <a:noFill/>
+          </a:ln>
+        </p:spPr>
+        <p:txBody>
+          <a:bodyPr lIns="91440" rIns="91440" tIns="45720" bIns="45720" anchor="ctr">
+            <a:noAutofit/>
+          </a:bodyPr>
+          <a:lstStyle>
+            <a:lvl1pPr indent="0" defTabSz="457200">
+              <a:lnSpc>
+                <a:spcPct val="100000"/>
+              </a:lnSpc>
+              <a:buNone/>
+              <a:tabLst>
+                <a:tab algn="l" pos="0"/>
+              </a:tabLst>
+              <a:defRPr b="0" lang="en-US" sz="1200" strike="noStrike" u="none">
+                <a:solidFill>
+                  <a:schemeClr val="dk1">
+                    <a:tint val="75000"/>
+                  </a:schemeClr>
+                </a:solidFill>
+                <a:effectLst/>
+                <a:uFillTx/>
+                <a:latin typeface="Calibri"/>
+              </a:defRPr>
+            </a:lvl1pPr>
+          </a:lstStyle>
+          <a:p>
+            <a:pPr indent="0" defTabSz="457200">
+              <a:lnSpc>
+                <a:spcPct val="100000"/>
+              </a:lnSpc>
+              <a:buNone/>
+              <a:tabLst>
+                <a:tab algn="l" pos="0"/>
+              </a:tabLst>
+            </a:pPr>
+            <a:r>
+              <a:rPr b="0" lang="en-US" sz="1200" strike="noStrike" u="none">
+                <a:solidFill>
+                  <a:schemeClr val="dk1">
+                    <a:tint val="75000"/>
+                  </a:schemeClr>
+                </a:solidFill>
+                <a:effectLst/>
+                <a:uFillTx/>
+                <a:latin typeface="Calibri"/>
+              </a:rPr>
+              <a:t>&lt;Datum/Uhrzeit&gt;</a:t>
+            </a:r>
+            <a:endParaRPr b="0" lang="de-AT" sz="1200" strike="noStrike" u="none">
+              <a:solidFill>
+                <a:srgbClr val="000000"/>
+              </a:solidFill>
+              <a:effectLst/>
+              <a:uFillTx/>
+              <a:latin typeface="Times New Roman"/>
+            </a:endParaRPr>
+          </a:p>
+        </p:txBody>
+      </p:sp>
+      <p:sp>
+        <p:nvSpPr>
+          <p:cNvPr id="7" name="PlaceHolder 5"/>
+          <p:cNvSpPr>
+            <a:spLocks noGrp="1"/>
+          </p:cNvSpPr>
+          <p:nvPr>
+            <p:ph type="ftr" idx="5"/>
+          </p:nvPr>
+        </p:nvSpPr>
+        <p:spPr>
+          <a:xfrm>
+            <a:off x="3124080" y="6356520"/>
+            <a:ext cx="2894760" cy="364320"/>
+          </a:xfrm>
+          <a:prstGeom prst="rect">
+            <a:avLst/>
+          </a:prstGeom>
+          <a:noFill/>
+          <a:ln w="0">
+            <a:noFill/>
+          </a:ln>
+        </p:spPr>
+        <p:txBody>
+          <a:bodyPr lIns="91440" rIns="91440" tIns="45720" bIns="45720" anchor="ctr">
+            <a:noAutofit/>
+          </a:bodyPr>
+          <a:lstStyle>
+            <a:lvl1pPr indent="0" algn="ctr">
+              <a:lnSpc>
+                <a:spcPct val="100000"/>
+              </a:lnSpc>
+              <a:buNone/>
+              <a:tabLst>
+                <a:tab algn="l" pos="0"/>
+              </a:tabLst>
+              <a:defRPr b="0" lang="de-AT" sz="1400" strike="noStrike" u="none">
+                <a:solidFill>
+                  <a:srgbClr val="000000"/>
+                </a:solidFill>
+                <a:effectLst/>
+                <a:uFillTx/>
+                <a:latin typeface="Times New Roman"/>
+              </a:defRPr>
+            </a:lvl1pPr>
+          </a:lstStyle>
+          <a:p>
+            <a:pPr indent="0" algn="ctr">
+              <a:lnSpc>
+                <a:spcPct val="100000"/>
+              </a:lnSpc>
+              <a:buNone/>
+              <a:tabLst>
+                <a:tab algn="l" pos="0"/>
+              </a:tabLst>
+            </a:pPr>
+            <a:r>
+              <a:rPr b="0" lang="de-AT" sz="1400" strike="noStrike" u="none">
+                <a:solidFill>
+                  <a:srgbClr val="000000"/>
+                </a:solidFill>
+                <a:effectLst/>
+                <a:uFillTx/>
+                <a:latin typeface="Times New Roman"/>
+              </a:rPr>
+              <a:t>&lt;Fußzeile&gt;</a:t>
+            </a:r>
+            <a:endParaRPr b="0" lang="de-AT" sz="1400" strike="noStrike" u="none">
+              <a:solidFill>
+                <a:srgbClr val="000000"/>
+              </a:solidFill>
+              <a:effectLst/>
+              <a:uFillTx/>
+              <a:latin typeface="Times New Roman"/>
+            </a:endParaRPr>
+          </a:p>
+        </p:txBody>
+      </p:sp>
+      <p:sp>
+        <p:nvSpPr>
+          <p:cNvPr id="8" name="PlaceHolder 6"/>
+          <p:cNvSpPr>
+            <a:spLocks noGrp="1"/>
+          </p:cNvSpPr>
+          <p:nvPr>
+            <p:ph type="sldNum" idx="6"/>
+          </p:nvPr>
+        </p:nvSpPr>
+        <p:spPr>
+          <a:xfrm>
+            <a:off x="6553080" y="6356520"/>
+            <a:ext cx="2133000" cy="364320"/>
+          </a:xfrm>
+          <a:prstGeom prst="rect">
+            <a:avLst/>
+          </a:prstGeom>
+          <a:noFill/>
+          <a:ln w="0">
+            <a:noFill/>
+          </a:ln>
+        </p:spPr>
+        <p:txBody>
+          <a:bodyPr lIns="91440" rIns="91440" tIns="45720" bIns="45720" anchor="ctr">
+            <a:noAutofit/>
+          </a:bodyPr>
+          <a:lstStyle>
+            <a:lvl1pPr indent="0" algn="r" defTabSz="457200">
+              <a:lnSpc>
+                <a:spcPct val="100000"/>
+              </a:lnSpc>
+              <a:buNone/>
+              <a:tabLst>
+                <a:tab algn="l" pos="0"/>
+              </a:tabLst>
+              <a:defRPr b="0" lang="en-US" sz="1200" strike="noStrike" u="none">
+                <a:solidFill>
+                  <a:schemeClr val="dk1">
+                    <a:tint val="75000"/>
+                  </a:schemeClr>
+                </a:solidFill>
+                <a:effectLst/>
+                <a:uFillTx/>
+                <a:latin typeface="Calibri"/>
+              </a:defRPr>
+            </a:lvl1pPr>
+          </a:lstStyle>
+          <a:p>
+            <a:pPr indent="0" algn="r" defTabSz="457200">
+              <a:lnSpc>
+                <a:spcPct val="100000"/>
+              </a:lnSpc>
+              <a:buNone/>
+              <a:tabLst>
+                <a:tab algn="l" pos="0"/>
+              </a:tabLst>
+            </a:pPr>
+            <a:fld id="{B1C73C9A-E1A2-4F1A-A84A-7F714BD1B860}" type="slidenum">
+              <a:rPr b="0" lang="en-US" sz="1200" strike="noStrike" u="none">
+                <a:solidFill>
+                  <a:schemeClr val="dk1">
+                    <a:tint val="75000"/>
+                  </a:schemeClr>
+                </a:solidFill>
+                <a:effectLst/>
+                <a:uFillTx/>
+                <a:latin typeface="Calibri"/>
+              </a:rPr>
+              <a:t>&lt;Foliennummer&gt;</a:t>
+            </a:fld>
+            <a:endParaRPr b="0" lang="de-AT" sz="1200" strike="noStrike" u="none">
+              <a:solidFill>
+                <a:srgbClr val="000000"/>
+              </a:solidFill>
+              <a:effectLst/>
+              <a:uFillTx/>
+              <a:latin typeface="Times New Roman"/>
+            </a:endParaRPr>
+          </a:p>
+        </p:txBody>
+      </p:sp>
+    </p:spTree>
+  </p:cSld>
+</p:sldLayout>
+</file>
+
+<file path=ppt/slideLayouts/slideLayout3.xml><?xml version="1.0" encoding="utf-8"?>
 <p:sldLayout xmlns:a="http://schemas.openxmlformats.org/drawingml/2006/main" xmlns:p="http://schemas.openxmlformats.org/presentationml/2006/main" xmlns:r="http://schemas.openxmlformats.org/officeDocument/2006/relationships" xmlns:p14="http://schemas.microsoft.com/office/powerpoint/2010/main" xmlns:p15="http://schemas.microsoft.com/office/powerpoint/2012/main" xmlns:mc="http://schemas.openxmlformats.org/markup-compatibility/2006" type="blank" preserve="1">
   <p:cSld name="Picture with Caption">
     <p:bg>
@@ -1162,7 +2086,7 @@
       </p:grpSpPr>
       <p:sp>
         <p:nvSpPr>
-          <p:cNvPr id="52" name="PlaceHolder 1"/>
+          <p:cNvPr id="9" name="PlaceHolder 1"/>
           <p:cNvSpPr>
             <a:spLocks noGrp="1"/>
           </p:cNvSpPr>
@@ -1173,7 +2097,7 @@
         <p:spPr>
           <a:xfrm>
             <a:off x="1792440" y="4800600"/>
-            <a:ext cx="5486040" cy="566280"/>
+            <a:ext cx="5485680" cy="565920"/>
           </a:xfrm>
           <a:prstGeom prst="rect">
             <a:avLst/>
@@ -1193,6 +2117,9 @@
                 <a:spcPct val="100000"/>
               </a:lnSpc>
               <a:buNone/>
+              <a:tabLst>
+                <a:tab algn="l" pos="0"/>
+              </a:tabLst>
             </a:pPr>
             <a:r>
               <a:rPr b="1" lang="en-US" sz="2000" strike="noStrike" u="none">
@@ -1205,20 +2132,20 @@
               </a:rPr>
               <a:t>Click to edit Master title style</a:t>
             </a:r>
-            <a:endParaRPr b="0" lang="en-US" sz="2000" strike="noStrike" u="none">
-              <a:solidFill>
-                <a:schemeClr val="dk1"/>
-              </a:solidFill>
-              <a:effectLst/>
-              <a:uFillTx/>
-              <a:latin typeface="Calibri"/>
+            <a:endParaRPr b="0" lang="de-AT" sz="2000" strike="noStrike" u="none">
+              <a:solidFill>
+                <a:srgbClr val="000000"/>
+              </a:solidFill>
+              <a:effectLst/>
+              <a:uFillTx/>
+              <a:latin typeface="Arial"/>
             </a:endParaRPr>
           </a:p>
         </p:txBody>
       </p:sp>
       <p:sp>
         <p:nvSpPr>
-          <p:cNvPr id="53" name="PlaceHolder 2"/>
+          <p:cNvPr id="10" name="PlaceHolder 2"/>
           <p:cNvSpPr>
             <a:spLocks noGrp="1"/>
           </p:cNvSpPr>
@@ -1229,7 +2156,7 @@
         <p:spPr>
           <a:xfrm>
             <a:off x="1792440" y="612720"/>
-            <a:ext cx="5486040" cy="4114440"/>
+            <a:ext cx="5485680" cy="4114080"/>
           </a:xfrm>
           <a:prstGeom prst="rect">
             <a:avLst/>
@@ -1245,6 +2172,9 @@
           </a:bodyPr>
           <a:p>
             <a:pPr marL="432000" indent="-324000">
+              <a:lnSpc>
+                <a:spcPct val="100000"/>
+              </a:lnSpc>
               <a:spcBef>
                 <a:spcPts val="1417"/>
               </a:spcBef>
@@ -1266,17 +2196,20 @@
               </a:rPr>
               <a:t>Format des Gliederungstextes durch Klicken bearbeiten</a:t>
             </a:r>
-            <a:endParaRPr b="0" lang="en-US" sz="3200" strike="noStrike" u="none">
-              <a:solidFill>
-                <a:schemeClr val="dk1"/>
-              </a:solidFill>
-              <a:effectLst/>
-              <a:uFillTx/>
-              <a:latin typeface="Calibri"/>
+            <a:endParaRPr b="0" lang="de-AT" sz="3200" strike="noStrike" u="none">
+              <a:solidFill>
+                <a:srgbClr val="000000"/>
+              </a:solidFill>
+              <a:effectLst/>
+              <a:uFillTx/>
+              <a:latin typeface="Arial"/>
             </a:endParaRPr>
           </a:p>
           <a:p>
             <a:pPr lvl="1" marL="864000" indent="-324000">
+              <a:lnSpc>
+                <a:spcPct val="100000"/>
+              </a:lnSpc>
               <a:spcBef>
                 <a:spcPts val="1134"/>
               </a:spcBef>
@@ -1298,17 +2231,20 @@
               </a:rPr>
               <a:t>Zweite Gliederungsebene</a:t>
             </a:r>
-            <a:endParaRPr b="0" lang="en-US" sz="3200" strike="noStrike" u="none">
-              <a:solidFill>
-                <a:schemeClr val="dk1"/>
-              </a:solidFill>
-              <a:effectLst/>
-              <a:uFillTx/>
-              <a:latin typeface="Calibri"/>
+            <a:endParaRPr b="0" lang="de-AT" sz="3200" strike="noStrike" u="none">
+              <a:solidFill>
+                <a:srgbClr val="000000"/>
+              </a:solidFill>
+              <a:effectLst/>
+              <a:uFillTx/>
+              <a:latin typeface="Arial"/>
             </a:endParaRPr>
           </a:p>
           <a:p>
             <a:pPr lvl="2" marL="1296000" indent="-288000">
+              <a:lnSpc>
+                <a:spcPct val="100000"/>
+              </a:lnSpc>
               <a:spcBef>
                 <a:spcPts val="850"/>
               </a:spcBef>
@@ -1330,17 +2266,20 @@
               </a:rPr>
               <a:t>Dritte Gliederungsebene</a:t>
             </a:r>
-            <a:endParaRPr b="0" lang="en-US" sz="3200" strike="noStrike" u="none">
-              <a:solidFill>
-                <a:schemeClr val="dk1"/>
-              </a:solidFill>
-              <a:effectLst/>
-              <a:uFillTx/>
-              <a:latin typeface="Calibri"/>
+            <a:endParaRPr b="0" lang="de-AT" sz="3200" strike="noStrike" u="none">
+              <a:solidFill>
+                <a:srgbClr val="000000"/>
+              </a:solidFill>
+              <a:effectLst/>
+              <a:uFillTx/>
+              <a:latin typeface="Arial"/>
             </a:endParaRPr>
           </a:p>
           <a:p>
             <a:pPr lvl="3" marL="1728000" indent="-216000">
+              <a:lnSpc>
+                <a:spcPct val="100000"/>
+              </a:lnSpc>
               <a:spcBef>
                 <a:spcPts val="567"/>
               </a:spcBef>
@@ -1362,17 +2301,20 @@
               </a:rPr>
               <a:t>Vierte Gliederungsebene</a:t>
             </a:r>
-            <a:endParaRPr b="0" lang="en-US" sz="3200" strike="noStrike" u="none">
-              <a:solidFill>
-                <a:schemeClr val="dk1"/>
-              </a:solidFill>
-              <a:effectLst/>
-              <a:uFillTx/>
-              <a:latin typeface="Calibri"/>
+            <a:endParaRPr b="0" lang="de-AT" sz="3200" strike="noStrike" u="none">
+              <a:solidFill>
+                <a:srgbClr val="000000"/>
+              </a:solidFill>
+              <a:effectLst/>
+              <a:uFillTx/>
+              <a:latin typeface="Arial"/>
             </a:endParaRPr>
           </a:p>
           <a:p>
             <a:pPr lvl="4" marL="2160000" indent="-216000">
+              <a:lnSpc>
+                <a:spcPct val="100000"/>
+              </a:lnSpc>
               <a:spcBef>
                 <a:spcPts val="283"/>
               </a:spcBef>
@@ -1394,17 +2336,20 @@
               </a:rPr>
               <a:t>Fünfte Gliederungsebene</a:t>
             </a:r>
-            <a:endParaRPr b="0" lang="en-US" sz="3200" strike="noStrike" u="none">
-              <a:solidFill>
-                <a:schemeClr val="dk1"/>
-              </a:solidFill>
-              <a:effectLst/>
-              <a:uFillTx/>
-              <a:latin typeface="Calibri"/>
+            <a:endParaRPr b="0" lang="de-AT" sz="3200" strike="noStrike" u="none">
+              <a:solidFill>
+                <a:srgbClr val="000000"/>
+              </a:solidFill>
+              <a:effectLst/>
+              <a:uFillTx/>
+              <a:latin typeface="Arial"/>
             </a:endParaRPr>
           </a:p>
           <a:p>
             <a:pPr lvl="5" marL="2592000" indent="-216000">
+              <a:lnSpc>
+                <a:spcPct val="100000"/>
+              </a:lnSpc>
               <a:spcBef>
                 <a:spcPts val="283"/>
               </a:spcBef>
@@ -1426,17 +2371,20 @@
               </a:rPr>
               <a:t>Sechste Gliederungsebene</a:t>
             </a:r>
-            <a:endParaRPr b="0" lang="en-US" sz="3200" strike="noStrike" u="none">
-              <a:solidFill>
-                <a:schemeClr val="dk1"/>
-              </a:solidFill>
-              <a:effectLst/>
-              <a:uFillTx/>
-              <a:latin typeface="Calibri"/>
+            <a:endParaRPr b="0" lang="de-AT" sz="3200" strike="noStrike" u="none">
+              <a:solidFill>
+                <a:srgbClr val="000000"/>
+              </a:solidFill>
+              <a:effectLst/>
+              <a:uFillTx/>
+              <a:latin typeface="Arial"/>
             </a:endParaRPr>
           </a:p>
           <a:p>
             <a:pPr lvl="6" marL="3024000" indent="-216000">
+              <a:lnSpc>
+                <a:spcPct val="100000"/>
+              </a:lnSpc>
               <a:spcBef>
                 <a:spcPts val="283"/>
               </a:spcBef>
@@ -1458,20 +2406,20 @@
               </a:rPr>
               <a:t>Siebte Gliederungsebene</a:t>
             </a:r>
-            <a:endParaRPr b="0" lang="en-US" sz="3200" strike="noStrike" u="none">
-              <a:solidFill>
-                <a:schemeClr val="dk1"/>
-              </a:solidFill>
-              <a:effectLst/>
-              <a:uFillTx/>
-              <a:latin typeface="Calibri"/>
+            <a:endParaRPr b="0" lang="de-AT" sz="3200" strike="noStrike" u="none">
+              <a:solidFill>
+                <a:srgbClr val="000000"/>
+              </a:solidFill>
+              <a:effectLst/>
+              <a:uFillTx/>
+              <a:latin typeface="Arial"/>
             </a:endParaRPr>
           </a:p>
         </p:txBody>
       </p:sp>
       <p:sp>
         <p:nvSpPr>
-          <p:cNvPr id="54" name="PlaceHolder 3"/>
+          <p:cNvPr id="11" name="PlaceHolder 3"/>
           <p:cNvSpPr>
             <a:spLocks noGrp="1"/>
           </p:cNvSpPr>
@@ -1482,7 +2430,7 @@
         <p:spPr>
           <a:xfrm>
             <a:off x="1792440" y="5367240"/>
-            <a:ext cx="5486040" cy="804600"/>
+            <a:ext cx="5485680" cy="804240"/>
           </a:xfrm>
           <a:prstGeom prst="rect">
             <a:avLst/>
@@ -1520,31 +2468,31 @@
               </a:rPr>
               <a:t>Click to edit Master text styles</a:t>
             </a:r>
-            <a:endParaRPr b="0" lang="en-US" sz="1400" strike="noStrike" u="none">
-              <a:solidFill>
-                <a:schemeClr val="dk1"/>
-              </a:solidFill>
-              <a:effectLst/>
-              <a:uFillTx/>
-              <a:latin typeface="Calibri"/>
+            <a:endParaRPr b="0" lang="de-AT" sz="1400" strike="noStrike" u="none">
+              <a:solidFill>
+                <a:srgbClr val="000000"/>
+              </a:solidFill>
+              <a:effectLst/>
+              <a:uFillTx/>
+              <a:latin typeface="Arial"/>
             </a:endParaRPr>
           </a:p>
         </p:txBody>
       </p:sp>
       <p:sp>
         <p:nvSpPr>
-          <p:cNvPr id="55" name="PlaceHolder 4"/>
+          <p:cNvPr id="12" name="PlaceHolder 4"/>
           <p:cNvSpPr>
             <a:spLocks noGrp="1"/>
           </p:cNvSpPr>
           <p:nvPr>
-            <p:ph type="dt" idx="31"/>
+            <p:ph type="dt" idx="7"/>
           </p:nvPr>
         </p:nvSpPr>
         <p:spPr>
           <a:xfrm>
             <a:off x="457200" y="6356520"/>
-            <a:ext cx="2133360" cy="364680"/>
+            <a:ext cx="2133000" cy="364320"/>
           </a:xfrm>
           <a:prstGeom prst="rect">
             <a:avLst/>
@@ -1564,6 +2512,9 @@
                 <a:spcPct val="100000"/>
               </a:lnSpc>
               <a:buNone/>
+              <a:tabLst>
+                <a:tab algn="l" pos="0"/>
+              </a:tabLst>
               <a:defRPr b="0" lang="en-US" sz="1200" strike="noStrike" u="none">
                 <a:solidFill>
                   <a:schemeClr val="dk1">
@@ -1582,6 +2533,9 @@
                 <a:spcPct val="100000"/>
               </a:lnSpc>
               <a:buNone/>
+              <a:tabLst>
+                <a:tab algn="l" pos="0"/>
+              </a:tabLst>
             </a:pPr>
             <a:r>
               <a:rPr b="0" lang="en-US" sz="1200" strike="noStrike" u="none">
@@ -1609,18 +2563,18 @@
       </p:sp>
       <p:sp>
         <p:nvSpPr>
-          <p:cNvPr id="56" name="PlaceHolder 5"/>
+          <p:cNvPr id="13" name="PlaceHolder 5"/>
           <p:cNvSpPr>
             <a:spLocks noGrp="1"/>
           </p:cNvSpPr>
           <p:nvPr>
-            <p:ph type="ftr" idx="32"/>
+            <p:ph type="ftr" idx="8"/>
           </p:nvPr>
         </p:nvSpPr>
         <p:spPr>
           <a:xfrm>
             <a:off x="3124080" y="6356520"/>
-            <a:ext cx="2895120" cy="364680"/>
+            <a:ext cx="2894760" cy="364320"/>
           </a:xfrm>
           <a:prstGeom prst="rect">
             <a:avLst/>
@@ -1636,7 +2590,13 @@
           </a:bodyPr>
           <a:lstStyle>
             <a:lvl1pPr indent="0" algn="ctr">
-              <a:buNone/>
+              <a:lnSpc>
+                <a:spcPct val="100000"/>
+              </a:lnSpc>
+              <a:buNone/>
+              <a:tabLst>
+                <a:tab algn="l" pos="0"/>
+              </a:tabLst>
               <a:defRPr b="0" lang="de-AT" sz="1400" strike="noStrike" u="none">
                 <a:solidFill>
                   <a:srgbClr val="000000"/>
@@ -1649,7 +2609,13 @@
           </a:lstStyle>
           <a:p>
             <a:pPr indent="0" algn="ctr">
-              <a:buNone/>
+              <a:lnSpc>
+                <a:spcPct val="100000"/>
+              </a:lnSpc>
+              <a:buNone/>
+              <a:tabLst>
+                <a:tab algn="l" pos="0"/>
+              </a:tabLst>
             </a:pPr>
             <a:r>
               <a:rPr b="0" lang="de-AT" sz="1400" strike="noStrike" u="none">
@@ -1675,18 +2641,18 @@
       </p:sp>
       <p:sp>
         <p:nvSpPr>
-          <p:cNvPr id="57" name="PlaceHolder 6"/>
+          <p:cNvPr id="14" name="PlaceHolder 6"/>
           <p:cNvSpPr>
             <a:spLocks noGrp="1"/>
           </p:cNvSpPr>
           <p:nvPr>
-            <p:ph type="sldNum" idx="33"/>
+            <p:ph type="sldNum" idx="9"/>
           </p:nvPr>
         </p:nvSpPr>
         <p:spPr>
           <a:xfrm>
             <a:off x="6553080" y="6356520"/>
-            <a:ext cx="2133360" cy="364680"/>
+            <a:ext cx="2133000" cy="364320"/>
           </a:xfrm>
           <a:prstGeom prst="rect">
             <a:avLst/>
@@ -1706,6 +2672,9 @@
                 <a:spcPct val="100000"/>
               </a:lnSpc>
               <a:buNone/>
+              <a:tabLst>
+                <a:tab algn="l" pos="0"/>
+              </a:tabLst>
               <a:defRPr b="0" lang="en-US" sz="1200" strike="noStrike" u="none">
                 <a:solidFill>
                   <a:schemeClr val="dk1">
@@ -1724,1012 +2693,11 @@
                 <a:spcPct val="100000"/>
               </a:lnSpc>
               <a:buNone/>
-            </a:pPr>
-            <a:fld id="{E88730EC-7244-484B-90DA-46418AB50B81}" type="slidenum">
-              <a:rPr b="0" lang="en-US" sz="1200" strike="noStrike" u="none">
-                <a:solidFill>
-                  <a:schemeClr val="dk1">
-                    <a:tint val="75000"/>
-                  </a:schemeClr>
-                </a:solidFill>
-                <a:effectLst/>
-                <a:uFillTx/>
-                <a:latin typeface="Calibri"/>
-              </a:rPr>
-              <a:t>&lt;Foliennummer&gt;</a:t>
-            </a:fld>
-            <a:endParaRPr b="0" lang="de-AT" sz="1200" strike="noStrike" u="none">
-              <a:solidFill>
-                <a:srgbClr val="000000"/>
-              </a:solidFill>
-              <a:effectLst/>
-              <a:uFillTx/>
-              <a:latin typeface="Times New Roman"/>
-            </a:endParaRPr>
-          </a:p>
-        </p:txBody>
-      </p:sp>
-    </p:spTree>
-  </p:cSld>
-</p:sldLayout>
-</file>
-
-<file path=ppt/slideLayouts/slideLayout2.xml><?xml version="1.0" encoding="utf-8"?>
-<p:sldLayout xmlns:a="http://schemas.openxmlformats.org/drawingml/2006/main" xmlns:p="http://schemas.openxmlformats.org/presentationml/2006/main" xmlns:r="http://schemas.openxmlformats.org/officeDocument/2006/relationships" xmlns:p14="http://schemas.microsoft.com/office/powerpoint/2010/main" xmlns:p15="http://schemas.microsoft.com/office/powerpoint/2012/main" xmlns:mc="http://schemas.openxmlformats.org/markup-compatibility/2006" type="vertTx" preserve="1">
-  <p:cSld name="Title and Vertical Text">
-    <p:bg>
-      <p:bgPr>
-        <a:solidFill>
-          <a:srgbClr val="ffffff"/>
-        </a:solidFill>
-      </p:bgPr>
-    </p:bg>
-    <p:spTree>
-      <p:nvGrpSpPr>
-        <p:cNvPr id="1" name=""/>
-        <p:cNvGrpSpPr/>
-        <p:nvPr/>
-      </p:nvGrpSpPr>
-      <p:grpSpPr>
-        <a:xfrm>
-          <a:off x="0" y="0"/>
-          <a:ext cx="0" cy="0"/>
-          <a:chOff x="0" y="0"/>
-          <a:chExt cx="0" cy="0"/>
-        </a:xfrm>
-      </p:grpSpPr>
-      <p:sp>
-        <p:nvSpPr>
-          <p:cNvPr id="5" name="PlaceHolder 1"/>
-          <p:cNvSpPr>
-            <a:spLocks noGrp="1"/>
-          </p:cNvSpPr>
-          <p:nvPr>
-            <p:ph type="title"/>
-          </p:nvPr>
-        </p:nvSpPr>
-        <p:spPr>
-          <a:xfrm>
-            <a:off x="457200" y="274680"/>
-            <a:ext cx="8229240" cy="1142640"/>
-          </a:xfrm>
-          <a:prstGeom prst="rect">
-            <a:avLst/>
-          </a:prstGeom>
-          <a:noFill/>
-          <a:ln w="0">
-            <a:noFill/>
-          </a:ln>
-        </p:spPr>
-        <p:txBody>
-          <a:bodyPr lIns="91440" rIns="91440" tIns="45720" bIns="45720" anchor="ctr">
-            <a:noAutofit/>
-          </a:bodyPr>
-          <a:p>
-            <a:pPr indent="0" algn="ctr" defTabSz="457200">
-              <a:lnSpc>
-                <a:spcPct val="100000"/>
-              </a:lnSpc>
-              <a:buNone/>
-            </a:pPr>
-            <a:r>
-              <a:rPr b="0" lang="en-US" sz="4400" strike="noStrike" u="none">
-                <a:solidFill>
-                  <a:schemeClr val="dk1"/>
-                </a:solidFill>
-                <a:effectLst/>
-                <a:uFillTx/>
-                <a:latin typeface="Calibri"/>
-              </a:rPr>
-              <a:t>Click to edit Master title style</a:t>
-            </a:r>
-            <a:endParaRPr b="0" lang="en-US" sz="4400" strike="noStrike" u="none">
-              <a:solidFill>
-                <a:schemeClr val="dk1"/>
-              </a:solidFill>
-              <a:effectLst/>
-              <a:uFillTx/>
-              <a:latin typeface="Calibri"/>
-            </a:endParaRPr>
-          </a:p>
-        </p:txBody>
-      </p:sp>
-      <p:sp>
-        <p:nvSpPr>
-          <p:cNvPr id="6" name="PlaceHolder 2"/>
-          <p:cNvSpPr>
-            <a:spLocks noGrp="1"/>
-          </p:cNvSpPr>
-          <p:nvPr>
-            <p:ph type="body"/>
-          </p:nvPr>
-        </p:nvSpPr>
-        <p:spPr>
-          <a:xfrm>
-            <a:off x="457200" y="1600200"/>
-            <a:ext cx="8229240" cy="4525560"/>
-          </a:xfrm>
-          <a:prstGeom prst="rect">
-            <a:avLst/>
-          </a:prstGeom>
-          <a:noFill/>
-          <a:ln w="0">
-            <a:noFill/>
-          </a:ln>
-        </p:spPr>
-        <p:txBody>
-          <a:bodyPr lIns="91440" rIns="91440" tIns="45720" bIns="45720" anchor="t" vert="eaVert">
-            <a:noAutofit/>
-          </a:bodyPr>
-          <a:p>
-            <a:pPr marL="343080" indent="-343080" defTabSz="457200">
-              <a:lnSpc>
-                <a:spcPct val="100000"/>
-              </a:lnSpc>
-              <a:spcBef>
-                <a:spcPts val="641"/>
-              </a:spcBef>
-              <a:buClr>
-                <a:srgbClr val="000000"/>
-              </a:buClr>
-              <a:buFont typeface="Arial"/>
-              <a:buChar char="•"/>
-            </a:pPr>
-            <a:r>
-              <a:rPr b="0" lang="en-US" sz="3200" strike="noStrike" u="none">
-                <a:solidFill>
-                  <a:schemeClr val="dk1"/>
-                </a:solidFill>
-                <a:effectLst/>
-                <a:uFillTx/>
-                <a:latin typeface="Calibri"/>
-              </a:rPr>
-              <a:t>Click to edit Master text styles</a:t>
-            </a:r>
-            <a:endParaRPr b="0" lang="en-US" sz="3200" strike="noStrike" u="none">
-              <a:solidFill>
-                <a:schemeClr val="dk1"/>
-              </a:solidFill>
-              <a:effectLst/>
-              <a:uFillTx/>
-              <a:latin typeface="Calibri"/>
-            </a:endParaRPr>
-          </a:p>
-          <a:p>
-            <a:pPr lvl="1" marL="743040" indent="-285840" defTabSz="457200">
-              <a:lnSpc>
-                <a:spcPct val="100000"/>
-              </a:lnSpc>
-              <a:spcBef>
-                <a:spcPts val="561"/>
-              </a:spcBef>
-              <a:buClr>
-                <a:srgbClr val="000000"/>
-              </a:buClr>
-              <a:buFont typeface="Arial"/>
-              <a:buChar char="–"/>
-            </a:pPr>
-            <a:r>
-              <a:rPr b="0" lang="en-US" sz="2800" strike="noStrike" u="none">
-                <a:solidFill>
-                  <a:schemeClr val="dk1"/>
-                </a:solidFill>
-                <a:effectLst/>
-                <a:uFillTx/>
-                <a:latin typeface="Calibri"/>
-              </a:rPr>
-              <a:t>Second level</a:t>
-            </a:r>
-            <a:endParaRPr b="0" lang="en-US" sz="2800" strike="noStrike" u="none">
-              <a:solidFill>
-                <a:schemeClr val="dk1"/>
-              </a:solidFill>
-              <a:effectLst/>
-              <a:uFillTx/>
-              <a:latin typeface="Calibri"/>
-            </a:endParaRPr>
-          </a:p>
-          <a:p>
-            <a:pPr lvl="2" marL="1143000" indent="-228600" defTabSz="457200">
-              <a:lnSpc>
-                <a:spcPct val="100000"/>
-              </a:lnSpc>
-              <a:spcBef>
-                <a:spcPts val="479"/>
-              </a:spcBef>
-              <a:buClr>
-                <a:srgbClr val="000000"/>
-              </a:buClr>
-              <a:buFont typeface="Arial"/>
-              <a:buChar char="•"/>
-            </a:pPr>
-            <a:r>
-              <a:rPr b="0" lang="en-US" sz="2400" strike="noStrike" u="none">
-                <a:solidFill>
-                  <a:schemeClr val="dk1"/>
-                </a:solidFill>
-                <a:effectLst/>
-                <a:uFillTx/>
-                <a:latin typeface="Calibri"/>
-              </a:rPr>
-              <a:t>Third level</a:t>
-            </a:r>
-            <a:endParaRPr b="0" lang="en-US" sz="2400" strike="noStrike" u="none">
-              <a:solidFill>
-                <a:schemeClr val="dk1"/>
-              </a:solidFill>
-              <a:effectLst/>
-              <a:uFillTx/>
-              <a:latin typeface="Calibri"/>
-            </a:endParaRPr>
-          </a:p>
-          <a:p>
-            <a:pPr lvl="3" marL="1600200" indent="-228600" defTabSz="457200">
-              <a:lnSpc>
-                <a:spcPct val="100000"/>
-              </a:lnSpc>
-              <a:spcBef>
-                <a:spcPts val="400"/>
-              </a:spcBef>
-              <a:buClr>
-                <a:srgbClr val="000000"/>
-              </a:buClr>
-              <a:buFont typeface="Arial"/>
-              <a:buChar char="–"/>
-            </a:pPr>
-            <a:r>
-              <a:rPr b="0" lang="en-US" sz="2000" strike="noStrike" u="none">
-                <a:solidFill>
-                  <a:schemeClr val="dk1"/>
-                </a:solidFill>
-                <a:effectLst/>
-                <a:uFillTx/>
-                <a:latin typeface="Calibri"/>
-              </a:rPr>
-              <a:t>Fourth level</a:t>
-            </a:r>
-            <a:endParaRPr b="0" lang="en-US" sz="2000" strike="noStrike" u="none">
-              <a:solidFill>
-                <a:schemeClr val="dk1"/>
-              </a:solidFill>
-              <a:effectLst/>
-              <a:uFillTx/>
-              <a:latin typeface="Calibri"/>
-            </a:endParaRPr>
-          </a:p>
-          <a:p>
-            <a:pPr lvl="4" marL="2057400" indent="-228600" defTabSz="457200">
-              <a:lnSpc>
-                <a:spcPct val="100000"/>
-              </a:lnSpc>
-              <a:spcBef>
-                <a:spcPts val="400"/>
-              </a:spcBef>
-              <a:buClr>
-                <a:srgbClr val="000000"/>
-              </a:buClr>
-              <a:buFont typeface="Arial"/>
-              <a:buChar char="»"/>
-            </a:pPr>
-            <a:r>
-              <a:rPr b="0" lang="en-US" sz="2000" strike="noStrike" u="none">
-                <a:solidFill>
-                  <a:schemeClr val="dk1"/>
-                </a:solidFill>
-                <a:effectLst/>
-                <a:uFillTx/>
-                <a:latin typeface="Calibri"/>
-              </a:rPr>
-              <a:t>Fifth level</a:t>
-            </a:r>
-            <a:endParaRPr b="0" lang="en-US" sz="2000" strike="noStrike" u="none">
-              <a:solidFill>
-                <a:schemeClr val="dk1"/>
-              </a:solidFill>
-              <a:effectLst/>
-              <a:uFillTx/>
-              <a:latin typeface="Calibri"/>
-            </a:endParaRPr>
-          </a:p>
-        </p:txBody>
-      </p:sp>
-      <p:sp>
-        <p:nvSpPr>
-          <p:cNvPr id="7" name="PlaceHolder 3"/>
-          <p:cNvSpPr>
-            <a:spLocks noGrp="1"/>
-          </p:cNvSpPr>
-          <p:nvPr>
-            <p:ph type="dt" idx="4"/>
-          </p:nvPr>
-        </p:nvSpPr>
-        <p:spPr>
-          <a:xfrm>
-            <a:off x="457200" y="6356520"/>
-            <a:ext cx="2133360" cy="364680"/>
-          </a:xfrm>
-          <a:prstGeom prst="rect">
-            <a:avLst/>
-          </a:prstGeom>
-          <a:noFill/>
-          <a:ln w="0">
-            <a:noFill/>
-          </a:ln>
-        </p:spPr>
-        <p:txBody>
-          <a:bodyPr lIns="91440" rIns="91440" tIns="45720" bIns="45720" anchor="ctr">
-            <a:noAutofit/>
-          </a:bodyPr>
-          <a:lstStyle>
-            <a:lvl1pPr indent="0" defTabSz="457200">
-              <a:lnSpc>
-                <a:spcPct val="100000"/>
-              </a:lnSpc>
-              <a:buNone/>
-              <a:defRPr b="0" lang="en-US" sz="1200" strike="noStrike" u="none">
-                <a:solidFill>
-                  <a:schemeClr val="dk1">
-                    <a:tint val="75000"/>
-                  </a:schemeClr>
-                </a:solidFill>
-                <a:effectLst/>
-                <a:uFillTx/>
-                <a:latin typeface="Calibri"/>
-              </a:defRPr>
-            </a:lvl1pPr>
-          </a:lstStyle>
-          <a:p>
-            <a:pPr indent="0" defTabSz="457200">
-              <a:lnSpc>
-                <a:spcPct val="100000"/>
-              </a:lnSpc>
-              <a:buNone/>
-            </a:pPr>
-            <a:r>
-              <a:rPr b="0" lang="en-US" sz="1200" strike="noStrike" u="none">
-                <a:solidFill>
-                  <a:schemeClr val="dk1">
-                    <a:tint val="75000"/>
-                  </a:schemeClr>
-                </a:solidFill>
-                <a:effectLst/>
-                <a:uFillTx/>
-                <a:latin typeface="Calibri"/>
-              </a:rPr>
-              <a:t>&lt;Datum/Uhrzeit&gt;</a:t>
-            </a:r>
-            <a:endParaRPr b="0" lang="de-AT" sz="1200" strike="noStrike" u="none">
-              <a:solidFill>
-                <a:srgbClr val="000000"/>
-              </a:solidFill>
-              <a:effectLst/>
-              <a:uFillTx/>
-              <a:latin typeface="Times New Roman"/>
-            </a:endParaRPr>
-          </a:p>
-        </p:txBody>
-      </p:sp>
-      <p:sp>
-        <p:nvSpPr>
-          <p:cNvPr id="8" name="PlaceHolder 4"/>
-          <p:cNvSpPr>
-            <a:spLocks noGrp="1"/>
-          </p:cNvSpPr>
-          <p:nvPr>
-            <p:ph type="ftr" idx="5"/>
-          </p:nvPr>
-        </p:nvSpPr>
-        <p:spPr>
-          <a:xfrm>
-            <a:off x="3124080" y="6356520"/>
-            <a:ext cx="2895120" cy="364680"/>
-          </a:xfrm>
-          <a:prstGeom prst="rect">
-            <a:avLst/>
-          </a:prstGeom>
-          <a:noFill/>
-          <a:ln w="0">
-            <a:noFill/>
-          </a:ln>
-        </p:spPr>
-        <p:txBody>
-          <a:bodyPr lIns="91440" rIns="91440" tIns="45720" bIns="45720" anchor="ctr">
-            <a:noAutofit/>
-          </a:bodyPr>
-          <a:lstStyle>
-            <a:lvl1pPr indent="0" algn="ctr">
-              <a:buNone/>
-              <a:defRPr b="0" lang="de-AT" sz="1400" strike="noStrike" u="none">
-                <a:solidFill>
-                  <a:srgbClr val="000000"/>
-                </a:solidFill>
-                <a:effectLst/>
-                <a:uFillTx/>
-                <a:latin typeface="Times New Roman"/>
-              </a:defRPr>
-            </a:lvl1pPr>
-          </a:lstStyle>
-          <a:p>
-            <a:pPr indent="0" algn="ctr">
-              <a:buNone/>
-            </a:pPr>
-            <a:r>
-              <a:rPr b="0" lang="de-AT" sz="1400" strike="noStrike" u="none">
-                <a:solidFill>
-                  <a:srgbClr val="000000"/>
-                </a:solidFill>
-                <a:effectLst/>
-                <a:uFillTx/>
-                <a:latin typeface="Times New Roman"/>
-              </a:rPr>
-              <a:t>&lt;Fußzeile&gt;</a:t>
-            </a:r>
-            <a:endParaRPr b="0" lang="de-AT" sz="1400" strike="noStrike" u="none">
-              <a:solidFill>
-                <a:srgbClr val="000000"/>
-              </a:solidFill>
-              <a:effectLst/>
-              <a:uFillTx/>
-              <a:latin typeface="Times New Roman"/>
-            </a:endParaRPr>
-          </a:p>
-        </p:txBody>
-      </p:sp>
-      <p:sp>
-        <p:nvSpPr>
-          <p:cNvPr id="9" name="PlaceHolder 5"/>
-          <p:cNvSpPr>
-            <a:spLocks noGrp="1"/>
-          </p:cNvSpPr>
-          <p:nvPr>
-            <p:ph type="sldNum" idx="6"/>
-          </p:nvPr>
-        </p:nvSpPr>
-        <p:spPr>
-          <a:xfrm>
-            <a:off x="6553080" y="6356520"/>
-            <a:ext cx="2133360" cy="364680"/>
-          </a:xfrm>
-          <a:prstGeom prst="rect">
-            <a:avLst/>
-          </a:prstGeom>
-          <a:noFill/>
-          <a:ln w="0">
-            <a:noFill/>
-          </a:ln>
-        </p:spPr>
-        <p:txBody>
-          <a:bodyPr lIns="91440" rIns="91440" tIns="45720" bIns="45720" anchor="ctr">
-            <a:noAutofit/>
-          </a:bodyPr>
-          <a:lstStyle>
-            <a:lvl1pPr indent="0" algn="r" defTabSz="457200">
-              <a:lnSpc>
-                <a:spcPct val="100000"/>
-              </a:lnSpc>
-              <a:buNone/>
-              <a:defRPr b="0" lang="en-US" sz="1200" strike="noStrike" u="none">
-                <a:solidFill>
-                  <a:schemeClr val="dk1">
-                    <a:tint val="75000"/>
-                  </a:schemeClr>
-                </a:solidFill>
-                <a:effectLst/>
-                <a:uFillTx/>
-                <a:latin typeface="Calibri"/>
-              </a:defRPr>
-            </a:lvl1pPr>
-          </a:lstStyle>
-          <a:p>
-            <a:pPr indent="0" algn="r" defTabSz="457200">
-              <a:lnSpc>
-                <a:spcPct val="100000"/>
-              </a:lnSpc>
-              <a:buNone/>
-            </a:pPr>
-            <a:fld id="{619BA997-0328-4F1C-87A6-E0C04EB044B8}" type="slidenum">
-              <a:rPr b="0" lang="en-US" sz="1200" strike="noStrike" u="none">
-                <a:solidFill>
-                  <a:schemeClr val="dk1">
-                    <a:tint val="75000"/>
-                  </a:schemeClr>
-                </a:solidFill>
-                <a:effectLst/>
-                <a:uFillTx/>
-                <a:latin typeface="Calibri"/>
-              </a:rPr>
-              <a:t>&lt;Foliennummer&gt;</a:t>
-            </a:fld>
-            <a:endParaRPr b="0" lang="de-AT" sz="1200" strike="noStrike" u="none">
-              <a:solidFill>
-                <a:srgbClr val="000000"/>
-              </a:solidFill>
-              <a:effectLst/>
-              <a:uFillTx/>
-              <a:latin typeface="Times New Roman"/>
-            </a:endParaRPr>
-          </a:p>
-        </p:txBody>
-      </p:sp>
-    </p:spTree>
-  </p:cSld>
-</p:sldLayout>
-</file>
-
-<file path=ppt/slideLayouts/slideLayout3.xml><?xml version="1.0" encoding="utf-8"?>
-<p:sldLayout xmlns:a="http://schemas.openxmlformats.org/drawingml/2006/main" xmlns:p="http://schemas.openxmlformats.org/presentationml/2006/main" xmlns:r="http://schemas.openxmlformats.org/officeDocument/2006/relationships" xmlns:p14="http://schemas.microsoft.com/office/powerpoint/2010/main" xmlns:p15="http://schemas.microsoft.com/office/powerpoint/2012/main" xmlns:mc="http://schemas.openxmlformats.org/markup-compatibility/2006" type="vertTitleAndTx" preserve="1">
-  <p:cSld name="Vertical Title and Text">
-    <p:bg>
-      <p:bgPr>
-        <a:solidFill>
-          <a:srgbClr val="ffffff"/>
-        </a:solidFill>
-      </p:bgPr>
-    </p:bg>
-    <p:spTree>
-      <p:nvGrpSpPr>
-        <p:cNvPr id="1" name=""/>
-        <p:cNvGrpSpPr/>
-        <p:nvPr/>
-      </p:nvGrpSpPr>
-      <p:grpSpPr>
-        <a:xfrm>
-          <a:off x="0" y="0"/>
-          <a:ext cx="0" cy="0"/>
-          <a:chOff x="0" y="0"/>
-          <a:chExt cx="0" cy="0"/>
-        </a:xfrm>
-      </p:grpSpPr>
-      <p:sp>
-        <p:nvSpPr>
-          <p:cNvPr id="10" name="PlaceHolder 1"/>
-          <p:cNvSpPr>
-            <a:spLocks noGrp="1"/>
-          </p:cNvSpPr>
-          <p:nvPr>
-            <p:ph type="title"/>
-          </p:nvPr>
-        </p:nvSpPr>
-        <p:spPr>
-          <a:xfrm>
-            <a:off x="6629400" y="274680"/>
-            <a:ext cx="2057040" cy="5851080"/>
-          </a:xfrm>
-          <a:prstGeom prst="rect">
-            <a:avLst/>
-          </a:prstGeom>
-          <a:noFill/>
-          <a:ln w="0">
-            <a:noFill/>
-          </a:ln>
-        </p:spPr>
-        <p:txBody>
-          <a:bodyPr lIns="91440" rIns="91440" tIns="45720" bIns="45720" anchor="ctr" vert="eaVert">
-            <a:noAutofit/>
-          </a:bodyPr>
-          <a:p>
-            <a:pPr indent="0" algn="ctr" defTabSz="457200">
-              <a:lnSpc>
-                <a:spcPct val="100000"/>
-              </a:lnSpc>
-              <a:buNone/>
-            </a:pPr>
-            <a:r>
-              <a:rPr b="0" lang="en-US" sz="4400" strike="noStrike" u="none">
-                <a:solidFill>
-                  <a:schemeClr val="dk1"/>
-                </a:solidFill>
-                <a:effectLst/>
-                <a:uFillTx/>
-                <a:latin typeface="Calibri"/>
-              </a:rPr>
-              <a:t>Click to edit Master title style</a:t>
-            </a:r>
-            <a:endParaRPr b="0" lang="en-US" sz="4400" strike="noStrike" u="none">
-              <a:solidFill>
-                <a:schemeClr val="dk1"/>
-              </a:solidFill>
-              <a:effectLst/>
-              <a:uFillTx/>
-              <a:latin typeface="Calibri"/>
-            </a:endParaRPr>
-          </a:p>
-        </p:txBody>
-      </p:sp>
-      <p:sp>
-        <p:nvSpPr>
-          <p:cNvPr id="11" name="PlaceHolder 2"/>
-          <p:cNvSpPr>
-            <a:spLocks noGrp="1"/>
-          </p:cNvSpPr>
-          <p:nvPr>
-            <p:ph type="body"/>
-          </p:nvPr>
-        </p:nvSpPr>
-        <p:spPr>
-          <a:xfrm>
-            <a:off x="457200" y="274680"/>
-            <a:ext cx="6019560" cy="5851080"/>
-          </a:xfrm>
-          <a:prstGeom prst="rect">
-            <a:avLst/>
-          </a:prstGeom>
-          <a:noFill/>
-          <a:ln w="0">
-            <a:noFill/>
-          </a:ln>
-        </p:spPr>
-        <p:txBody>
-          <a:bodyPr lIns="91440" rIns="91440" tIns="45720" bIns="45720" anchor="t" vert="eaVert">
-            <a:noAutofit/>
-          </a:bodyPr>
-          <a:p>
-            <a:pPr marL="343080" indent="-343080" defTabSz="457200">
-              <a:lnSpc>
-                <a:spcPct val="100000"/>
-              </a:lnSpc>
-              <a:spcBef>
-                <a:spcPts val="641"/>
-              </a:spcBef>
-              <a:buClr>
-                <a:srgbClr val="000000"/>
-              </a:buClr>
-              <a:buFont typeface="Arial"/>
-              <a:buChar char="•"/>
-            </a:pPr>
-            <a:r>
-              <a:rPr b="0" lang="en-US" sz="3200" strike="noStrike" u="none">
-                <a:solidFill>
-                  <a:schemeClr val="dk1"/>
-                </a:solidFill>
-                <a:effectLst/>
-                <a:uFillTx/>
-                <a:latin typeface="Calibri"/>
-              </a:rPr>
-              <a:t>Click to edit Master text styles</a:t>
-            </a:r>
-            <a:endParaRPr b="0" lang="en-US" sz="3200" strike="noStrike" u="none">
-              <a:solidFill>
-                <a:schemeClr val="dk1"/>
-              </a:solidFill>
-              <a:effectLst/>
-              <a:uFillTx/>
-              <a:latin typeface="Calibri"/>
-            </a:endParaRPr>
-          </a:p>
-          <a:p>
-            <a:pPr lvl="1" marL="743040" indent="-285840" defTabSz="457200">
-              <a:lnSpc>
-                <a:spcPct val="100000"/>
-              </a:lnSpc>
-              <a:spcBef>
-                <a:spcPts val="561"/>
-              </a:spcBef>
-              <a:buClr>
-                <a:srgbClr val="000000"/>
-              </a:buClr>
-              <a:buFont typeface="Arial"/>
-              <a:buChar char="–"/>
-            </a:pPr>
-            <a:r>
-              <a:rPr b="0" lang="en-US" sz="2800" strike="noStrike" u="none">
-                <a:solidFill>
-                  <a:schemeClr val="dk1"/>
-                </a:solidFill>
-                <a:effectLst/>
-                <a:uFillTx/>
-                <a:latin typeface="Calibri"/>
-              </a:rPr>
-              <a:t>Second level</a:t>
-            </a:r>
-            <a:endParaRPr b="0" lang="en-US" sz="2800" strike="noStrike" u="none">
-              <a:solidFill>
-                <a:schemeClr val="dk1"/>
-              </a:solidFill>
-              <a:effectLst/>
-              <a:uFillTx/>
-              <a:latin typeface="Calibri"/>
-            </a:endParaRPr>
-          </a:p>
-          <a:p>
-            <a:pPr lvl="2" marL="1143000" indent="-228600" defTabSz="457200">
-              <a:lnSpc>
-                <a:spcPct val="100000"/>
-              </a:lnSpc>
-              <a:spcBef>
-                <a:spcPts val="479"/>
-              </a:spcBef>
-              <a:buClr>
-                <a:srgbClr val="000000"/>
-              </a:buClr>
-              <a:buFont typeface="Arial"/>
-              <a:buChar char="•"/>
-            </a:pPr>
-            <a:r>
-              <a:rPr b="0" lang="en-US" sz="2400" strike="noStrike" u="none">
-                <a:solidFill>
-                  <a:schemeClr val="dk1"/>
-                </a:solidFill>
-                <a:effectLst/>
-                <a:uFillTx/>
-                <a:latin typeface="Calibri"/>
-              </a:rPr>
-              <a:t>Third level</a:t>
-            </a:r>
-            <a:endParaRPr b="0" lang="en-US" sz="2400" strike="noStrike" u="none">
-              <a:solidFill>
-                <a:schemeClr val="dk1"/>
-              </a:solidFill>
-              <a:effectLst/>
-              <a:uFillTx/>
-              <a:latin typeface="Calibri"/>
-            </a:endParaRPr>
-          </a:p>
-          <a:p>
-            <a:pPr lvl="3" marL="1600200" indent="-228600" defTabSz="457200">
-              <a:lnSpc>
-                <a:spcPct val="100000"/>
-              </a:lnSpc>
-              <a:spcBef>
-                <a:spcPts val="400"/>
-              </a:spcBef>
-              <a:buClr>
-                <a:srgbClr val="000000"/>
-              </a:buClr>
-              <a:buFont typeface="Arial"/>
-              <a:buChar char="–"/>
-            </a:pPr>
-            <a:r>
-              <a:rPr b="0" lang="en-US" sz="2000" strike="noStrike" u="none">
-                <a:solidFill>
-                  <a:schemeClr val="dk1"/>
-                </a:solidFill>
-                <a:effectLst/>
-                <a:uFillTx/>
-                <a:latin typeface="Calibri"/>
-              </a:rPr>
-              <a:t>Fourth level</a:t>
-            </a:r>
-            <a:endParaRPr b="0" lang="en-US" sz="2000" strike="noStrike" u="none">
-              <a:solidFill>
-                <a:schemeClr val="dk1"/>
-              </a:solidFill>
-              <a:effectLst/>
-              <a:uFillTx/>
-              <a:latin typeface="Calibri"/>
-            </a:endParaRPr>
-          </a:p>
-          <a:p>
-            <a:pPr lvl="4" marL="2057400" indent="-228600" defTabSz="457200">
-              <a:lnSpc>
-                <a:spcPct val="100000"/>
-              </a:lnSpc>
-              <a:spcBef>
-                <a:spcPts val="400"/>
-              </a:spcBef>
-              <a:buClr>
-                <a:srgbClr val="000000"/>
-              </a:buClr>
-              <a:buFont typeface="Arial"/>
-              <a:buChar char="»"/>
-            </a:pPr>
-            <a:r>
-              <a:rPr b="0" lang="en-US" sz="2000" strike="noStrike" u="none">
-                <a:solidFill>
-                  <a:schemeClr val="dk1"/>
-                </a:solidFill>
-                <a:effectLst/>
-                <a:uFillTx/>
-                <a:latin typeface="Calibri"/>
-              </a:rPr>
-              <a:t>Fifth level</a:t>
-            </a:r>
-            <a:endParaRPr b="0" lang="en-US" sz="2000" strike="noStrike" u="none">
-              <a:solidFill>
-                <a:schemeClr val="dk1"/>
-              </a:solidFill>
-              <a:effectLst/>
-              <a:uFillTx/>
-              <a:latin typeface="Calibri"/>
-            </a:endParaRPr>
-          </a:p>
-        </p:txBody>
-      </p:sp>
-      <p:sp>
-        <p:nvSpPr>
-          <p:cNvPr id="12" name="PlaceHolder 3"/>
-          <p:cNvSpPr>
-            <a:spLocks noGrp="1"/>
-          </p:cNvSpPr>
-          <p:nvPr>
-            <p:ph type="dt" idx="7"/>
-          </p:nvPr>
-        </p:nvSpPr>
-        <p:spPr>
-          <a:xfrm>
-            <a:off x="457200" y="6356520"/>
-            <a:ext cx="2133360" cy="364680"/>
-          </a:xfrm>
-          <a:prstGeom prst="rect">
-            <a:avLst/>
-          </a:prstGeom>
-          <a:noFill/>
-          <a:ln w="0">
-            <a:noFill/>
-          </a:ln>
-        </p:spPr>
-        <p:txBody>
-          <a:bodyPr lIns="91440" rIns="91440" tIns="45720" bIns="45720" anchor="ctr">
-            <a:noAutofit/>
-          </a:bodyPr>
-          <a:lstStyle>
-            <a:lvl1pPr indent="0" defTabSz="457200">
-              <a:lnSpc>
-                <a:spcPct val="100000"/>
-              </a:lnSpc>
-              <a:buNone/>
-              <a:defRPr b="0" lang="en-US" sz="1200" strike="noStrike" u="none">
-                <a:solidFill>
-                  <a:schemeClr val="dk1">
-                    <a:tint val="75000"/>
-                  </a:schemeClr>
-                </a:solidFill>
-                <a:effectLst/>
-                <a:uFillTx/>
-                <a:latin typeface="Calibri"/>
-              </a:defRPr>
-            </a:lvl1pPr>
-          </a:lstStyle>
-          <a:p>
-            <a:pPr indent="0" defTabSz="457200">
-              <a:lnSpc>
-                <a:spcPct val="100000"/>
-              </a:lnSpc>
-              <a:buNone/>
-            </a:pPr>
-            <a:r>
-              <a:rPr b="0" lang="en-US" sz="1200" strike="noStrike" u="none">
-                <a:solidFill>
-                  <a:schemeClr val="dk1">
-                    <a:tint val="75000"/>
-                  </a:schemeClr>
-                </a:solidFill>
-                <a:effectLst/>
-                <a:uFillTx/>
-                <a:latin typeface="Calibri"/>
-              </a:rPr>
-              <a:t>&lt;Datum/Uhrzeit&gt;</a:t>
-            </a:r>
-            <a:endParaRPr b="0" lang="de-AT" sz="1200" strike="noStrike" u="none">
-              <a:solidFill>
-                <a:srgbClr val="000000"/>
-              </a:solidFill>
-              <a:effectLst/>
-              <a:uFillTx/>
-              <a:latin typeface="Times New Roman"/>
-            </a:endParaRPr>
-          </a:p>
-        </p:txBody>
-      </p:sp>
-      <p:sp>
-        <p:nvSpPr>
-          <p:cNvPr id="13" name="PlaceHolder 4"/>
-          <p:cNvSpPr>
-            <a:spLocks noGrp="1"/>
-          </p:cNvSpPr>
-          <p:nvPr>
-            <p:ph type="ftr" idx="8"/>
-          </p:nvPr>
-        </p:nvSpPr>
-        <p:spPr>
-          <a:xfrm>
-            <a:off x="3124080" y="6356520"/>
-            <a:ext cx="2895120" cy="364680"/>
-          </a:xfrm>
-          <a:prstGeom prst="rect">
-            <a:avLst/>
-          </a:prstGeom>
-          <a:noFill/>
-          <a:ln w="0">
-            <a:noFill/>
-          </a:ln>
-        </p:spPr>
-        <p:txBody>
-          <a:bodyPr lIns="91440" rIns="91440" tIns="45720" bIns="45720" anchor="ctr">
-            <a:noAutofit/>
-          </a:bodyPr>
-          <a:lstStyle>
-            <a:lvl1pPr indent="0" algn="ctr">
-              <a:buNone/>
-              <a:defRPr b="0" lang="de-AT" sz="1400" strike="noStrike" u="none">
-                <a:solidFill>
-                  <a:srgbClr val="000000"/>
-                </a:solidFill>
-                <a:effectLst/>
-                <a:uFillTx/>
-                <a:latin typeface="Times New Roman"/>
-              </a:defRPr>
-            </a:lvl1pPr>
-          </a:lstStyle>
-          <a:p>
-            <a:pPr indent="0" algn="ctr">
-              <a:buNone/>
-            </a:pPr>
-            <a:r>
-              <a:rPr b="0" lang="de-AT" sz="1400" strike="noStrike" u="none">
-                <a:solidFill>
-                  <a:srgbClr val="000000"/>
-                </a:solidFill>
-                <a:effectLst/>
-                <a:uFillTx/>
-                <a:latin typeface="Times New Roman"/>
-              </a:rPr>
-              <a:t>&lt;Fußzeile&gt;</a:t>
-            </a:r>
-            <a:endParaRPr b="0" lang="de-AT" sz="1400" strike="noStrike" u="none">
-              <a:solidFill>
-                <a:srgbClr val="000000"/>
-              </a:solidFill>
-              <a:effectLst/>
-              <a:uFillTx/>
-              <a:latin typeface="Times New Roman"/>
-            </a:endParaRPr>
-          </a:p>
-        </p:txBody>
-      </p:sp>
-      <p:sp>
-        <p:nvSpPr>
-          <p:cNvPr id="14" name="PlaceHolder 5"/>
-          <p:cNvSpPr>
-            <a:spLocks noGrp="1"/>
-          </p:cNvSpPr>
-          <p:nvPr>
-            <p:ph type="sldNum" idx="9"/>
-          </p:nvPr>
-        </p:nvSpPr>
-        <p:spPr>
-          <a:xfrm>
-            <a:off x="6553080" y="6356520"/>
-            <a:ext cx="2133360" cy="364680"/>
-          </a:xfrm>
-          <a:prstGeom prst="rect">
-            <a:avLst/>
-          </a:prstGeom>
-          <a:noFill/>
-          <a:ln w="0">
-            <a:noFill/>
-          </a:ln>
-        </p:spPr>
-        <p:txBody>
-          <a:bodyPr lIns="91440" rIns="91440" tIns="45720" bIns="45720" anchor="ctr">
-            <a:noAutofit/>
-          </a:bodyPr>
-          <a:lstStyle>
-            <a:lvl1pPr indent="0" algn="r" defTabSz="457200">
-              <a:lnSpc>
-                <a:spcPct val="100000"/>
-              </a:lnSpc>
-              <a:buNone/>
-              <a:defRPr b="0" lang="en-US" sz="1200" strike="noStrike" u="none">
-                <a:solidFill>
-                  <a:schemeClr val="dk1">
-                    <a:tint val="75000"/>
-                  </a:schemeClr>
-                </a:solidFill>
-                <a:effectLst/>
-                <a:uFillTx/>
-                <a:latin typeface="Calibri"/>
-              </a:defRPr>
-            </a:lvl1pPr>
-          </a:lstStyle>
-          <a:p>
-            <a:pPr indent="0" algn="r" defTabSz="457200">
-              <a:lnSpc>
-                <a:spcPct val="100000"/>
-              </a:lnSpc>
-              <a:buNone/>
-            </a:pPr>
-            <a:fld id="{5699AAFF-0C3C-4008-BB84-36554372FBF6}" type="slidenum">
+              <a:tabLst>
+                <a:tab algn="l" pos="0"/>
+              </a:tabLst>
+            </a:pPr>
+            <a:fld id="{2107CA31-3FA8-4960-BAD5-9EDE56D46615}" type="slidenum">
               <a:rPr b="0" lang="en-US" sz="1200" strike="noStrike" u="none">
                 <a:solidFill>
                   <a:schemeClr val="dk1">
@@ -2759,8 +2727,8 @@
 </file>
 
 <file path=ppt/slideLayouts/slideLayout4.xml><?xml version="1.0" encoding="utf-8"?>
-<p:sldLayout xmlns:a="http://schemas.openxmlformats.org/drawingml/2006/main" xmlns:p="http://schemas.openxmlformats.org/presentationml/2006/main" xmlns:r="http://schemas.openxmlformats.org/officeDocument/2006/relationships" xmlns:p14="http://schemas.microsoft.com/office/powerpoint/2010/main" xmlns:p15="http://schemas.microsoft.com/office/powerpoint/2012/main" xmlns:mc="http://schemas.openxmlformats.org/markup-compatibility/2006" type="obj" preserve="1">
-  <p:cSld name="Title and Content">
+<p:sldLayout xmlns:a="http://schemas.openxmlformats.org/drawingml/2006/main" xmlns:p="http://schemas.openxmlformats.org/presentationml/2006/main" xmlns:r="http://schemas.openxmlformats.org/officeDocument/2006/relationships" xmlns:p14="http://schemas.microsoft.com/office/powerpoint/2010/main" xmlns:p15="http://schemas.microsoft.com/office/powerpoint/2012/main" xmlns:mc="http://schemas.openxmlformats.org/markup-compatibility/2006" type="title" preserve="1">
+  <p:cSld name="Title Slide">
     <p:bg>
       <p:bgPr>
         <a:solidFill>
@@ -2794,8 +2762,8 @@
         </p:nvSpPr>
         <p:spPr>
           <a:xfrm>
-            <a:off x="457200" y="274680"/>
-            <a:ext cx="8229240" cy="1142640"/>
+            <a:off x="685800" y="2130480"/>
+            <a:ext cx="7771680" cy="1469160"/>
           </a:xfrm>
           <a:prstGeom prst="rect">
             <a:avLst/>
@@ -2815,6 +2783,9 @@
                 <a:spcPct val="100000"/>
               </a:lnSpc>
               <a:buNone/>
+              <a:tabLst>
+                <a:tab algn="l" pos="0"/>
+              </a:tabLst>
             </a:pPr>
             <a:r>
               <a:rPr b="0" lang="en-US" sz="4400" strike="noStrike" u="none">
@@ -2827,13 +2798,13 @@
               </a:rPr>
               <a:t>Click to edit Master title style</a:t>
             </a:r>
-            <a:endParaRPr b="0" lang="en-US" sz="4400" strike="noStrike" u="none">
-              <a:solidFill>
-                <a:schemeClr val="dk1"/>
-              </a:solidFill>
-              <a:effectLst/>
-              <a:uFillTx/>
-              <a:latin typeface="Calibri"/>
+            <a:endParaRPr b="0" lang="de-AT" sz="4400" strike="noStrike" u="none">
+              <a:solidFill>
+                <a:srgbClr val="000000"/>
+              </a:solidFill>
+              <a:effectLst/>
+              <a:uFillTx/>
+              <a:latin typeface="Arial"/>
             </a:endParaRPr>
           </a:p>
         </p:txBody>
@@ -2841,205 +2812,6 @@
       <p:sp>
         <p:nvSpPr>
           <p:cNvPr id="16" name="PlaceHolder 2"/>
-          <p:cNvSpPr>
-            <a:spLocks noGrp="1"/>
-          </p:cNvSpPr>
-          <p:nvPr>
-            <p:ph type="body"/>
-          </p:nvPr>
-        </p:nvSpPr>
-        <p:spPr>
-          <a:xfrm>
-            <a:off x="457200" y="1600200"/>
-            <a:ext cx="8229240" cy="4525560"/>
-          </a:xfrm>
-          <a:prstGeom prst="rect">
-            <a:avLst/>
-          </a:prstGeom>
-          <a:noFill/>
-          <a:ln w="0">
-            <a:noFill/>
-          </a:ln>
-        </p:spPr>
-        <p:txBody>
-          <a:bodyPr lIns="91440" rIns="91440" tIns="45720" bIns="45720" anchor="t">
-            <a:noAutofit/>
-          </a:bodyPr>
-          <a:p>
-            <a:pPr marL="343080" indent="-343080" defTabSz="457200">
-              <a:lnSpc>
-                <a:spcPct val="100000"/>
-              </a:lnSpc>
-              <a:spcBef>
-                <a:spcPts val="641"/>
-              </a:spcBef>
-              <a:buClr>
-                <a:srgbClr val="000000"/>
-              </a:buClr>
-              <a:buFont typeface="Arial"/>
-              <a:buChar char="•"/>
-            </a:pPr>
-            <a:r>
-              <a:rPr b="0" lang="en-US" sz="3200" strike="noStrike" u="none">
-                <a:solidFill>
-                  <a:schemeClr val="dk1"/>
-                </a:solidFill>
-                <a:effectLst/>
-                <a:uFillTx/>
-                <a:latin typeface="Calibri"/>
-              </a:rPr>
-              <a:t>Click to edit Master text styles</a:t>
-            </a:r>
-            <a:endParaRPr b="0" lang="en-US" sz="3200" strike="noStrike" u="none">
-              <a:solidFill>
-                <a:schemeClr val="dk1"/>
-              </a:solidFill>
-              <a:effectLst/>
-              <a:uFillTx/>
-              <a:latin typeface="Calibri"/>
-            </a:endParaRPr>
-          </a:p>
-          <a:p>
-            <a:pPr lvl="1" marL="743040" indent="-285840" defTabSz="457200">
-              <a:lnSpc>
-                <a:spcPct val="100000"/>
-              </a:lnSpc>
-              <a:spcBef>
-                <a:spcPts val="561"/>
-              </a:spcBef>
-              <a:buClr>
-                <a:srgbClr val="000000"/>
-              </a:buClr>
-              <a:buFont typeface="Arial"/>
-              <a:buChar char="–"/>
-            </a:pPr>
-            <a:r>
-              <a:rPr b="0" lang="en-US" sz="2800" strike="noStrike" u="none">
-                <a:solidFill>
-                  <a:schemeClr val="dk1"/>
-                </a:solidFill>
-                <a:effectLst/>
-                <a:uFillTx/>
-                <a:latin typeface="Calibri"/>
-              </a:rPr>
-              <a:t>Second level</a:t>
-            </a:r>
-            <a:endParaRPr b="0" lang="en-US" sz="2800" strike="noStrike" u="none">
-              <a:solidFill>
-                <a:schemeClr val="dk1"/>
-              </a:solidFill>
-              <a:effectLst/>
-              <a:uFillTx/>
-              <a:latin typeface="Calibri"/>
-            </a:endParaRPr>
-          </a:p>
-          <a:p>
-            <a:pPr lvl="2" marL="1143000" indent="-228600" defTabSz="457200">
-              <a:lnSpc>
-                <a:spcPct val="100000"/>
-              </a:lnSpc>
-              <a:spcBef>
-                <a:spcPts val="479"/>
-              </a:spcBef>
-              <a:buClr>
-                <a:srgbClr val="000000"/>
-              </a:buClr>
-              <a:buFont typeface="Arial"/>
-              <a:buChar char="•"/>
-            </a:pPr>
-            <a:r>
-              <a:rPr b="0" lang="en-US" sz="2400" strike="noStrike" u="none">
-                <a:solidFill>
-                  <a:schemeClr val="dk1"/>
-                </a:solidFill>
-                <a:effectLst/>
-                <a:uFillTx/>
-                <a:latin typeface="Calibri"/>
-              </a:rPr>
-              <a:t>Third level</a:t>
-            </a:r>
-            <a:endParaRPr b="0" lang="en-US" sz="2400" strike="noStrike" u="none">
-              <a:solidFill>
-                <a:schemeClr val="dk1"/>
-              </a:solidFill>
-              <a:effectLst/>
-              <a:uFillTx/>
-              <a:latin typeface="Calibri"/>
-            </a:endParaRPr>
-          </a:p>
-          <a:p>
-            <a:pPr lvl="3" marL="1600200" indent="-228600" defTabSz="457200">
-              <a:lnSpc>
-                <a:spcPct val="100000"/>
-              </a:lnSpc>
-              <a:spcBef>
-                <a:spcPts val="400"/>
-              </a:spcBef>
-              <a:buClr>
-                <a:srgbClr val="000000"/>
-              </a:buClr>
-              <a:buFont typeface="Arial"/>
-              <a:buChar char="–"/>
-            </a:pPr>
-            <a:r>
-              <a:rPr b="0" lang="en-US" sz="2000" strike="noStrike" u="none">
-                <a:solidFill>
-                  <a:schemeClr val="dk1"/>
-                </a:solidFill>
-                <a:effectLst/>
-                <a:uFillTx/>
-                <a:latin typeface="Calibri"/>
-              </a:rPr>
-              <a:t>Fourth level</a:t>
-            </a:r>
-            <a:endParaRPr b="0" lang="en-US" sz="2000" strike="noStrike" u="none">
-              <a:solidFill>
-                <a:schemeClr val="dk1"/>
-              </a:solidFill>
-              <a:effectLst/>
-              <a:uFillTx/>
-              <a:latin typeface="Calibri"/>
-            </a:endParaRPr>
-          </a:p>
-          <a:p>
-            <a:pPr lvl="4" marL="2057400" indent="-228600" defTabSz="457200">
-              <a:lnSpc>
-                <a:spcPct val="100000"/>
-              </a:lnSpc>
-              <a:spcBef>
-                <a:spcPts val="400"/>
-              </a:spcBef>
-              <a:buClr>
-                <a:srgbClr val="000000"/>
-              </a:buClr>
-              <a:buFont typeface="Arial"/>
-              <a:buChar char="»"/>
-            </a:pPr>
-            <a:r>
-              <a:rPr b="0" lang="en-US" sz="2000" strike="noStrike" u="none">
-                <a:solidFill>
-                  <a:schemeClr val="dk1"/>
-                </a:solidFill>
-                <a:effectLst/>
-                <a:uFillTx/>
-                <a:latin typeface="Calibri"/>
-              </a:rPr>
-              <a:t>Fifth level</a:t>
-            </a:r>
-            <a:endParaRPr b="0" lang="en-US" sz="2000" strike="noStrike" u="none">
-              <a:solidFill>
-                <a:schemeClr val="dk1"/>
-              </a:solidFill>
-              <a:effectLst/>
-              <a:uFillTx/>
-              <a:latin typeface="Calibri"/>
-            </a:endParaRPr>
-          </a:p>
-        </p:txBody>
-      </p:sp>
-      <p:sp>
-        <p:nvSpPr>
-          <p:cNvPr id="17" name="PlaceHolder 3"/>
           <p:cNvSpPr>
             <a:spLocks noGrp="1"/>
           </p:cNvSpPr>
@@ -3050,7 +2822,7 @@
         <p:spPr>
           <a:xfrm>
             <a:off x="457200" y="6356520"/>
-            <a:ext cx="2133360" cy="364680"/>
+            <a:ext cx="2133000" cy="364320"/>
           </a:xfrm>
           <a:prstGeom prst="rect">
             <a:avLst/>
@@ -3070,6 +2842,9 @@
                 <a:spcPct val="100000"/>
               </a:lnSpc>
               <a:buNone/>
+              <a:tabLst>
+                <a:tab algn="l" pos="0"/>
+              </a:tabLst>
               <a:defRPr b="0" lang="en-US" sz="1200" strike="noStrike" u="none">
                 <a:solidFill>
                   <a:schemeClr val="dk1">
@@ -3088,6 +2863,9 @@
                 <a:spcPct val="100000"/>
               </a:lnSpc>
               <a:buNone/>
+              <a:tabLst>
+                <a:tab algn="l" pos="0"/>
+              </a:tabLst>
             </a:pPr>
             <a:r>
               <a:rPr b="0" lang="en-US" sz="1200" strike="noStrike" u="none">
@@ -3115,7 +2893,7 @@
       </p:sp>
       <p:sp>
         <p:nvSpPr>
-          <p:cNvPr id="18" name="PlaceHolder 4"/>
+          <p:cNvPr id="17" name="PlaceHolder 3"/>
           <p:cNvSpPr>
             <a:spLocks noGrp="1"/>
           </p:cNvSpPr>
@@ -3126,7 +2904,7 @@
         <p:spPr>
           <a:xfrm>
             <a:off x="3124080" y="6356520"/>
-            <a:ext cx="2895120" cy="364680"/>
+            <a:ext cx="2894760" cy="364320"/>
           </a:xfrm>
           <a:prstGeom prst="rect">
             <a:avLst/>
@@ -3142,7 +2920,13 @@
           </a:bodyPr>
           <a:lstStyle>
             <a:lvl1pPr indent="0" algn="ctr">
-              <a:buNone/>
+              <a:lnSpc>
+                <a:spcPct val="100000"/>
+              </a:lnSpc>
+              <a:buNone/>
+              <a:tabLst>
+                <a:tab algn="l" pos="0"/>
+              </a:tabLst>
               <a:defRPr b="0" lang="de-AT" sz="1400" strike="noStrike" u="none">
                 <a:solidFill>
                   <a:srgbClr val="000000"/>
@@ -3155,7 +2939,13 @@
           </a:lstStyle>
           <a:p>
             <a:pPr indent="0" algn="ctr">
-              <a:buNone/>
+              <a:lnSpc>
+                <a:spcPct val="100000"/>
+              </a:lnSpc>
+              <a:buNone/>
+              <a:tabLst>
+                <a:tab algn="l" pos="0"/>
+              </a:tabLst>
             </a:pPr>
             <a:r>
               <a:rPr b="0" lang="de-AT" sz="1400" strike="noStrike" u="none">
@@ -3181,7 +2971,7 @@
       </p:sp>
       <p:sp>
         <p:nvSpPr>
-          <p:cNvPr id="19" name="PlaceHolder 5"/>
+          <p:cNvPr id="18" name="PlaceHolder 4"/>
           <p:cNvSpPr>
             <a:spLocks noGrp="1"/>
           </p:cNvSpPr>
@@ -3192,7 +2982,7 @@
         <p:spPr>
           <a:xfrm>
             <a:off x="6553080" y="6356520"/>
-            <a:ext cx="2133360" cy="364680"/>
+            <a:ext cx="2133000" cy="364320"/>
           </a:xfrm>
           <a:prstGeom prst="rect">
             <a:avLst/>
@@ -3212,6 +3002,9 @@
                 <a:spcPct val="100000"/>
               </a:lnSpc>
               <a:buNone/>
+              <a:tabLst>
+                <a:tab algn="l" pos="0"/>
+              </a:tabLst>
               <a:defRPr b="0" lang="en-US" sz="1200" strike="noStrike" u="none">
                 <a:solidFill>
                   <a:schemeClr val="dk1">
@@ -3230,8 +3023,11 @@
                 <a:spcPct val="100000"/>
               </a:lnSpc>
               <a:buNone/>
-            </a:pPr>
-            <a:fld id="{BB30E80C-C645-4436-8D29-D1195DC063EC}" type="slidenum">
+              <a:tabLst>
+                <a:tab algn="l" pos="0"/>
+              </a:tabLst>
+            </a:pPr>
+            <a:fld id="{A463AA17-E2FF-4851-A21C-2C22D3C3416D}" type="slidenum">
               <a:rPr b="0" lang="en-US" sz="1200" strike="noStrike" u="none">
                 <a:solidFill>
                   <a:schemeClr val="dk1">
@@ -3251,6 +3047,280 @@
               <a:effectLst/>
               <a:uFillTx/>
               <a:latin typeface="Times New Roman"/>
+            </a:endParaRPr>
+          </a:p>
+        </p:txBody>
+      </p:sp>
+      <p:sp>
+        <p:nvSpPr>
+          <p:cNvPr id="19" name="PlaceHolder 5"/>
+          <p:cNvSpPr>
+            <a:spLocks noGrp="1"/>
+          </p:cNvSpPr>
+          <p:nvPr>
+            <p:ph type="body"/>
+          </p:nvPr>
+        </p:nvSpPr>
+        <p:spPr>
+          <a:xfrm>
+            <a:off x="457200" y="1604520"/>
+            <a:ext cx="8228880" cy="3976920"/>
+          </a:xfrm>
+          <a:prstGeom prst="rect">
+            <a:avLst/>
+          </a:prstGeom>
+          <a:noFill/>
+          <a:ln w="0">
+            <a:noFill/>
+          </a:ln>
+        </p:spPr>
+        <p:txBody>
+          <a:bodyPr lIns="0" rIns="0" tIns="0" bIns="0" anchor="t">
+            <a:normAutofit/>
+          </a:bodyPr>
+          <a:p>
+            <a:pPr marL="432000" indent="-324000">
+              <a:lnSpc>
+                <a:spcPct val="100000"/>
+              </a:lnSpc>
+              <a:spcBef>
+                <a:spcPts val="1417"/>
+              </a:spcBef>
+              <a:buClr>
+                <a:srgbClr val="000000"/>
+              </a:buClr>
+              <a:buSzPct val="45000"/>
+              <a:buFont typeface="Wingdings" charset="2"/>
+              <a:buChar char=""/>
+            </a:pPr>
+            <a:r>
+              <a:rPr b="0" lang="en-US" sz="3200" strike="noStrike" u="none">
+                <a:solidFill>
+                  <a:schemeClr val="dk1"/>
+                </a:solidFill>
+                <a:effectLst/>
+                <a:uFillTx/>
+                <a:latin typeface="Calibri"/>
+              </a:rPr>
+              <a:t>Format des Gliederungstextes durch Klicken bearbeiten</a:t>
+            </a:r>
+            <a:endParaRPr b="0" lang="de-AT" sz="3200" strike="noStrike" u="none">
+              <a:solidFill>
+                <a:srgbClr val="000000"/>
+              </a:solidFill>
+              <a:effectLst/>
+              <a:uFillTx/>
+              <a:latin typeface="Arial"/>
+            </a:endParaRPr>
+          </a:p>
+          <a:p>
+            <a:pPr lvl="1" marL="864000" indent="-324000">
+              <a:lnSpc>
+                <a:spcPct val="100000"/>
+              </a:lnSpc>
+              <a:spcBef>
+                <a:spcPts val="1134"/>
+              </a:spcBef>
+              <a:buClr>
+                <a:srgbClr val="000000"/>
+              </a:buClr>
+              <a:buSzPct val="75000"/>
+              <a:buFont typeface="Symbol" charset="2"/>
+              <a:buChar char=""/>
+            </a:pPr>
+            <a:r>
+              <a:rPr b="0" lang="en-US" sz="2400" strike="noStrike" u="none">
+                <a:solidFill>
+                  <a:schemeClr val="dk1"/>
+                </a:solidFill>
+                <a:effectLst/>
+                <a:uFillTx/>
+                <a:latin typeface="Calibri"/>
+              </a:rPr>
+              <a:t>Zweite Gliederungsebene</a:t>
+            </a:r>
+            <a:endParaRPr b="0" lang="de-AT" sz="2400" strike="noStrike" u="none">
+              <a:solidFill>
+                <a:srgbClr val="000000"/>
+              </a:solidFill>
+              <a:effectLst/>
+              <a:uFillTx/>
+              <a:latin typeface="Arial"/>
+            </a:endParaRPr>
+          </a:p>
+          <a:p>
+            <a:pPr lvl="2" marL="1296000" indent="-288000">
+              <a:lnSpc>
+                <a:spcPct val="100000"/>
+              </a:lnSpc>
+              <a:spcBef>
+                <a:spcPts val="850"/>
+              </a:spcBef>
+              <a:buClr>
+                <a:srgbClr val="000000"/>
+              </a:buClr>
+              <a:buSzPct val="45000"/>
+              <a:buFont typeface="Wingdings" charset="2"/>
+              <a:buChar char=""/>
+            </a:pPr>
+            <a:r>
+              <a:rPr b="0" lang="en-US" sz="2000" strike="noStrike" u="none">
+                <a:solidFill>
+                  <a:schemeClr val="dk1"/>
+                </a:solidFill>
+                <a:effectLst/>
+                <a:uFillTx/>
+                <a:latin typeface="Calibri"/>
+              </a:rPr>
+              <a:t>Dritte Gliederungsebene</a:t>
+            </a:r>
+            <a:endParaRPr b="0" lang="de-AT" sz="2000" strike="noStrike" u="none">
+              <a:solidFill>
+                <a:srgbClr val="000000"/>
+              </a:solidFill>
+              <a:effectLst/>
+              <a:uFillTx/>
+              <a:latin typeface="Arial"/>
+            </a:endParaRPr>
+          </a:p>
+          <a:p>
+            <a:pPr lvl="3" marL="1728000" indent="-216000">
+              <a:lnSpc>
+                <a:spcPct val="100000"/>
+              </a:lnSpc>
+              <a:spcBef>
+                <a:spcPts val="567"/>
+              </a:spcBef>
+              <a:buClr>
+                <a:srgbClr val="000000"/>
+              </a:buClr>
+              <a:buSzPct val="75000"/>
+              <a:buFont typeface="Symbol" charset="2"/>
+              <a:buChar char=""/>
+            </a:pPr>
+            <a:r>
+              <a:rPr b="0" lang="en-US" sz="2000" strike="noStrike" u="none">
+                <a:solidFill>
+                  <a:schemeClr val="dk1"/>
+                </a:solidFill>
+                <a:effectLst/>
+                <a:uFillTx/>
+                <a:latin typeface="Calibri"/>
+              </a:rPr>
+              <a:t>Vierte Gliederungsebene</a:t>
+            </a:r>
+            <a:endParaRPr b="0" lang="de-AT" sz="2000" strike="noStrike" u="none">
+              <a:solidFill>
+                <a:srgbClr val="000000"/>
+              </a:solidFill>
+              <a:effectLst/>
+              <a:uFillTx/>
+              <a:latin typeface="Arial"/>
+            </a:endParaRPr>
+          </a:p>
+          <a:p>
+            <a:pPr lvl="4" marL="2160000" indent="-216000">
+              <a:lnSpc>
+                <a:spcPct val="100000"/>
+              </a:lnSpc>
+              <a:spcBef>
+                <a:spcPts val="283"/>
+              </a:spcBef>
+              <a:buClr>
+                <a:srgbClr val="000000"/>
+              </a:buClr>
+              <a:buSzPct val="45000"/>
+              <a:buFont typeface="Wingdings" charset="2"/>
+              <a:buChar char=""/>
+            </a:pPr>
+            <a:r>
+              <a:rPr b="0" lang="en-US" sz="2000" strike="noStrike" u="none">
+                <a:solidFill>
+                  <a:schemeClr val="dk1"/>
+                </a:solidFill>
+                <a:effectLst/>
+                <a:uFillTx/>
+                <a:latin typeface="Calibri"/>
+              </a:rPr>
+              <a:t>Fünfte Gliederungsebene</a:t>
+            </a:r>
+            <a:endParaRPr b="0" lang="de-AT" sz="2000" strike="noStrike" u="none">
+              <a:solidFill>
+                <a:srgbClr val="000000"/>
+              </a:solidFill>
+              <a:effectLst/>
+              <a:uFillTx/>
+              <a:latin typeface="Arial"/>
+            </a:endParaRPr>
+          </a:p>
+          <a:p>
+            <a:pPr lvl="5" marL="2592000" indent="-216000">
+              <a:lnSpc>
+                <a:spcPct val="100000"/>
+              </a:lnSpc>
+              <a:spcBef>
+                <a:spcPts val="283"/>
+              </a:spcBef>
+              <a:buClr>
+                <a:srgbClr val="000000"/>
+              </a:buClr>
+              <a:buSzPct val="45000"/>
+              <a:buFont typeface="Wingdings" charset="2"/>
+              <a:buChar char=""/>
+            </a:pPr>
+            <a:r>
+              <a:rPr b="0" lang="en-US" sz="2000" strike="noStrike" u="none">
+                <a:solidFill>
+                  <a:schemeClr val="dk1"/>
+                </a:solidFill>
+                <a:effectLst/>
+                <a:uFillTx/>
+                <a:latin typeface="Calibri"/>
+              </a:rPr>
+              <a:t>Sechste Gliederungsebene</a:t>
+            </a:r>
+            <a:endParaRPr b="0" lang="de-AT" sz="2000" strike="noStrike" u="none">
+              <a:solidFill>
+                <a:srgbClr val="000000"/>
+              </a:solidFill>
+              <a:effectLst/>
+              <a:uFillTx/>
+              <a:latin typeface="Arial"/>
+            </a:endParaRPr>
+          </a:p>
+          <a:p>
+            <a:pPr lvl="6" marL="3024000" indent="-216000">
+              <a:lnSpc>
+                <a:spcPct val="100000"/>
+              </a:lnSpc>
+              <a:spcBef>
+                <a:spcPts val="283"/>
+              </a:spcBef>
+              <a:buClr>
+                <a:srgbClr val="000000"/>
+              </a:buClr>
+              <a:buSzPct val="45000"/>
+              <a:buFont typeface="Wingdings" charset="2"/>
+              <a:buChar char=""/>
+            </a:pPr>
+            <a:r>
+              <a:rPr b="0" lang="en-US" sz="2000" strike="noStrike" u="none">
+                <a:solidFill>
+                  <a:schemeClr val="dk1"/>
+                </a:solidFill>
+                <a:effectLst/>
+                <a:uFillTx/>
+                <a:latin typeface="Calibri"/>
+              </a:rPr>
+              <a:t>Siebte Gliederungsebene</a:t>
+            </a:r>
+            <a:endParaRPr b="0" lang="de-AT" sz="2000" strike="noStrike" u="none">
+              <a:solidFill>
+                <a:srgbClr val="000000"/>
+              </a:solidFill>
+              <a:effectLst/>
+              <a:uFillTx/>
+              <a:latin typeface="Arial"/>
             </a:endParaRPr>
           </a:p>
         </p:txBody>
@@ -3261,8 +3331,8 @@
 </file>
 
 <file path=ppt/slideLayouts/slideLayout5.xml><?xml version="1.0" encoding="utf-8"?>
-<p:sldLayout xmlns:a="http://schemas.openxmlformats.org/drawingml/2006/main" xmlns:p="http://schemas.openxmlformats.org/presentationml/2006/main" xmlns:r="http://schemas.openxmlformats.org/officeDocument/2006/relationships" xmlns:p14="http://schemas.microsoft.com/office/powerpoint/2010/main" xmlns:p15="http://schemas.microsoft.com/office/powerpoint/2012/main" xmlns:mc="http://schemas.openxmlformats.org/markup-compatibility/2006" type="blank" preserve="1">
-  <p:cSld name="Section Header">
+<p:sldLayout xmlns:a="http://schemas.openxmlformats.org/drawingml/2006/main" xmlns:p="http://schemas.openxmlformats.org/presentationml/2006/main" xmlns:r="http://schemas.openxmlformats.org/officeDocument/2006/relationships" xmlns:p14="http://schemas.microsoft.com/office/powerpoint/2010/main" xmlns:p15="http://schemas.microsoft.com/office/powerpoint/2012/main" xmlns:mc="http://schemas.openxmlformats.org/markup-compatibility/2006" type="vertTx" preserve="1">
+  <p:cSld name="Title and Vertical Text">
     <p:bg>
       <p:bgPr>
         <a:solidFill>
@@ -3296,8 +3366,8 @@
         </p:nvSpPr>
         <p:spPr>
           <a:xfrm>
-            <a:off x="722160" y="4406760"/>
-            <a:ext cx="7772040" cy="1361880"/>
+            <a:off x="457200" y="274680"/>
+            <a:ext cx="8228880" cy="1142280"/>
           </a:xfrm>
           <a:prstGeom prst="rect">
             <a:avLst/>
@@ -3308,18 +3378,21 @@
           </a:ln>
         </p:spPr>
         <p:txBody>
-          <a:bodyPr lIns="91440" rIns="91440" tIns="45720" bIns="45720" anchor="t">
+          <a:bodyPr lIns="91440" rIns="91440" tIns="45720" bIns="45720" anchor="ctr">
             <a:noAutofit/>
           </a:bodyPr>
           <a:p>
-            <a:pPr indent="0" defTabSz="457200">
-              <a:lnSpc>
-                <a:spcPct val="100000"/>
-              </a:lnSpc>
-              <a:buNone/>
-            </a:pPr>
-            <a:r>
-              <a:rPr b="1" lang="en-US" sz="4000" strike="noStrike" u="none" cap="all">
+            <a:pPr indent="0" algn="ctr" defTabSz="457200">
+              <a:lnSpc>
+                <a:spcPct val="100000"/>
+              </a:lnSpc>
+              <a:buNone/>
+              <a:tabLst>
+                <a:tab algn="l" pos="0"/>
+              </a:tabLst>
+            </a:pPr>
+            <a:r>
+              <a:rPr b="0" lang="en-US" sz="4400" strike="noStrike" u="none">
                 <a:solidFill>
                   <a:schemeClr val="dk1"/>
                 </a:solidFill>
@@ -3329,13 +3402,13 @@
               </a:rPr>
               <a:t>Click to edit Master title style</a:t>
             </a:r>
-            <a:endParaRPr b="0" lang="en-US" sz="4000" strike="noStrike" u="none">
-              <a:solidFill>
-                <a:schemeClr val="dk1"/>
-              </a:solidFill>
-              <a:effectLst/>
-              <a:uFillTx/>
-              <a:latin typeface="Calibri"/>
+            <a:endParaRPr b="0" lang="de-AT" sz="4400" strike="noStrike" u="none">
+              <a:solidFill>
+                <a:srgbClr val="000000"/>
+              </a:solidFill>
+              <a:effectLst/>
+              <a:uFillTx/>
+              <a:latin typeface="Arial"/>
             </a:endParaRPr>
           </a:p>
         </p:txBody>
@@ -3352,8 +3425,8 @@
         </p:nvSpPr>
         <p:spPr>
           <a:xfrm>
-            <a:off x="722160" y="2906640"/>
-            <a:ext cx="7772040" cy="1499760"/>
+            <a:off x="457200" y="1600200"/>
+            <a:ext cx="8228880" cy="4525200"/>
           </a:xfrm>
           <a:prstGeom prst="rect">
             <a:avLst/>
@@ -3364,42 +3437,177 @@
           </a:ln>
         </p:spPr>
         <p:txBody>
-          <a:bodyPr lIns="91440" rIns="91440" tIns="45720" bIns="45720" anchor="b">
+          <a:bodyPr lIns="91440" rIns="91440" tIns="45720" bIns="45720" anchor="t" vert="eaVert">
             <a:noAutofit/>
           </a:bodyPr>
           <a:p>
-            <a:pPr indent="0" defTabSz="457200">
+            <a:pPr marL="343080" indent="-343080" defTabSz="457200">
+              <a:lnSpc>
+                <a:spcPct val="100000"/>
+              </a:lnSpc>
+              <a:spcBef>
+                <a:spcPts val="641"/>
+              </a:spcBef>
+              <a:buClr>
+                <a:srgbClr val="000000"/>
+              </a:buClr>
+              <a:buFont typeface="Arial"/>
+              <a:buChar char="•"/>
+            </a:pPr>
+            <a:r>
+              <a:rPr b="0" lang="en-US" sz="3200" strike="noStrike" u="none">
+                <a:solidFill>
+                  <a:schemeClr val="dk1"/>
+                </a:solidFill>
+                <a:effectLst/>
+                <a:uFillTx/>
+                <a:latin typeface="Calibri"/>
+              </a:rPr>
+              <a:t>Click to edit Master text styles</a:t>
+            </a:r>
+            <a:endParaRPr b="0" lang="de-AT" sz="3200" strike="noStrike" u="none">
+              <a:solidFill>
+                <a:srgbClr val="000000"/>
+              </a:solidFill>
+              <a:effectLst/>
+              <a:uFillTx/>
+              <a:latin typeface="Arial"/>
+            </a:endParaRPr>
+          </a:p>
+          <a:p>
+            <a:pPr lvl="1" marL="743040" indent="-285840" defTabSz="457200">
+              <a:lnSpc>
+                <a:spcPct val="100000"/>
+              </a:lnSpc>
+              <a:spcBef>
+                <a:spcPts val="561"/>
+              </a:spcBef>
+              <a:buClr>
+                <a:srgbClr val="000000"/>
+              </a:buClr>
+              <a:buFont typeface="Arial"/>
+              <a:buChar char="–"/>
+            </a:pPr>
+            <a:r>
+              <a:rPr b="0" lang="en-US" sz="2800" strike="noStrike" u="none">
+                <a:solidFill>
+                  <a:schemeClr val="dk1"/>
+                </a:solidFill>
+                <a:effectLst/>
+                <a:uFillTx/>
+                <a:latin typeface="Calibri"/>
+              </a:rPr>
+              <a:t>Second level</a:t>
+            </a:r>
+            <a:endParaRPr b="0" lang="de-AT" sz="2800" strike="noStrike" u="none">
+              <a:solidFill>
+                <a:srgbClr val="000000"/>
+              </a:solidFill>
+              <a:effectLst/>
+              <a:uFillTx/>
+              <a:latin typeface="Arial"/>
+            </a:endParaRPr>
+          </a:p>
+          <a:p>
+            <a:pPr lvl="2" marL="1143000" indent="-228600" defTabSz="457200">
+              <a:lnSpc>
+                <a:spcPct val="100000"/>
+              </a:lnSpc>
+              <a:spcBef>
+                <a:spcPts val="479"/>
+              </a:spcBef>
+              <a:buClr>
+                <a:srgbClr val="000000"/>
+              </a:buClr>
+              <a:buFont typeface="Arial"/>
+              <a:buChar char="•"/>
+            </a:pPr>
+            <a:r>
+              <a:rPr b="0" lang="en-US" sz="2400" strike="noStrike" u="none">
+                <a:solidFill>
+                  <a:schemeClr val="dk1"/>
+                </a:solidFill>
+                <a:effectLst/>
+                <a:uFillTx/>
+                <a:latin typeface="Calibri"/>
+              </a:rPr>
+              <a:t>Third level</a:t>
+            </a:r>
+            <a:endParaRPr b="0" lang="de-AT" sz="2400" strike="noStrike" u="none">
+              <a:solidFill>
+                <a:srgbClr val="000000"/>
+              </a:solidFill>
+              <a:effectLst/>
+              <a:uFillTx/>
+              <a:latin typeface="Arial"/>
+            </a:endParaRPr>
+          </a:p>
+          <a:p>
+            <a:pPr lvl="3" marL="1600200" indent="-228600" defTabSz="457200">
               <a:lnSpc>
                 <a:spcPct val="100000"/>
               </a:lnSpc>
               <a:spcBef>
                 <a:spcPts val="400"/>
               </a:spcBef>
-              <a:buNone/>
-              <a:tabLst>
-                <a:tab algn="l" pos="0"/>
-              </a:tabLst>
+              <a:buClr>
+                <a:srgbClr val="000000"/>
+              </a:buClr>
+              <a:buFont typeface="Arial"/>
+              <a:buChar char="–"/>
             </a:pPr>
             <a:r>
               <a:rPr b="0" lang="en-US" sz="2000" strike="noStrike" u="none">
                 <a:solidFill>
-                  <a:schemeClr val="dk1">
-                    <a:tint val="75000"/>
-                  </a:schemeClr>
-                </a:solidFill>
-                <a:effectLst/>
-                <a:uFillTx/>
-                <a:latin typeface="Calibri"/>
-              </a:rPr>
-              <a:t>Click to edit Master text styles</a:t>
-            </a:r>
-            <a:endParaRPr b="0" lang="en-US" sz="2000" strike="noStrike" u="none">
-              <a:solidFill>
-                <a:schemeClr val="dk1"/>
-              </a:solidFill>
-              <a:effectLst/>
-              <a:uFillTx/>
-              <a:latin typeface="Calibri"/>
+                  <a:schemeClr val="dk1"/>
+                </a:solidFill>
+                <a:effectLst/>
+                <a:uFillTx/>
+                <a:latin typeface="Calibri"/>
+              </a:rPr>
+              <a:t>Fourth level</a:t>
+            </a:r>
+            <a:endParaRPr b="0" lang="de-AT" sz="2000" strike="noStrike" u="none">
+              <a:solidFill>
+                <a:srgbClr val="000000"/>
+              </a:solidFill>
+              <a:effectLst/>
+              <a:uFillTx/>
+              <a:latin typeface="Arial"/>
+            </a:endParaRPr>
+          </a:p>
+          <a:p>
+            <a:pPr lvl="4" marL="2057400" indent="-228600" defTabSz="457200">
+              <a:lnSpc>
+                <a:spcPct val="100000"/>
+              </a:lnSpc>
+              <a:spcBef>
+                <a:spcPts val="400"/>
+              </a:spcBef>
+              <a:buClr>
+                <a:srgbClr val="000000"/>
+              </a:buClr>
+              <a:buFont typeface="Arial"/>
+              <a:buChar char="»"/>
+            </a:pPr>
+            <a:r>
+              <a:rPr b="0" lang="en-US" sz="2000" strike="noStrike" u="none">
+                <a:solidFill>
+                  <a:schemeClr val="dk1"/>
+                </a:solidFill>
+                <a:effectLst/>
+                <a:uFillTx/>
+                <a:latin typeface="Calibri"/>
+              </a:rPr>
+              <a:t>Fifth level</a:t>
+            </a:r>
+            <a:endParaRPr b="0" lang="de-AT" sz="2000" strike="noStrike" u="none">
+              <a:solidFill>
+                <a:srgbClr val="000000"/>
+              </a:solidFill>
+              <a:effectLst/>
+              <a:uFillTx/>
+              <a:latin typeface="Arial"/>
             </a:endParaRPr>
           </a:p>
         </p:txBody>
@@ -3417,7 +3625,7 @@
         <p:spPr>
           <a:xfrm>
             <a:off x="457200" y="6356520"/>
-            <a:ext cx="2133360" cy="364680"/>
+            <a:ext cx="2133000" cy="364320"/>
           </a:xfrm>
           <a:prstGeom prst="rect">
             <a:avLst/>
@@ -3437,6 +3645,9 @@
                 <a:spcPct val="100000"/>
               </a:lnSpc>
               <a:buNone/>
+              <a:tabLst>
+                <a:tab algn="l" pos="0"/>
+              </a:tabLst>
               <a:defRPr b="0" lang="en-US" sz="1200" strike="noStrike" u="none">
                 <a:solidFill>
                   <a:schemeClr val="dk1">
@@ -3455,6 +3666,9 @@
                 <a:spcPct val="100000"/>
               </a:lnSpc>
               <a:buNone/>
+              <a:tabLst>
+                <a:tab algn="l" pos="0"/>
+              </a:tabLst>
             </a:pPr>
             <a:r>
               <a:rPr b="0" lang="en-US" sz="1200" strike="noStrike" u="none">
@@ -3493,7 +3707,7 @@
         <p:spPr>
           <a:xfrm>
             <a:off x="3124080" y="6356520"/>
-            <a:ext cx="2895120" cy="364680"/>
+            <a:ext cx="2894760" cy="364320"/>
           </a:xfrm>
           <a:prstGeom prst="rect">
             <a:avLst/>
@@ -3509,7 +3723,13 @@
           </a:bodyPr>
           <a:lstStyle>
             <a:lvl1pPr indent="0" algn="ctr">
-              <a:buNone/>
+              <a:lnSpc>
+                <a:spcPct val="100000"/>
+              </a:lnSpc>
+              <a:buNone/>
+              <a:tabLst>
+                <a:tab algn="l" pos="0"/>
+              </a:tabLst>
               <a:defRPr b="0" lang="de-AT" sz="1400" strike="noStrike" u="none">
                 <a:solidFill>
                   <a:srgbClr val="000000"/>
@@ -3522,7 +3742,13 @@
           </a:lstStyle>
           <a:p>
             <a:pPr indent="0" algn="ctr">
-              <a:buNone/>
+              <a:lnSpc>
+                <a:spcPct val="100000"/>
+              </a:lnSpc>
+              <a:buNone/>
+              <a:tabLst>
+                <a:tab algn="l" pos="0"/>
+              </a:tabLst>
             </a:pPr>
             <a:r>
               <a:rPr b="0" lang="de-AT" sz="1400" strike="noStrike" u="none">
@@ -3559,7 +3785,7 @@
         <p:spPr>
           <a:xfrm>
             <a:off x="6553080" y="6356520"/>
-            <a:ext cx="2133360" cy="364680"/>
+            <a:ext cx="2133000" cy="364320"/>
           </a:xfrm>
           <a:prstGeom prst="rect">
             <a:avLst/>
@@ -3579,6 +3805,9 @@
                 <a:spcPct val="100000"/>
               </a:lnSpc>
               <a:buNone/>
+              <a:tabLst>
+                <a:tab algn="l" pos="0"/>
+              </a:tabLst>
               <a:defRPr b="0" lang="en-US" sz="1200" strike="noStrike" u="none">
                 <a:solidFill>
                   <a:schemeClr val="dk1">
@@ -3597,8 +3826,11 @@
                 <a:spcPct val="100000"/>
               </a:lnSpc>
               <a:buNone/>
-            </a:pPr>
-            <a:fld id="{23E7674E-B2E0-4A73-BCC2-125C56172709}" type="slidenum">
+              <a:tabLst>
+                <a:tab algn="l" pos="0"/>
+              </a:tabLst>
+            </a:pPr>
+            <a:fld id="{03FA2014-9525-473C-ACC2-D8A32B164577}" type="slidenum">
               <a:rPr b="0" lang="en-US" sz="1200" strike="noStrike" u="none">
                 <a:solidFill>
                   <a:schemeClr val="dk1">
@@ -3628,8 +3860,8 @@
 </file>
 
 <file path=ppt/slideLayouts/slideLayout6.xml><?xml version="1.0" encoding="utf-8"?>
-<p:sldLayout xmlns:a="http://schemas.openxmlformats.org/drawingml/2006/main" xmlns:p="http://schemas.openxmlformats.org/presentationml/2006/main" xmlns:r="http://schemas.openxmlformats.org/officeDocument/2006/relationships" xmlns:p14="http://schemas.microsoft.com/office/powerpoint/2010/main" xmlns:p15="http://schemas.microsoft.com/office/powerpoint/2012/main" xmlns:mc="http://schemas.openxmlformats.org/markup-compatibility/2006" type="twoObj" preserve="1">
-  <p:cSld name="Two Content">
+<p:sldLayout xmlns:a="http://schemas.openxmlformats.org/drawingml/2006/main" xmlns:p="http://schemas.openxmlformats.org/presentationml/2006/main" xmlns:r="http://schemas.openxmlformats.org/officeDocument/2006/relationships" xmlns:p14="http://schemas.microsoft.com/office/powerpoint/2010/main" xmlns:p15="http://schemas.microsoft.com/office/powerpoint/2012/main" xmlns:mc="http://schemas.openxmlformats.org/markup-compatibility/2006" type="vertTitleAndTx" preserve="1">
+  <p:cSld name="Vertical Title and Text">
     <p:bg>
       <p:bgPr>
         <a:solidFill>
@@ -3663,8 +3895,8 @@
         </p:nvSpPr>
         <p:spPr>
           <a:xfrm>
-            <a:off x="457200" y="274680"/>
-            <a:ext cx="8229240" cy="1142640"/>
+            <a:off x="6629400" y="274680"/>
+            <a:ext cx="2056680" cy="5850720"/>
           </a:xfrm>
           <a:prstGeom prst="rect">
             <a:avLst/>
@@ -3675,7 +3907,7 @@
           </a:ln>
         </p:spPr>
         <p:txBody>
-          <a:bodyPr lIns="91440" rIns="91440" tIns="45720" bIns="45720" anchor="ctr">
+          <a:bodyPr lIns="91440" rIns="91440" tIns="45720" bIns="45720" anchor="ctr" vert="eaVert">
             <a:noAutofit/>
           </a:bodyPr>
           <a:p>
@@ -3684,6 +3916,9 @@
                 <a:spcPct val="100000"/>
               </a:lnSpc>
               <a:buNone/>
+              <a:tabLst>
+                <a:tab algn="l" pos="0"/>
+              </a:tabLst>
             </a:pPr>
             <a:r>
               <a:rPr b="0" lang="en-US" sz="4400" strike="noStrike" u="none">
@@ -3696,13 +3931,13 @@
               </a:rPr>
               <a:t>Click to edit Master title style</a:t>
             </a:r>
-            <a:endParaRPr b="0" lang="en-US" sz="4400" strike="noStrike" u="none">
-              <a:solidFill>
-                <a:schemeClr val="dk1"/>
-              </a:solidFill>
-              <a:effectLst/>
-              <a:uFillTx/>
-              <a:latin typeface="Calibri"/>
+            <a:endParaRPr b="0" lang="de-AT" sz="4400" strike="noStrike" u="none">
+              <a:solidFill>
+                <a:srgbClr val="000000"/>
+              </a:solidFill>
+              <a:effectLst/>
+              <a:uFillTx/>
+              <a:latin typeface="Arial"/>
             </a:endParaRPr>
           </a:p>
         </p:txBody>
@@ -3719,8 +3954,8 @@
         </p:nvSpPr>
         <p:spPr>
           <a:xfrm>
-            <a:off x="457200" y="1600200"/>
-            <a:ext cx="4038120" cy="4525560"/>
+            <a:off x="457200" y="274680"/>
+            <a:ext cx="6019200" cy="5850720"/>
           </a:xfrm>
           <a:prstGeom prst="rect">
             <a:avLst/>
@@ -3731,11 +3966,45 @@
           </a:ln>
         </p:spPr>
         <p:txBody>
-          <a:bodyPr lIns="91440" rIns="91440" tIns="45720" bIns="45720" anchor="t">
+          <a:bodyPr lIns="91440" rIns="91440" tIns="45720" bIns="45720" anchor="t" vert="eaVert">
             <a:noAutofit/>
           </a:bodyPr>
           <a:p>
             <a:pPr marL="343080" indent="-343080" defTabSz="457200">
+              <a:lnSpc>
+                <a:spcPct val="100000"/>
+              </a:lnSpc>
+              <a:spcBef>
+                <a:spcPts val="641"/>
+              </a:spcBef>
+              <a:buClr>
+                <a:srgbClr val="000000"/>
+              </a:buClr>
+              <a:buFont typeface="Arial"/>
+              <a:buChar char="•"/>
+            </a:pPr>
+            <a:r>
+              <a:rPr b="0" lang="en-US" sz="3200" strike="noStrike" u="none">
+                <a:solidFill>
+                  <a:schemeClr val="dk1"/>
+                </a:solidFill>
+                <a:effectLst/>
+                <a:uFillTx/>
+                <a:latin typeface="Calibri"/>
+              </a:rPr>
+              <a:t>Click to edit Master text styles</a:t>
+            </a:r>
+            <a:endParaRPr b="0" lang="de-AT" sz="3200" strike="noStrike" u="none">
+              <a:solidFill>
+                <a:srgbClr val="000000"/>
+              </a:solidFill>
+              <a:effectLst/>
+              <a:uFillTx/>
+              <a:latin typeface="Arial"/>
+            </a:endParaRPr>
+          </a:p>
+          <a:p>
+            <a:pPr lvl="1" marL="743040" indent="-285840" defTabSz="457200">
               <a:lnSpc>
                 <a:spcPct val="100000"/>
               </a:lnSpc>
@@ -3746,7 +4015,7 @@
                 <a:srgbClr val="000000"/>
               </a:buClr>
               <a:buFont typeface="Arial"/>
-              <a:buChar char="•"/>
+              <a:buChar char="–"/>
             </a:pPr>
             <a:r>
               <a:rPr b="0" lang="en-US" sz="2800" strike="noStrike" u="none">
@@ -3757,19 +4026,19 @@
                 <a:uFillTx/>
                 <a:latin typeface="Calibri"/>
               </a:rPr>
-              <a:t>Click to edit Master text styles</a:t>
-            </a:r>
-            <a:endParaRPr b="0" lang="en-US" sz="2800" strike="noStrike" u="none">
-              <a:solidFill>
-                <a:schemeClr val="dk1"/>
-              </a:solidFill>
-              <a:effectLst/>
-              <a:uFillTx/>
-              <a:latin typeface="Calibri"/>
-            </a:endParaRPr>
-          </a:p>
-          <a:p>
-            <a:pPr lvl="1" marL="743040" indent="-285840" defTabSz="457200">
+              <a:t>Second level</a:t>
+            </a:r>
+            <a:endParaRPr b="0" lang="de-AT" sz="2800" strike="noStrike" u="none">
+              <a:solidFill>
+                <a:srgbClr val="000000"/>
+              </a:solidFill>
+              <a:effectLst/>
+              <a:uFillTx/>
+              <a:latin typeface="Arial"/>
+            </a:endParaRPr>
+          </a:p>
+          <a:p>
+            <a:pPr lvl="2" marL="1143000" indent="-228600" defTabSz="457200">
               <a:lnSpc>
                 <a:spcPct val="100000"/>
               </a:lnSpc>
@@ -3780,7 +4049,7 @@
                 <a:srgbClr val="000000"/>
               </a:buClr>
               <a:buFont typeface="Arial"/>
-              <a:buChar char="–"/>
+              <a:buChar char="•"/>
             </a:pPr>
             <a:r>
               <a:rPr b="0" lang="en-US" sz="2400" strike="noStrike" u="none">
@@ -3791,19 +4060,19 @@
                 <a:uFillTx/>
                 <a:latin typeface="Calibri"/>
               </a:rPr>
-              <a:t>Second level</a:t>
-            </a:r>
-            <a:endParaRPr b="0" lang="en-US" sz="2400" strike="noStrike" u="none">
-              <a:solidFill>
-                <a:schemeClr val="dk1"/>
-              </a:solidFill>
-              <a:effectLst/>
-              <a:uFillTx/>
-              <a:latin typeface="Calibri"/>
-            </a:endParaRPr>
-          </a:p>
-          <a:p>
-            <a:pPr lvl="2" marL="1143000" indent="-228600" defTabSz="457200">
+              <a:t>Third level</a:t>
+            </a:r>
+            <a:endParaRPr b="0" lang="de-AT" sz="2400" strike="noStrike" u="none">
+              <a:solidFill>
+                <a:srgbClr val="000000"/>
+              </a:solidFill>
+              <a:effectLst/>
+              <a:uFillTx/>
+              <a:latin typeface="Arial"/>
+            </a:endParaRPr>
+          </a:p>
+          <a:p>
+            <a:pPr lvl="3" marL="1600200" indent="-228600" defTabSz="457200">
               <a:lnSpc>
                 <a:spcPct val="100000"/>
               </a:lnSpc>
@@ -3814,7 +4083,7 @@
                 <a:srgbClr val="000000"/>
               </a:buClr>
               <a:buFont typeface="Arial"/>
-              <a:buChar char="•"/>
+              <a:buChar char="–"/>
             </a:pPr>
             <a:r>
               <a:rPr b="0" lang="en-US" sz="2000" strike="noStrike" u="none">
@@ -3825,58 +4094,24 @@
                 <a:uFillTx/>
                 <a:latin typeface="Calibri"/>
               </a:rPr>
-              <a:t>Third level</a:t>
-            </a:r>
-            <a:endParaRPr b="0" lang="en-US" sz="2000" strike="noStrike" u="none">
-              <a:solidFill>
-                <a:schemeClr val="dk1"/>
-              </a:solidFill>
-              <a:effectLst/>
-              <a:uFillTx/>
-              <a:latin typeface="Calibri"/>
-            </a:endParaRPr>
-          </a:p>
-          <a:p>
-            <a:pPr lvl="3" marL="1600200" indent="-228600" defTabSz="457200">
+              <a:t>Fourth level</a:t>
+            </a:r>
+            <a:endParaRPr b="0" lang="de-AT" sz="2000" strike="noStrike" u="none">
+              <a:solidFill>
+                <a:srgbClr val="000000"/>
+              </a:solidFill>
+              <a:effectLst/>
+              <a:uFillTx/>
+              <a:latin typeface="Arial"/>
+            </a:endParaRPr>
+          </a:p>
+          <a:p>
+            <a:pPr lvl="4" marL="2057400" indent="-228600" defTabSz="457200">
               <a:lnSpc>
                 <a:spcPct val="100000"/>
               </a:lnSpc>
               <a:spcBef>
-                <a:spcPts val="360"/>
-              </a:spcBef>
-              <a:buClr>
-                <a:srgbClr val="000000"/>
-              </a:buClr>
-              <a:buFont typeface="Arial"/>
-              <a:buChar char="–"/>
-            </a:pPr>
-            <a:r>
-              <a:rPr b="0" lang="en-US" sz="1800" strike="noStrike" u="none">
-                <a:solidFill>
-                  <a:schemeClr val="dk1"/>
-                </a:solidFill>
-                <a:effectLst/>
-                <a:uFillTx/>
-                <a:latin typeface="Calibri"/>
-              </a:rPr>
-              <a:t>Fourth level</a:t>
-            </a:r>
-            <a:endParaRPr b="0" lang="en-US" sz="1800" strike="noStrike" u="none">
-              <a:solidFill>
-                <a:schemeClr val="dk1"/>
-              </a:solidFill>
-              <a:effectLst/>
-              <a:uFillTx/>
-              <a:latin typeface="Calibri"/>
-            </a:endParaRPr>
-          </a:p>
-          <a:p>
-            <a:pPr lvl="4" marL="2057400" indent="-228600" defTabSz="457200">
-              <a:lnSpc>
-                <a:spcPct val="100000"/>
-              </a:lnSpc>
-              <a:spcBef>
-                <a:spcPts val="360"/>
+                <a:spcPts val="400"/>
               </a:spcBef>
               <a:buClr>
                 <a:srgbClr val="000000"/>
@@ -3885,7 +4120,7 @@
               <a:buChar char="»"/>
             </a:pPr>
             <a:r>
-              <a:rPr b="0" lang="en-US" sz="1800" strike="noStrike" u="none">
+              <a:rPr b="0" lang="en-US" sz="2000" strike="noStrike" u="none">
                 <a:solidFill>
                   <a:schemeClr val="dk1"/>
                 </a:solidFill>
@@ -3895,13 +4130,13 @@
               </a:rPr>
               <a:t>Fifth level</a:t>
             </a:r>
-            <a:endParaRPr b="0" lang="en-US" sz="1800" strike="noStrike" u="none">
-              <a:solidFill>
-                <a:schemeClr val="dk1"/>
-              </a:solidFill>
-              <a:effectLst/>
-              <a:uFillTx/>
-              <a:latin typeface="Calibri"/>
+            <a:endParaRPr b="0" lang="de-AT" sz="2000" strike="noStrike" u="none">
+              <a:solidFill>
+                <a:srgbClr val="000000"/>
+              </a:solidFill>
+              <a:effectLst/>
+              <a:uFillTx/>
+              <a:latin typeface="Arial"/>
             </a:endParaRPr>
           </a:p>
         </p:txBody>
@@ -3909,205 +4144,6 @@
       <p:sp>
         <p:nvSpPr>
           <p:cNvPr id="27" name="PlaceHolder 3"/>
-          <p:cNvSpPr>
-            <a:spLocks noGrp="1"/>
-          </p:cNvSpPr>
-          <p:nvPr>
-            <p:ph type="body"/>
-          </p:nvPr>
-        </p:nvSpPr>
-        <p:spPr>
-          <a:xfrm>
-            <a:off x="4648320" y="1600200"/>
-            <a:ext cx="4038120" cy="4525560"/>
-          </a:xfrm>
-          <a:prstGeom prst="rect">
-            <a:avLst/>
-          </a:prstGeom>
-          <a:noFill/>
-          <a:ln w="0">
-            <a:noFill/>
-          </a:ln>
-        </p:spPr>
-        <p:txBody>
-          <a:bodyPr lIns="91440" rIns="91440" tIns="45720" bIns="45720" anchor="t">
-            <a:noAutofit/>
-          </a:bodyPr>
-          <a:p>
-            <a:pPr marL="343080" indent="-343080" defTabSz="457200">
-              <a:lnSpc>
-                <a:spcPct val="100000"/>
-              </a:lnSpc>
-              <a:spcBef>
-                <a:spcPts val="561"/>
-              </a:spcBef>
-              <a:buClr>
-                <a:srgbClr val="000000"/>
-              </a:buClr>
-              <a:buFont typeface="Arial"/>
-              <a:buChar char="•"/>
-            </a:pPr>
-            <a:r>
-              <a:rPr b="0" lang="en-US" sz="2800" strike="noStrike" u="none">
-                <a:solidFill>
-                  <a:schemeClr val="dk1"/>
-                </a:solidFill>
-                <a:effectLst/>
-                <a:uFillTx/>
-                <a:latin typeface="Calibri"/>
-              </a:rPr>
-              <a:t>Click to edit Master text styles</a:t>
-            </a:r>
-            <a:endParaRPr b="0" lang="en-US" sz="2800" strike="noStrike" u="none">
-              <a:solidFill>
-                <a:schemeClr val="dk1"/>
-              </a:solidFill>
-              <a:effectLst/>
-              <a:uFillTx/>
-              <a:latin typeface="Calibri"/>
-            </a:endParaRPr>
-          </a:p>
-          <a:p>
-            <a:pPr lvl="1" marL="743040" indent="-285840" defTabSz="457200">
-              <a:lnSpc>
-                <a:spcPct val="100000"/>
-              </a:lnSpc>
-              <a:spcBef>
-                <a:spcPts val="479"/>
-              </a:spcBef>
-              <a:buClr>
-                <a:srgbClr val="000000"/>
-              </a:buClr>
-              <a:buFont typeface="Arial"/>
-              <a:buChar char="–"/>
-            </a:pPr>
-            <a:r>
-              <a:rPr b="0" lang="en-US" sz="2400" strike="noStrike" u="none">
-                <a:solidFill>
-                  <a:schemeClr val="dk1"/>
-                </a:solidFill>
-                <a:effectLst/>
-                <a:uFillTx/>
-                <a:latin typeface="Calibri"/>
-              </a:rPr>
-              <a:t>Second level</a:t>
-            </a:r>
-            <a:endParaRPr b="0" lang="en-US" sz="2400" strike="noStrike" u="none">
-              <a:solidFill>
-                <a:schemeClr val="dk1"/>
-              </a:solidFill>
-              <a:effectLst/>
-              <a:uFillTx/>
-              <a:latin typeface="Calibri"/>
-            </a:endParaRPr>
-          </a:p>
-          <a:p>
-            <a:pPr lvl="2" marL="1143000" indent="-228600" defTabSz="457200">
-              <a:lnSpc>
-                <a:spcPct val="100000"/>
-              </a:lnSpc>
-              <a:spcBef>
-                <a:spcPts val="400"/>
-              </a:spcBef>
-              <a:buClr>
-                <a:srgbClr val="000000"/>
-              </a:buClr>
-              <a:buFont typeface="Arial"/>
-              <a:buChar char="•"/>
-            </a:pPr>
-            <a:r>
-              <a:rPr b="0" lang="en-US" sz="2000" strike="noStrike" u="none">
-                <a:solidFill>
-                  <a:schemeClr val="dk1"/>
-                </a:solidFill>
-                <a:effectLst/>
-                <a:uFillTx/>
-                <a:latin typeface="Calibri"/>
-              </a:rPr>
-              <a:t>Third level</a:t>
-            </a:r>
-            <a:endParaRPr b="0" lang="en-US" sz="2000" strike="noStrike" u="none">
-              <a:solidFill>
-                <a:schemeClr val="dk1"/>
-              </a:solidFill>
-              <a:effectLst/>
-              <a:uFillTx/>
-              <a:latin typeface="Calibri"/>
-            </a:endParaRPr>
-          </a:p>
-          <a:p>
-            <a:pPr lvl="3" marL="1600200" indent="-228600" defTabSz="457200">
-              <a:lnSpc>
-                <a:spcPct val="100000"/>
-              </a:lnSpc>
-              <a:spcBef>
-                <a:spcPts val="360"/>
-              </a:spcBef>
-              <a:buClr>
-                <a:srgbClr val="000000"/>
-              </a:buClr>
-              <a:buFont typeface="Arial"/>
-              <a:buChar char="–"/>
-            </a:pPr>
-            <a:r>
-              <a:rPr b="0" lang="en-US" sz="1800" strike="noStrike" u="none">
-                <a:solidFill>
-                  <a:schemeClr val="dk1"/>
-                </a:solidFill>
-                <a:effectLst/>
-                <a:uFillTx/>
-                <a:latin typeface="Calibri"/>
-              </a:rPr>
-              <a:t>Fourth level</a:t>
-            </a:r>
-            <a:endParaRPr b="0" lang="en-US" sz="1800" strike="noStrike" u="none">
-              <a:solidFill>
-                <a:schemeClr val="dk1"/>
-              </a:solidFill>
-              <a:effectLst/>
-              <a:uFillTx/>
-              <a:latin typeface="Calibri"/>
-            </a:endParaRPr>
-          </a:p>
-          <a:p>
-            <a:pPr lvl="4" marL="2057400" indent="-228600" defTabSz="457200">
-              <a:lnSpc>
-                <a:spcPct val="100000"/>
-              </a:lnSpc>
-              <a:spcBef>
-                <a:spcPts val="360"/>
-              </a:spcBef>
-              <a:buClr>
-                <a:srgbClr val="000000"/>
-              </a:buClr>
-              <a:buFont typeface="Arial"/>
-              <a:buChar char="»"/>
-            </a:pPr>
-            <a:r>
-              <a:rPr b="0" lang="en-US" sz="1800" strike="noStrike" u="none">
-                <a:solidFill>
-                  <a:schemeClr val="dk1"/>
-                </a:solidFill>
-                <a:effectLst/>
-                <a:uFillTx/>
-                <a:latin typeface="Calibri"/>
-              </a:rPr>
-              <a:t>Fifth level</a:t>
-            </a:r>
-            <a:endParaRPr b="0" lang="en-US" sz="1800" strike="noStrike" u="none">
-              <a:solidFill>
-                <a:schemeClr val="dk1"/>
-              </a:solidFill>
-              <a:effectLst/>
-              <a:uFillTx/>
-              <a:latin typeface="Calibri"/>
-            </a:endParaRPr>
-          </a:p>
-        </p:txBody>
-      </p:sp>
-      <p:sp>
-        <p:nvSpPr>
-          <p:cNvPr id="28" name="PlaceHolder 4"/>
           <p:cNvSpPr>
             <a:spLocks noGrp="1"/>
           </p:cNvSpPr>
@@ -4118,7 +4154,7 @@
         <p:spPr>
           <a:xfrm>
             <a:off x="457200" y="6356520"/>
-            <a:ext cx="2133360" cy="364680"/>
+            <a:ext cx="2133000" cy="364320"/>
           </a:xfrm>
           <a:prstGeom prst="rect">
             <a:avLst/>
@@ -4138,6 +4174,9 @@
                 <a:spcPct val="100000"/>
               </a:lnSpc>
               <a:buNone/>
+              <a:tabLst>
+                <a:tab algn="l" pos="0"/>
+              </a:tabLst>
               <a:defRPr b="0" lang="en-US" sz="1200" strike="noStrike" u="none">
                 <a:solidFill>
                   <a:schemeClr val="dk1">
@@ -4156,6 +4195,9 @@
                 <a:spcPct val="100000"/>
               </a:lnSpc>
               <a:buNone/>
+              <a:tabLst>
+                <a:tab algn="l" pos="0"/>
+              </a:tabLst>
             </a:pPr>
             <a:r>
               <a:rPr b="0" lang="en-US" sz="1200" strike="noStrike" u="none">
@@ -4183,7 +4225,7 @@
       </p:sp>
       <p:sp>
         <p:nvSpPr>
-          <p:cNvPr id="29" name="PlaceHolder 5"/>
+          <p:cNvPr id="28" name="PlaceHolder 4"/>
           <p:cNvSpPr>
             <a:spLocks noGrp="1"/>
           </p:cNvSpPr>
@@ -4194,7 +4236,7 @@
         <p:spPr>
           <a:xfrm>
             <a:off x="3124080" y="6356520"/>
-            <a:ext cx="2895120" cy="364680"/>
+            <a:ext cx="2894760" cy="364320"/>
           </a:xfrm>
           <a:prstGeom prst="rect">
             <a:avLst/>
@@ -4210,7 +4252,13 @@
           </a:bodyPr>
           <a:lstStyle>
             <a:lvl1pPr indent="0" algn="ctr">
-              <a:buNone/>
+              <a:lnSpc>
+                <a:spcPct val="100000"/>
+              </a:lnSpc>
+              <a:buNone/>
+              <a:tabLst>
+                <a:tab algn="l" pos="0"/>
+              </a:tabLst>
               <a:defRPr b="0" lang="de-AT" sz="1400" strike="noStrike" u="none">
                 <a:solidFill>
                   <a:srgbClr val="000000"/>
@@ -4223,7 +4271,13 @@
           </a:lstStyle>
           <a:p>
             <a:pPr indent="0" algn="ctr">
-              <a:buNone/>
+              <a:lnSpc>
+                <a:spcPct val="100000"/>
+              </a:lnSpc>
+              <a:buNone/>
+              <a:tabLst>
+                <a:tab algn="l" pos="0"/>
+              </a:tabLst>
             </a:pPr>
             <a:r>
               <a:rPr b="0" lang="de-AT" sz="1400" strike="noStrike" u="none">
@@ -4249,7 +4303,7 @@
       </p:sp>
       <p:sp>
         <p:nvSpPr>
-          <p:cNvPr id="30" name="PlaceHolder 6"/>
+          <p:cNvPr id="29" name="PlaceHolder 5"/>
           <p:cNvSpPr>
             <a:spLocks noGrp="1"/>
           </p:cNvSpPr>
@@ -4260,7 +4314,7 @@
         <p:spPr>
           <a:xfrm>
             <a:off x="6553080" y="6356520"/>
-            <a:ext cx="2133360" cy="364680"/>
+            <a:ext cx="2133000" cy="364320"/>
           </a:xfrm>
           <a:prstGeom prst="rect">
             <a:avLst/>
@@ -4280,6 +4334,9 @@
                 <a:spcPct val="100000"/>
               </a:lnSpc>
               <a:buNone/>
+              <a:tabLst>
+                <a:tab algn="l" pos="0"/>
+              </a:tabLst>
               <a:defRPr b="0" lang="en-US" sz="1200" strike="noStrike" u="none">
                 <a:solidFill>
                   <a:schemeClr val="dk1">
@@ -4298,8 +4355,11 @@
                 <a:spcPct val="100000"/>
               </a:lnSpc>
               <a:buNone/>
-            </a:pPr>
-            <a:fld id="{5BD50A0E-2531-4C2E-BB81-EAC0A313AEDD}" type="slidenum">
+              <a:tabLst>
+                <a:tab algn="l" pos="0"/>
+              </a:tabLst>
+            </a:pPr>
+            <a:fld id="{16C4DBF2-0E9B-4362-A645-03A9C04F9A72}" type="slidenum">
               <a:rPr b="0" lang="en-US" sz="1200" strike="noStrike" u="none">
                 <a:solidFill>
                   <a:schemeClr val="dk1">
@@ -4329,8 +4389,8 @@
 </file>
 
 <file path=ppt/slideLayouts/slideLayout7.xml><?xml version="1.0" encoding="utf-8"?>
-<p:sldLayout xmlns:a="http://schemas.openxmlformats.org/drawingml/2006/main" xmlns:p="http://schemas.openxmlformats.org/presentationml/2006/main" xmlns:r="http://schemas.openxmlformats.org/officeDocument/2006/relationships" xmlns:p14="http://schemas.microsoft.com/office/powerpoint/2010/main" xmlns:p15="http://schemas.microsoft.com/office/powerpoint/2012/main" xmlns:mc="http://schemas.openxmlformats.org/markup-compatibility/2006" type="blank" preserve="1">
-  <p:cSld name="Comparison">
+<p:sldLayout xmlns:a="http://schemas.openxmlformats.org/drawingml/2006/main" xmlns:p="http://schemas.openxmlformats.org/presentationml/2006/main" xmlns:r="http://schemas.openxmlformats.org/officeDocument/2006/relationships" xmlns:p14="http://schemas.microsoft.com/office/powerpoint/2010/main" xmlns:p15="http://schemas.microsoft.com/office/powerpoint/2012/main" xmlns:mc="http://schemas.openxmlformats.org/markup-compatibility/2006" type="obj" preserve="1">
+  <p:cSld name="Title and Content">
     <p:bg>
       <p:bgPr>
         <a:solidFill>
@@ -4354,7 +4414,7 @@
       </p:grpSpPr>
       <p:sp>
         <p:nvSpPr>
-          <p:cNvPr id="31" name="PlaceHolder 1"/>
+          <p:cNvPr id="30" name="PlaceHolder 1"/>
           <p:cNvSpPr>
             <a:spLocks noGrp="1"/>
           </p:cNvSpPr>
@@ -4365,7 +4425,7 @@
         <p:spPr>
           <a:xfrm>
             <a:off x="457200" y="274680"/>
-            <a:ext cx="8229240" cy="1142640"/>
+            <a:ext cx="8228880" cy="1142280"/>
           </a:xfrm>
           <a:prstGeom prst="rect">
             <a:avLst/>
@@ -4385,6 +4445,9 @@
                 <a:spcPct val="100000"/>
               </a:lnSpc>
               <a:buNone/>
+              <a:tabLst>
+                <a:tab algn="l" pos="0"/>
+              </a:tabLst>
             </a:pPr>
             <a:r>
               <a:rPr b="0" lang="en-US" sz="4400" strike="noStrike" u="none">
@@ -4397,20 +4460,20 @@
               </a:rPr>
               <a:t>Click to edit Master title style</a:t>
             </a:r>
-            <a:endParaRPr b="0" lang="en-US" sz="4400" strike="noStrike" u="none">
-              <a:solidFill>
-                <a:schemeClr val="dk1"/>
-              </a:solidFill>
-              <a:effectLst/>
-              <a:uFillTx/>
-              <a:latin typeface="Calibri"/>
+            <a:endParaRPr b="0" lang="de-AT" sz="4400" strike="noStrike" u="none">
+              <a:solidFill>
+                <a:srgbClr val="000000"/>
+              </a:solidFill>
+              <a:effectLst/>
+              <a:uFillTx/>
+              <a:latin typeface="Arial"/>
             </a:endParaRPr>
           </a:p>
         </p:txBody>
       </p:sp>
       <p:sp>
         <p:nvSpPr>
-          <p:cNvPr id="32" name="PlaceHolder 2"/>
+          <p:cNvPr id="31" name="PlaceHolder 2"/>
           <p:cNvSpPr>
             <a:spLocks noGrp="1"/>
           </p:cNvSpPr>
@@ -4420,70 +4483,8 @@
         </p:nvSpPr>
         <p:spPr>
           <a:xfrm>
-            <a:off x="457200" y="1535040"/>
-            <a:ext cx="4039920" cy="639360"/>
-          </a:xfrm>
-          <a:prstGeom prst="rect">
-            <a:avLst/>
-          </a:prstGeom>
-          <a:noFill/>
-          <a:ln w="0">
-            <a:noFill/>
-          </a:ln>
-        </p:spPr>
-        <p:txBody>
-          <a:bodyPr lIns="91440" rIns="91440" tIns="45720" bIns="45720" anchor="b">
-            <a:noAutofit/>
-          </a:bodyPr>
-          <a:p>
-            <a:pPr indent="0" defTabSz="457200">
-              <a:lnSpc>
-                <a:spcPct val="100000"/>
-              </a:lnSpc>
-              <a:spcBef>
-                <a:spcPts val="479"/>
-              </a:spcBef>
-              <a:buNone/>
-              <a:tabLst>
-                <a:tab algn="l" pos="0"/>
-              </a:tabLst>
-            </a:pPr>
-            <a:r>
-              <a:rPr b="1" lang="en-US" sz="2400" strike="noStrike" u="none">
-                <a:solidFill>
-                  <a:schemeClr val="dk1"/>
-                </a:solidFill>
-                <a:effectLst/>
-                <a:uFillTx/>
-                <a:latin typeface="Calibri"/>
-              </a:rPr>
-              <a:t>Click to edit Master text styles</a:t>
-            </a:r>
-            <a:endParaRPr b="0" lang="en-US" sz="2400" strike="noStrike" u="none">
-              <a:solidFill>
-                <a:schemeClr val="dk1"/>
-              </a:solidFill>
-              <a:effectLst/>
-              <a:uFillTx/>
-              <a:latin typeface="Calibri"/>
-            </a:endParaRPr>
-          </a:p>
-        </p:txBody>
-      </p:sp>
-      <p:sp>
-        <p:nvSpPr>
-          <p:cNvPr id="33" name="PlaceHolder 3"/>
-          <p:cNvSpPr>
-            <a:spLocks noGrp="1"/>
-          </p:cNvSpPr>
-          <p:nvPr>
-            <p:ph type="body"/>
-          </p:nvPr>
-        </p:nvSpPr>
-        <p:spPr>
-          <a:xfrm>
-            <a:off x="457200" y="2174760"/>
-            <a:ext cx="4039920" cy="3951000"/>
+            <a:off x="457200" y="1600200"/>
+            <a:ext cx="8228880" cy="4525200"/>
           </a:xfrm>
           <a:prstGeom prst="rect">
             <a:avLst/>
@@ -4503,6 +4504,74 @@
                 <a:spcPct val="100000"/>
               </a:lnSpc>
               <a:spcBef>
+                <a:spcPts val="641"/>
+              </a:spcBef>
+              <a:buClr>
+                <a:srgbClr val="000000"/>
+              </a:buClr>
+              <a:buFont typeface="Arial"/>
+              <a:buChar char="•"/>
+            </a:pPr>
+            <a:r>
+              <a:rPr b="0" lang="en-US" sz="3200" strike="noStrike" u="none">
+                <a:solidFill>
+                  <a:schemeClr val="dk1"/>
+                </a:solidFill>
+                <a:effectLst/>
+                <a:uFillTx/>
+                <a:latin typeface="Calibri"/>
+              </a:rPr>
+              <a:t>Click to edit Master text styles</a:t>
+            </a:r>
+            <a:endParaRPr b="0" lang="de-AT" sz="3200" strike="noStrike" u="none">
+              <a:solidFill>
+                <a:srgbClr val="000000"/>
+              </a:solidFill>
+              <a:effectLst/>
+              <a:uFillTx/>
+              <a:latin typeface="Arial"/>
+            </a:endParaRPr>
+          </a:p>
+          <a:p>
+            <a:pPr lvl="1" marL="743040" indent="-285840" defTabSz="457200">
+              <a:lnSpc>
+                <a:spcPct val="100000"/>
+              </a:lnSpc>
+              <a:spcBef>
+                <a:spcPts val="561"/>
+              </a:spcBef>
+              <a:buClr>
+                <a:srgbClr val="000000"/>
+              </a:buClr>
+              <a:buFont typeface="Arial"/>
+              <a:buChar char="–"/>
+            </a:pPr>
+            <a:r>
+              <a:rPr b="0" lang="en-US" sz="2800" strike="noStrike" u="none">
+                <a:solidFill>
+                  <a:schemeClr val="dk1"/>
+                </a:solidFill>
+                <a:effectLst/>
+                <a:uFillTx/>
+                <a:latin typeface="Calibri"/>
+              </a:rPr>
+              <a:t>Second level</a:t>
+            </a:r>
+            <a:endParaRPr b="0" lang="de-AT" sz="2800" strike="noStrike" u="none">
+              <a:solidFill>
+                <a:srgbClr val="000000"/>
+              </a:solidFill>
+              <a:effectLst/>
+              <a:uFillTx/>
+              <a:latin typeface="Arial"/>
+            </a:endParaRPr>
+          </a:p>
+          <a:p>
+            <a:pPr lvl="2" marL="1143000" indent="-228600" defTabSz="457200">
+              <a:lnSpc>
+                <a:spcPct val="100000"/>
+              </a:lnSpc>
+              <a:spcBef>
                 <a:spcPts val="479"/>
               </a:spcBef>
               <a:buClr>
@@ -4520,19 +4589,19 @@
                 <a:uFillTx/>
                 <a:latin typeface="Calibri"/>
               </a:rPr>
-              <a:t>Click to edit Master text styles</a:t>
-            </a:r>
-            <a:endParaRPr b="0" lang="en-US" sz="2400" strike="noStrike" u="none">
-              <a:solidFill>
-                <a:schemeClr val="dk1"/>
-              </a:solidFill>
-              <a:effectLst/>
-              <a:uFillTx/>
-              <a:latin typeface="Calibri"/>
-            </a:endParaRPr>
-          </a:p>
-          <a:p>
-            <a:pPr lvl="1" marL="743040" indent="-285840" defTabSz="457200">
+              <a:t>Third level</a:t>
+            </a:r>
+            <a:endParaRPr b="0" lang="de-AT" sz="2400" strike="noStrike" u="none">
+              <a:solidFill>
+                <a:srgbClr val="000000"/>
+              </a:solidFill>
+              <a:effectLst/>
+              <a:uFillTx/>
+              <a:latin typeface="Arial"/>
+            </a:endParaRPr>
+          </a:p>
+          <a:p>
+            <a:pPr lvl="3" marL="1600200" indent="-228600" defTabSz="457200">
               <a:lnSpc>
                 <a:spcPct val="100000"/>
               </a:lnSpc>
@@ -4554,92 +4623,24 @@
                 <a:uFillTx/>
                 <a:latin typeface="Calibri"/>
               </a:rPr>
-              <a:t>Second level</a:t>
-            </a:r>
-            <a:endParaRPr b="0" lang="en-US" sz="2000" strike="noStrike" u="none">
-              <a:solidFill>
-                <a:schemeClr val="dk1"/>
-              </a:solidFill>
-              <a:effectLst/>
-              <a:uFillTx/>
-              <a:latin typeface="Calibri"/>
-            </a:endParaRPr>
-          </a:p>
-          <a:p>
-            <a:pPr lvl="2" marL="1143000" indent="-228600" defTabSz="457200">
+              <a:t>Fourth level</a:t>
+            </a:r>
+            <a:endParaRPr b="0" lang="de-AT" sz="2000" strike="noStrike" u="none">
+              <a:solidFill>
+                <a:srgbClr val="000000"/>
+              </a:solidFill>
+              <a:effectLst/>
+              <a:uFillTx/>
+              <a:latin typeface="Arial"/>
+            </a:endParaRPr>
+          </a:p>
+          <a:p>
+            <a:pPr lvl="4" marL="2057400" indent="-228600" defTabSz="457200">
               <a:lnSpc>
                 <a:spcPct val="100000"/>
               </a:lnSpc>
               <a:spcBef>
-                <a:spcPts val="360"/>
-              </a:spcBef>
-              <a:buClr>
-                <a:srgbClr val="000000"/>
-              </a:buClr>
-              <a:buFont typeface="Arial"/>
-              <a:buChar char="•"/>
-            </a:pPr>
-            <a:r>
-              <a:rPr b="0" lang="en-US" sz="1800" strike="noStrike" u="none">
-                <a:solidFill>
-                  <a:schemeClr val="dk1"/>
-                </a:solidFill>
-                <a:effectLst/>
-                <a:uFillTx/>
-                <a:latin typeface="Calibri"/>
-              </a:rPr>
-              <a:t>Third level</a:t>
-            </a:r>
-            <a:endParaRPr b="0" lang="en-US" sz="1800" strike="noStrike" u="none">
-              <a:solidFill>
-                <a:schemeClr val="dk1"/>
-              </a:solidFill>
-              <a:effectLst/>
-              <a:uFillTx/>
-              <a:latin typeface="Calibri"/>
-            </a:endParaRPr>
-          </a:p>
-          <a:p>
-            <a:pPr lvl="3" marL="1600200" indent="-228600" defTabSz="457200">
-              <a:lnSpc>
-                <a:spcPct val="100000"/>
-              </a:lnSpc>
-              <a:spcBef>
-                <a:spcPts val="320"/>
-              </a:spcBef>
-              <a:buClr>
-                <a:srgbClr val="000000"/>
-              </a:buClr>
-              <a:buFont typeface="Arial"/>
-              <a:buChar char="–"/>
-            </a:pPr>
-            <a:r>
-              <a:rPr b="0" lang="en-US" sz="1600" strike="noStrike" u="none">
-                <a:solidFill>
-                  <a:schemeClr val="dk1"/>
-                </a:solidFill>
-                <a:effectLst/>
-                <a:uFillTx/>
-                <a:latin typeface="Calibri"/>
-              </a:rPr>
-              <a:t>Fourth level</a:t>
-            </a:r>
-            <a:endParaRPr b="0" lang="en-US" sz="1600" strike="noStrike" u="none">
-              <a:solidFill>
-                <a:schemeClr val="dk1"/>
-              </a:solidFill>
-              <a:effectLst/>
-              <a:uFillTx/>
-              <a:latin typeface="Calibri"/>
-            </a:endParaRPr>
-          </a:p>
-          <a:p>
-            <a:pPr lvl="4" marL="2057400" indent="-228600" defTabSz="457200">
-              <a:lnSpc>
-                <a:spcPct val="100000"/>
-              </a:lnSpc>
-              <a:spcBef>
-                <a:spcPts val="320"/>
+                <a:spcPts val="400"/>
               </a:spcBef>
               <a:buClr>
                 <a:srgbClr val="000000"/>
@@ -4648,7 +4649,7 @@
               <a:buChar char="»"/>
             </a:pPr>
             <a:r>
-              <a:rPr b="0" lang="en-US" sz="1600" strike="noStrike" u="none">
+              <a:rPr b="0" lang="en-US" sz="2000" strike="noStrike" u="none">
                 <a:solidFill>
                   <a:schemeClr val="dk1"/>
                 </a:solidFill>
@@ -4658,281 +4659,20 @@
               </a:rPr>
               <a:t>Fifth level</a:t>
             </a:r>
-            <a:endParaRPr b="0" lang="en-US" sz="1600" strike="noStrike" u="none">
-              <a:solidFill>
-                <a:schemeClr val="dk1"/>
-              </a:solidFill>
-              <a:effectLst/>
-              <a:uFillTx/>
-              <a:latin typeface="Calibri"/>
+            <a:endParaRPr b="0" lang="de-AT" sz="2000" strike="noStrike" u="none">
+              <a:solidFill>
+                <a:srgbClr val="000000"/>
+              </a:solidFill>
+              <a:effectLst/>
+              <a:uFillTx/>
+              <a:latin typeface="Arial"/>
             </a:endParaRPr>
           </a:p>
         </p:txBody>
       </p:sp>
       <p:sp>
         <p:nvSpPr>
-          <p:cNvPr id="34" name="PlaceHolder 4"/>
-          <p:cNvSpPr>
-            <a:spLocks noGrp="1"/>
-          </p:cNvSpPr>
-          <p:nvPr>
-            <p:ph type="body"/>
-          </p:nvPr>
-        </p:nvSpPr>
-        <p:spPr>
-          <a:xfrm>
-            <a:off x="4645080" y="1535040"/>
-            <a:ext cx="4041360" cy="639360"/>
-          </a:xfrm>
-          <a:prstGeom prst="rect">
-            <a:avLst/>
-          </a:prstGeom>
-          <a:noFill/>
-          <a:ln w="0">
-            <a:noFill/>
-          </a:ln>
-        </p:spPr>
-        <p:txBody>
-          <a:bodyPr lIns="91440" rIns="91440" tIns="45720" bIns="45720" anchor="b">
-            <a:noAutofit/>
-          </a:bodyPr>
-          <a:p>
-            <a:pPr indent="0" defTabSz="457200">
-              <a:lnSpc>
-                <a:spcPct val="100000"/>
-              </a:lnSpc>
-              <a:spcBef>
-                <a:spcPts val="479"/>
-              </a:spcBef>
-              <a:buNone/>
-              <a:tabLst>
-                <a:tab algn="l" pos="0"/>
-              </a:tabLst>
-            </a:pPr>
-            <a:r>
-              <a:rPr b="1" lang="en-US" sz="2400" strike="noStrike" u="none">
-                <a:solidFill>
-                  <a:schemeClr val="dk1"/>
-                </a:solidFill>
-                <a:effectLst/>
-                <a:uFillTx/>
-                <a:latin typeface="Calibri"/>
-              </a:rPr>
-              <a:t>Click to edit Master text styles</a:t>
-            </a:r>
-            <a:endParaRPr b="0" lang="en-US" sz="2400" strike="noStrike" u="none">
-              <a:solidFill>
-                <a:schemeClr val="dk1"/>
-              </a:solidFill>
-              <a:effectLst/>
-              <a:uFillTx/>
-              <a:latin typeface="Calibri"/>
-            </a:endParaRPr>
-          </a:p>
-        </p:txBody>
-      </p:sp>
-      <p:sp>
-        <p:nvSpPr>
-          <p:cNvPr id="35" name="PlaceHolder 5"/>
-          <p:cNvSpPr>
-            <a:spLocks noGrp="1"/>
-          </p:cNvSpPr>
-          <p:nvPr>
-            <p:ph type="body"/>
-          </p:nvPr>
-        </p:nvSpPr>
-        <p:spPr>
-          <a:xfrm>
-            <a:off x="4645080" y="2174760"/>
-            <a:ext cx="4041360" cy="3951000"/>
-          </a:xfrm>
-          <a:prstGeom prst="rect">
-            <a:avLst/>
-          </a:prstGeom>
-          <a:noFill/>
-          <a:ln w="0">
-            <a:noFill/>
-          </a:ln>
-        </p:spPr>
-        <p:txBody>
-          <a:bodyPr lIns="91440" rIns="91440" tIns="45720" bIns="45720" anchor="t">
-            <a:noAutofit/>
-          </a:bodyPr>
-          <a:p>
-            <a:pPr marL="343080" indent="-343080" defTabSz="457200">
-              <a:lnSpc>
-                <a:spcPct val="100000"/>
-              </a:lnSpc>
-              <a:spcBef>
-                <a:spcPts val="479"/>
-              </a:spcBef>
-              <a:buClr>
-                <a:srgbClr val="000000"/>
-              </a:buClr>
-              <a:buFont typeface="Arial"/>
-              <a:buChar char="•"/>
-            </a:pPr>
-            <a:r>
-              <a:rPr b="0" lang="en-US" sz="2400" strike="noStrike" u="none">
-                <a:solidFill>
-                  <a:schemeClr val="dk1"/>
-                </a:solidFill>
-                <a:effectLst/>
-                <a:uFillTx/>
-                <a:latin typeface="Calibri"/>
-              </a:rPr>
-              <a:t>Click to edit Master text styles</a:t>
-            </a:r>
-            <a:endParaRPr b="0" lang="en-US" sz="2400" strike="noStrike" u="none">
-              <a:solidFill>
-                <a:schemeClr val="dk1"/>
-              </a:solidFill>
-              <a:effectLst/>
-              <a:uFillTx/>
-              <a:latin typeface="Calibri"/>
-            </a:endParaRPr>
-          </a:p>
-          <a:p>
-            <a:pPr lvl="1" marL="743040" indent="-285840" defTabSz="457200">
-              <a:lnSpc>
-                <a:spcPct val="100000"/>
-              </a:lnSpc>
-              <a:spcBef>
-                <a:spcPts val="400"/>
-              </a:spcBef>
-              <a:buClr>
-                <a:srgbClr val="000000"/>
-              </a:buClr>
-              <a:buFont typeface="Arial"/>
-              <a:buChar char="–"/>
-            </a:pPr>
-            <a:r>
-              <a:rPr b="0" lang="en-US" sz="2000" strike="noStrike" u="none">
-                <a:solidFill>
-                  <a:schemeClr val="dk1"/>
-                </a:solidFill>
-                <a:effectLst/>
-                <a:uFillTx/>
-                <a:latin typeface="Calibri"/>
-              </a:rPr>
-              <a:t>Second level</a:t>
-            </a:r>
-            <a:endParaRPr b="0" lang="en-US" sz="2000" strike="noStrike" u="none">
-              <a:solidFill>
-                <a:schemeClr val="dk1"/>
-              </a:solidFill>
-              <a:effectLst/>
-              <a:uFillTx/>
-              <a:latin typeface="Calibri"/>
-            </a:endParaRPr>
-          </a:p>
-          <a:p>
-            <a:pPr lvl="2" marL="1143000" indent="-228600" defTabSz="457200">
-              <a:lnSpc>
-                <a:spcPct val="100000"/>
-              </a:lnSpc>
-              <a:spcBef>
-                <a:spcPts val="360"/>
-              </a:spcBef>
-              <a:buClr>
-                <a:srgbClr val="000000"/>
-              </a:buClr>
-              <a:buFont typeface="Arial"/>
-              <a:buChar char="•"/>
-            </a:pPr>
-            <a:r>
-              <a:rPr b="0" lang="en-US" sz="1800" strike="noStrike" u="none">
-                <a:solidFill>
-                  <a:schemeClr val="dk1"/>
-                </a:solidFill>
-                <a:effectLst/>
-                <a:uFillTx/>
-                <a:latin typeface="Calibri"/>
-              </a:rPr>
-              <a:t>Third level</a:t>
-            </a:r>
-            <a:endParaRPr b="0" lang="en-US" sz="1800" strike="noStrike" u="none">
-              <a:solidFill>
-                <a:schemeClr val="dk1"/>
-              </a:solidFill>
-              <a:effectLst/>
-              <a:uFillTx/>
-              <a:latin typeface="Calibri"/>
-            </a:endParaRPr>
-          </a:p>
-          <a:p>
-            <a:pPr lvl="3" marL="1600200" indent="-228600" defTabSz="457200">
-              <a:lnSpc>
-                <a:spcPct val="100000"/>
-              </a:lnSpc>
-              <a:spcBef>
-                <a:spcPts val="320"/>
-              </a:spcBef>
-              <a:buClr>
-                <a:srgbClr val="000000"/>
-              </a:buClr>
-              <a:buFont typeface="Arial"/>
-              <a:buChar char="–"/>
-            </a:pPr>
-            <a:r>
-              <a:rPr b="0" lang="en-US" sz="1600" strike="noStrike" u="none">
-                <a:solidFill>
-                  <a:schemeClr val="dk1"/>
-                </a:solidFill>
-                <a:effectLst/>
-                <a:uFillTx/>
-                <a:latin typeface="Calibri"/>
-              </a:rPr>
-              <a:t>Fourth level</a:t>
-            </a:r>
-            <a:endParaRPr b="0" lang="en-US" sz="1600" strike="noStrike" u="none">
-              <a:solidFill>
-                <a:schemeClr val="dk1"/>
-              </a:solidFill>
-              <a:effectLst/>
-              <a:uFillTx/>
-              <a:latin typeface="Calibri"/>
-            </a:endParaRPr>
-          </a:p>
-          <a:p>
-            <a:pPr lvl="4" marL="2057400" indent="-228600" defTabSz="457200">
-              <a:lnSpc>
-                <a:spcPct val="100000"/>
-              </a:lnSpc>
-              <a:spcBef>
-                <a:spcPts val="320"/>
-              </a:spcBef>
-              <a:buClr>
-                <a:srgbClr val="000000"/>
-              </a:buClr>
-              <a:buFont typeface="Arial"/>
-              <a:buChar char="»"/>
-            </a:pPr>
-            <a:r>
-              <a:rPr b="0" lang="en-US" sz="1600" strike="noStrike" u="none">
-                <a:solidFill>
-                  <a:schemeClr val="dk1"/>
-                </a:solidFill>
-                <a:effectLst/>
-                <a:uFillTx/>
-                <a:latin typeface="Calibri"/>
-              </a:rPr>
-              <a:t>Fifth level</a:t>
-            </a:r>
-            <a:endParaRPr b="0" lang="en-US" sz="1600" strike="noStrike" u="none">
-              <a:solidFill>
-                <a:schemeClr val="dk1"/>
-              </a:solidFill>
-              <a:effectLst/>
-              <a:uFillTx/>
-              <a:latin typeface="Calibri"/>
-            </a:endParaRPr>
-          </a:p>
-        </p:txBody>
-      </p:sp>
-      <p:sp>
-        <p:nvSpPr>
-          <p:cNvPr id="36" name="PlaceHolder 6"/>
+          <p:cNvPr id="32" name="PlaceHolder 3"/>
           <p:cNvSpPr>
             <a:spLocks noGrp="1"/>
           </p:cNvSpPr>
@@ -4943,7 +4683,7 @@
         <p:spPr>
           <a:xfrm>
             <a:off x="457200" y="6356520"/>
-            <a:ext cx="2133360" cy="364680"/>
+            <a:ext cx="2133000" cy="364320"/>
           </a:xfrm>
           <a:prstGeom prst="rect">
             <a:avLst/>
@@ -4963,6 +4703,9 @@
                 <a:spcPct val="100000"/>
               </a:lnSpc>
               <a:buNone/>
+              <a:tabLst>
+                <a:tab algn="l" pos="0"/>
+              </a:tabLst>
               <a:defRPr b="0" lang="en-US" sz="1200" strike="noStrike" u="none">
                 <a:solidFill>
                   <a:schemeClr val="dk1">
@@ -4981,6 +4724,9 @@
                 <a:spcPct val="100000"/>
               </a:lnSpc>
               <a:buNone/>
+              <a:tabLst>
+                <a:tab algn="l" pos="0"/>
+              </a:tabLst>
             </a:pPr>
             <a:r>
               <a:rPr b="0" lang="en-US" sz="1200" strike="noStrike" u="none">
@@ -5008,7 +4754,7 @@
       </p:sp>
       <p:sp>
         <p:nvSpPr>
-          <p:cNvPr id="37" name="PlaceHolder 7"/>
+          <p:cNvPr id="33" name="PlaceHolder 4"/>
           <p:cNvSpPr>
             <a:spLocks noGrp="1"/>
           </p:cNvSpPr>
@@ -5019,7 +4765,7 @@
         <p:spPr>
           <a:xfrm>
             <a:off x="3124080" y="6356520"/>
-            <a:ext cx="2895120" cy="364680"/>
+            <a:ext cx="2894760" cy="364320"/>
           </a:xfrm>
           <a:prstGeom prst="rect">
             <a:avLst/>
@@ -5035,7 +4781,13 @@
           </a:bodyPr>
           <a:lstStyle>
             <a:lvl1pPr indent="0" algn="ctr">
-              <a:buNone/>
+              <a:lnSpc>
+                <a:spcPct val="100000"/>
+              </a:lnSpc>
+              <a:buNone/>
+              <a:tabLst>
+                <a:tab algn="l" pos="0"/>
+              </a:tabLst>
               <a:defRPr b="0" lang="de-AT" sz="1400" strike="noStrike" u="none">
                 <a:solidFill>
                   <a:srgbClr val="000000"/>
@@ -5048,7 +4800,13 @@
           </a:lstStyle>
           <a:p>
             <a:pPr indent="0" algn="ctr">
-              <a:buNone/>
+              <a:lnSpc>
+                <a:spcPct val="100000"/>
+              </a:lnSpc>
+              <a:buNone/>
+              <a:tabLst>
+                <a:tab algn="l" pos="0"/>
+              </a:tabLst>
             </a:pPr>
             <a:r>
               <a:rPr b="0" lang="de-AT" sz="1400" strike="noStrike" u="none">
@@ -5074,7 +4832,7 @@
       </p:sp>
       <p:sp>
         <p:nvSpPr>
-          <p:cNvPr id="38" name="PlaceHolder 8"/>
+          <p:cNvPr id="34" name="PlaceHolder 5"/>
           <p:cNvSpPr>
             <a:spLocks noGrp="1"/>
           </p:cNvSpPr>
@@ -5085,7 +4843,7 @@
         <p:spPr>
           <a:xfrm>
             <a:off x="6553080" y="6356520"/>
-            <a:ext cx="2133360" cy="364680"/>
+            <a:ext cx="2133000" cy="364320"/>
           </a:xfrm>
           <a:prstGeom prst="rect">
             <a:avLst/>
@@ -5105,6 +4863,9 @@
                 <a:spcPct val="100000"/>
               </a:lnSpc>
               <a:buNone/>
+              <a:tabLst>
+                <a:tab algn="l" pos="0"/>
+              </a:tabLst>
               <a:defRPr b="0" lang="en-US" sz="1200" strike="noStrike" u="none">
                 <a:solidFill>
                   <a:schemeClr val="dk1">
@@ -5123,8 +4884,11 @@
                 <a:spcPct val="100000"/>
               </a:lnSpc>
               <a:buNone/>
-            </a:pPr>
-            <a:fld id="{31B7795D-E0C0-4A07-9939-0BF13F0913C7}" type="slidenum">
+              <a:tabLst>
+                <a:tab algn="l" pos="0"/>
+              </a:tabLst>
+            </a:pPr>
+            <a:fld id="{9C9280AA-4559-449F-8EAF-D0C05F73E6FD}" type="slidenum">
               <a:rPr b="0" lang="en-US" sz="1200" strike="noStrike" u="none">
                 <a:solidFill>
                   <a:schemeClr val="dk1">
@@ -5154,8 +4918,8 @@
 </file>
 
 <file path=ppt/slideLayouts/slideLayout8.xml><?xml version="1.0" encoding="utf-8"?>
-<p:sldLayout xmlns:a="http://schemas.openxmlformats.org/drawingml/2006/main" xmlns:p="http://schemas.openxmlformats.org/presentationml/2006/main" xmlns:r="http://schemas.openxmlformats.org/officeDocument/2006/relationships" xmlns:p14="http://schemas.microsoft.com/office/powerpoint/2010/main" xmlns:p15="http://schemas.microsoft.com/office/powerpoint/2012/main" xmlns:mc="http://schemas.openxmlformats.org/markup-compatibility/2006" type="titleOnly" preserve="1">
-  <p:cSld name="Title Only">
+<p:sldLayout xmlns:a="http://schemas.openxmlformats.org/drawingml/2006/main" xmlns:p="http://schemas.openxmlformats.org/presentationml/2006/main" xmlns:r="http://schemas.openxmlformats.org/officeDocument/2006/relationships" xmlns:p14="http://schemas.microsoft.com/office/powerpoint/2010/main" xmlns:p15="http://schemas.microsoft.com/office/powerpoint/2012/main" xmlns:mc="http://schemas.openxmlformats.org/markup-compatibility/2006" type="blank" preserve="1">
+  <p:cSld name="Section Header">
     <p:bg>
       <p:bgPr>
         <a:solidFill>
@@ -5179,7 +4943,7 @@
       </p:grpSpPr>
       <p:sp>
         <p:nvSpPr>
-          <p:cNvPr id="39" name="PlaceHolder 1"/>
+          <p:cNvPr id="35" name="PlaceHolder 1"/>
           <p:cNvSpPr>
             <a:spLocks noGrp="1"/>
           </p:cNvSpPr>
@@ -5189,8 +4953,8 @@
         </p:nvSpPr>
         <p:spPr>
           <a:xfrm>
-            <a:off x="457200" y="274680"/>
-            <a:ext cx="8229240" cy="1142640"/>
+            <a:off x="722160" y="4406760"/>
+            <a:ext cx="7771680" cy="1361520"/>
           </a:xfrm>
           <a:prstGeom prst="rect">
             <a:avLst/>
@@ -5201,18 +4965,21 @@
           </a:ln>
         </p:spPr>
         <p:txBody>
-          <a:bodyPr lIns="91440" rIns="91440" tIns="45720" bIns="45720" anchor="ctr">
+          <a:bodyPr lIns="91440" rIns="91440" tIns="45720" bIns="45720" anchor="t">
             <a:noAutofit/>
           </a:bodyPr>
           <a:p>
-            <a:pPr indent="0" algn="ctr" defTabSz="457200">
-              <a:lnSpc>
-                <a:spcPct val="100000"/>
-              </a:lnSpc>
-              <a:buNone/>
-            </a:pPr>
-            <a:r>
-              <a:rPr b="0" lang="en-US" sz="4400" strike="noStrike" u="none">
+            <a:pPr indent="0" defTabSz="457200">
+              <a:lnSpc>
+                <a:spcPct val="100000"/>
+              </a:lnSpc>
+              <a:buNone/>
+              <a:tabLst>
+                <a:tab algn="l" pos="0"/>
+              </a:tabLst>
+            </a:pPr>
+            <a:r>
+              <a:rPr b="1" lang="en-US" sz="4000" strike="noStrike" u="none" cap="all">
                 <a:solidFill>
                   <a:schemeClr val="dk1"/>
                 </a:solidFill>
@@ -5222,20 +4989,84 @@
               </a:rPr>
               <a:t>Click to edit Master title style</a:t>
             </a:r>
-            <a:endParaRPr b="0" lang="en-US" sz="4400" strike="noStrike" u="none">
-              <a:solidFill>
-                <a:schemeClr val="dk1"/>
-              </a:solidFill>
-              <a:effectLst/>
-              <a:uFillTx/>
-              <a:latin typeface="Calibri"/>
+            <a:endParaRPr b="0" lang="de-AT" sz="4000" strike="noStrike" u="none">
+              <a:solidFill>
+                <a:srgbClr val="000000"/>
+              </a:solidFill>
+              <a:effectLst/>
+              <a:uFillTx/>
+              <a:latin typeface="Arial"/>
             </a:endParaRPr>
           </a:p>
         </p:txBody>
       </p:sp>
       <p:sp>
         <p:nvSpPr>
-          <p:cNvPr id="40" name="PlaceHolder 2"/>
+          <p:cNvPr id="36" name="PlaceHolder 2"/>
+          <p:cNvSpPr>
+            <a:spLocks noGrp="1"/>
+          </p:cNvSpPr>
+          <p:nvPr>
+            <p:ph type="body"/>
+          </p:nvPr>
+        </p:nvSpPr>
+        <p:spPr>
+          <a:xfrm>
+            <a:off x="722160" y="2906640"/>
+            <a:ext cx="7771680" cy="1499400"/>
+          </a:xfrm>
+          <a:prstGeom prst="rect">
+            <a:avLst/>
+          </a:prstGeom>
+          <a:noFill/>
+          <a:ln w="0">
+            <a:noFill/>
+          </a:ln>
+        </p:spPr>
+        <p:txBody>
+          <a:bodyPr lIns="91440" rIns="91440" tIns="45720" bIns="45720" anchor="b">
+            <a:noAutofit/>
+          </a:bodyPr>
+          <a:p>
+            <a:pPr indent="0" defTabSz="457200">
+              <a:lnSpc>
+                <a:spcPct val="100000"/>
+              </a:lnSpc>
+              <a:spcBef>
+                <a:spcPts val="400"/>
+              </a:spcBef>
+              <a:buNone/>
+              <a:tabLst>
+                <a:tab algn="l" pos="0"/>
+              </a:tabLst>
+            </a:pPr>
+            <a:r>
+              <a:rPr b="0" lang="en-US" sz="2000" strike="noStrike" u="none">
+                <a:solidFill>
+                  <a:schemeClr val="dk1">
+                    <a:tint val="75000"/>
+                  </a:schemeClr>
+                </a:solidFill>
+                <a:effectLst/>
+                <a:uFillTx/>
+                <a:latin typeface="Calibri"/>
+              </a:rPr>
+              <a:t>Click to edit Master text styles</a:t>
+            </a:r>
+            <a:endParaRPr b="0" lang="de-AT" sz="2000" strike="noStrike" u="none">
+              <a:solidFill>
+                <a:srgbClr val="000000"/>
+              </a:solidFill>
+              <a:effectLst/>
+              <a:uFillTx/>
+              <a:latin typeface="Arial"/>
+            </a:endParaRPr>
+          </a:p>
+        </p:txBody>
+      </p:sp>
+      <p:sp>
+        <p:nvSpPr>
+          <p:cNvPr id="37" name="PlaceHolder 3"/>
           <p:cNvSpPr>
             <a:spLocks noGrp="1"/>
           </p:cNvSpPr>
@@ -5246,7 +5077,7 @@
         <p:spPr>
           <a:xfrm>
             <a:off x="457200" y="6356520"/>
-            <a:ext cx="2133360" cy="364680"/>
+            <a:ext cx="2133000" cy="364320"/>
           </a:xfrm>
           <a:prstGeom prst="rect">
             <a:avLst/>
@@ -5266,6 +5097,9 @@
                 <a:spcPct val="100000"/>
               </a:lnSpc>
               <a:buNone/>
+              <a:tabLst>
+                <a:tab algn="l" pos="0"/>
+              </a:tabLst>
               <a:defRPr b="0" lang="en-US" sz="1200" strike="noStrike" u="none">
                 <a:solidFill>
                   <a:schemeClr val="dk1">
@@ -5284,6 +5118,9 @@
                 <a:spcPct val="100000"/>
               </a:lnSpc>
               <a:buNone/>
+              <a:tabLst>
+                <a:tab algn="l" pos="0"/>
+              </a:tabLst>
             </a:pPr>
             <a:r>
               <a:rPr b="0" lang="en-US" sz="1200" strike="noStrike" u="none">
@@ -5311,7 +5148,7 @@
       </p:sp>
       <p:sp>
         <p:nvSpPr>
-          <p:cNvPr id="41" name="PlaceHolder 3"/>
+          <p:cNvPr id="38" name="PlaceHolder 4"/>
           <p:cNvSpPr>
             <a:spLocks noGrp="1"/>
           </p:cNvSpPr>
@@ -5322,7 +5159,7 @@
         <p:spPr>
           <a:xfrm>
             <a:off x="3124080" y="6356520"/>
-            <a:ext cx="2895120" cy="364680"/>
+            <a:ext cx="2894760" cy="364320"/>
           </a:xfrm>
           <a:prstGeom prst="rect">
             <a:avLst/>
@@ -5338,7 +5175,13 @@
           </a:bodyPr>
           <a:lstStyle>
             <a:lvl1pPr indent="0" algn="ctr">
-              <a:buNone/>
+              <a:lnSpc>
+                <a:spcPct val="100000"/>
+              </a:lnSpc>
+              <a:buNone/>
+              <a:tabLst>
+                <a:tab algn="l" pos="0"/>
+              </a:tabLst>
               <a:defRPr b="0" lang="de-AT" sz="1400" strike="noStrike" u="none">
                 <a:solidFill>
                   <a:srgbClr val="000000"/>
@@ -5351,7 +5194,13 @@
           </a:lstStyle>
           <a:p>
             <a:pPr indent="0" algn="ctr">
-              <a:buNone/>
+              <a:lnSpc>
+                <a:spcPct val="100000"/>
+              </a:lnSpc>
+              <a:buNone/>
+              <a:tabLst>
+                <a:tab algn="l" pos="0"/>
+              </a:tabLst>
             </a:pPr>
             <a:r>
               <a:rPr b="0" lang="de-AT" sz="1400" strike="noStrike" u="none">
@@ -5377,7 +5226,7 @@
       </p:sp>
       <p:sp>
         <p:nvSpPr>
-          <p:cNvPr id="42" name="PlaceHolder 4"/>
+          <p:cNvPr id="39" name="PlaceHolder 5"/>
           <p:cNvSpPr>
             <a:spLocks noGrp="1"/>
           </p:cNvSpPr>
@@ -5388,7 +5237,7 @@
         <p:spPr>
           <a:xfrm>
             <a:off x="6553080" y="6356520"/>
-            <a:ext cx="2133360" cy="364680"/>
+            <a:ext cx="2133000" cy="364320"/>
           </a:xfrm>
           <a:prstGeom prst="rect">
             <a:avLst/>
@@ -5408,6 +5257,9 @@
                 <a:spcPct val="100000"/>
               </a:lnSpc>
               <a:buNone/>
+              <a:tabLst>
+                <a:tab algn="l" pos="0"/>
+              </a:tabLst>
               <a:defRPr b="0" lang="en-US" sz="1200" strike="noStrike" u="none">
                 <a:solidFill>
                   <a:schemeClr val="dk1">
@@ -5426,8 +5278,11 @@
                 <a:spcPct val="100000"/>
               </a:lnSpc>
               <a:buNone/>
-            </a:pPr>
-            <a:fld id="{076D6FD3-07F8-4D1A-8225-B3622E938AD9}" type="slidenum">
+              <a:tabLst>
+                <a:tab algn="l" pos="0"/>
+              </a:tabLst>
+            </a:pPr>
+            <a:fld id="{4773E665-8FB9-442B-948C-0601A642920C}" type="slidenum">
               <a:rPr b="0" lang="en-US" sz="1200" strike="noStrike" u="none">
                 <a:solidFill>
                   <a:schemeClr val="dk1">
@@ -5457,8 +5312,8 @@
 </file>
 
 <file path=ppt/slideLayouts/slideLayout9.xml><?xml version="1.0" encoding="utf-8"?>
-<p:sldLayout xmlns:a="http://schemas.openxmlformats.org/drawingml/2006/main" xmlns:p="http://schemas.openxmlformats.org/presentationml/2006/main" xmlns:r="http://schemas.openxmlformats.org/officeDocument/2006/relationships" xmlns:p14="http://schemas.microsoft.com/office/powerpoint/2010/main" xmlns:p15="http://schemas.microsoft.com/office/powerpoint/2012/main" xmlns:mc="http://schemas.openxmlformats.org/markup-compatibility/2006" type="blank" preserve="1">
-  <p:cSld name="Blank">
+<p:sldLayout xmlns:a="http://schemas.openxmlformats.org/drawingml/2006/main" xmlns:p="http://schemas.openxmlformats.org/presentationml/2006/main" xmlns:r="http://schemas.openxmlformats.org/officeDocument/2006/relationships" xmlns:p14="http://schemas.microsoft.com/office/powerpoint/2010/main" xmlns:p15="http://schemas.microsoft.com/office/powerpoint/2012/main" xmlns:mc="http://schemas.openxmlformats.org/markup-compatibility/2006" type="twoObj" preserve="1">
+  <p:cSld name="Two Content">
     <p:bg>
       <p:bgPr>
         <a:solidFill>
@@ -5482,7 +5337,464 @@
       </p:grpSpPr>
       <p:sp>
         <p:nvSpPr>
-          <p:cNvPr id="43" name="PlaceHolder 1"/>
+          <p:cNvPr id="40" name="PlaceHolder 1"/>
+          <p:cNvSpPr>
+            <a:spLocks noGrp="1"/>
+          </p:cNvSpPr>
+          <p:nvPr>
+            <p:ph type="title"/>
+          </p:nvPr>
+        </p:nvSpPr>
+        <p:spPr>
+          <a:xfrm>
+            <a:off x="457200" y="274680"/>
+            <a:ext cx="8228880" cy="1142280"/>
+          </a:xfrm>
+          <a:prstGeom prst="rect">
+            <a:avLst/>
+          </a:prstGeom>
+          <a:noFill/>
+          <a:ln w="0">
+            <a:noFill/>
+          </a:ln>
+        </p:spPr>
+        <p:txBody>
+          <a:bodyPr lIns="91440" rIns="91440" tIns="45720" bIns="45720" anchor="ctr">
+            <a:noAutofit/>
+          </a:bodyPr>
+          <a:p>
+            <a:pPr indent="0" algn="ctr" defTabSz="457200">
+              <a:lnSpc>
+                <a:spcPct val="100000"/>
+              </a:lnSpc>
+              <a:buNone/>
+              <a:tabLst>
+                <a:tab algn="l" pos="0"/>
+              </a:tabLst>
+            </a:pPr>
+            <a:r>
+              <a:rPr b="0" lang="en-US" sz="4400" strike="noStrike" u="none">
+                <a:solidFill>
+                  <a:schemeClr val="dk1"/>
+                </a:solidFill>
+                <a:effectLst/>
+                <a:uFillTx/>
+                <a:latin typeface="Calibri"/>
+              </a:rPr>
+              <a:t>Click to edit Master title style</a:t>
+            </a:r>
+            <a:endParaRPr b="0" lang="de-AT" sz="4400" strike="noStrike" u="none">
+              <a:solidFill>
+                <a:srgbClr val="000000"/>
+              </a:solidFill>
+              <a:effectLst/>
+              <a:uFillTx/>
+              <a:latin typeface="Arial"/>
+            </a:endParaRPr>
+          </a:p>
+        </p:txBody>
+      </p:sp>
+      <p:sp>
+        <p:nvSpPr>
+          <p:cNvPr id="41" name="PlaceHolder 2"/>
+          <p:cNvSpPr>
+            <a:spLocks noGrp="1"/>
+          </p:cNvSpPr>
+          <p:nvPr>
+            <p:ph type="body"/>
+          </p:nvPr>
+        </p:nvSpPr>
+        <p:spPr>
+          <a:xfrm>
+            <a:off x="457200" y="1600200"/>
+            <a:ext cx="4037760" cy="4525200"/>
+          </a:xfrm>
+          <a:prstGeom prst="rect">
+            <a:avLst/>
+          </a:prstGeom>
+          <a:noFill/>
+          <a:ln w="0">
+            <a:noFill/>
+          </a:ln>
+        </p:spPr>
+        <p:txBody>
+          <a:bodyPr lIns="91440" rIns="91440" tIns="45720" bIns="45720" anchor="t">
+            <a:noAutofit/>
+          </a:bodyPr>
+          <a:p>
+            <a:pPr marL="343080" indent="-343080" defTabSz="457200">
+              <a:lnSpc>
+                <a:spcPct val="100000"/>
+              </a:lnSpc>
+              <a:spcBef>
+                <a:spcPts val="561"/>
+              </a:spcBef>
+              <a:buClr>
+                <a:srgbClr val="000000"/>
+              </a:buClr>
+              <a:buFont typeface="Arial"/>
+              <a:buChar char="•"/>
+            </a:pPr>
+            <a:r>
+              <a:rPr b="0" lang="en-US" sz="2800" strike="noStrike" u="none">
+                <a:solidFill>
+                  <a:schemeClr val="dk1"/>
+                </a:solidFill>
+                <a:effectLst/>
+                <a:uFillTx/>
+                <a:latin typeface="Calibri"/>
+              </a:rPr>
+              <a:t>Click to edit Master text styles</a:t>
+            </a:r>
+            <a:endParaRPr b="0" lang="de-AT" sz="2800" strike="noStrike" u="none">
+              <a:solidFill>
+                <a:srgbClr val="000000"/>
+              </a:solidFill>
+              <a:effectLst/>
+              <a:uFillTx/>
+              <a:latin typeface="Arial"/>
+            </a:endParaRPr>
+          </a:p>
+          <a:p>
+            <a:pPr lvl="1" marL="743040" indent="-285840" defTabSz="457200">
+              <a:lnSpc>
+                <a:spcPct val="100000"/>
+              </a:lnSpc>
+              <a:spcBef>
+                <a:spcPts val="479"/>
+              </a:spcBef>
+              <a:buClr>
+                <a:srgbClr val="000000"/>
+              </a:buClr>
+              <a:buFont typeface="Arial"/>
+              <a:buChar char="–"/>
+            </a:pPr>
+            <a:r>
+              <a:rPr b="0" lang="en-US" sz="2400" strike="noStrike" u="none">
+                <a:solidFill>
+                  <a:schemeClr val="dk1"/>
+                </a:solidFill>
+                <a:effectLst/>
+                <a:uFillTx/>
+                <a:latin typeface="Calibri"/>
+              </a:rPr>
+              <a:t>Second level</a:t>
+            </a:r>
+            <a:endParaRPr b="0" lang="de-AT" sz="2400" strike="noStrike" u="none">
+              <a:solidFill>
+                <a:srgbClr val="000000"/>
+              </a:solidFill>
+              <a:effectLst/>
+              <a:uFillTx/>
+              <a:latin typeface="Arial"/>
+            </a:endParaRPr>
+          </a:p>
+          <a:p>
+            <a:pPr lvl="2" marL="1143000" indent="-228600" defTabSz="457200">
+              <a:lnSpc>
+                <a:spcPct val="100000"/>
+              </a:lnSpc>
+              <a:spcBef>
+                <a:spcPts val="400"/>
+              </a:spcBef>
+              <a:buClr>
+                <a:srgbClr val="000000"/>
+              </a:buClr>
+              <a:buFont typeface="Arial"/>
+              <a:buChar char="•"/>
+            </a:pPr>
+            <a:r>
+              <a:rPr b="0" lang="en-US" sz="2000" strike="noStrike" u="none">
+                <a:solidFill>
+                  <a:schemeClr val="dk1"/>
+                </a:solidFill>
+                <a:effectLst/>
+                <a:uFillTx/>
+                <a:latin typeface="Calibri"/>
+              </a:rPr>
+              <a:t>Third level</a:t>
+            </a:r>
+            <a:endParaRPr b="0" lang="de-AT" sz="2000" strike="noStrike" u="none">
+              <a:solidFill>
+                <a:srgbClr val="000000"/>
+              </a:solidFill>
+              <a:effectLst/>
+              <a:uFillTx/>
+              <a:latin typeface="Arial"/>
+            </a:endParaRPr>
+          </a:p>
+          <a:p>
+            <a:pPr lvl="3" marL="1600200" indent="-228600" defTabSz="457200">
+              <a:lnSpc>
+                <a:spcPct val="100000"/>
+              </a:lnSpc>
+              <a:spcBef>
+                <a:spcPts val="360"/>
+              </a:spcBef>
+              <a:buClr>
+                <a:srgbClr val="000000"/>
+              </a:buClr>
+              <a:buFont typeface="Arial"/>
+              <a:buChar char="–"/>
+            </a:pPr>
+            <a:r>
+              <a:rPr b="0" lang="en-US" sz="1800" strike="noStrike" u="none">
+                <a:solidFill>
+                  <a:schemeClr val="dk1"/>
+                </a:solidFill>
+                <a:effectLst/>
+                <a:uFillTx/>
+                <a:latin typeface="Calibri"/>
+              </a:rPr>
+              <a:t>Fourth level</a:t>
+            </a:r>
+            <a:endParaRPr b="0" lang="de-AT" sz="1800" strike="noStrike" u="none">
+              <a:solidFill>
+                <a:srgbClr val="000000"/>
+              </a:solidFill>
+              <a:effectLst/>
+              <a:uFillTx/>
+              <a:latin typeface="Arial"/>
+            </a:endParaRPr>
+          </a:p>
+          <a:p>
+            <a:pPr lvl="4" marL="2057400" indent="-228600" defTabSz="457200">
+              <a:lnSpc>
+                <a:spcPct val="100000"/>
+              </a:lnSpc>
+              <a:spcBef>
+                <a:spcPts val="360"/>
+              </a:spcBef>
+              <a:buClr>
+                <a:srgbClr val="000000"/>
+              </a:buClr>
+              <a:buFont typeface="Arial"/>
+              <a:buChar char="»"/>
+            </a:pPr>
+            <a:r>
+              <a:rPr b="0" lang="en-US" sz="1800" strike="noStrike" u="none">
+                <a:solidFill>
+                  <a:schemeClr val="dk1"/>
+                </a:solidFill>
+                <a:effectLst/>
+                <a:uFillTx/>
+                <a:latin typeface="Calibri"/>
+              </a:rPr>
+              <a:t>Fifth level</a:t>
+            </a:r>
+            <a:endParaRPr b="0" lang="de-AT" sz="1800" strike="noStrike" u="none">
+              <a:solidFill>
+                <a:srgbClr val="000000"/>
+              </a:solidFill>
+              <a:effectLst/>
+              <a:uFillTx/>
+              <a:latin typeface="Arial"/>
+            </a:endParaRPr>
+          </a:p>
+        </p:txBody>
+      </p:sp>
+      <p:sp>
+        <p:nvSpPr>
+          <p:cNvPr id="42" name="PlaceHolder 3"/>
+          <p:cNvSpPr>
+            <a:spLocks noGrp="1"/>
+          </p:cNvSpPr>
+          <p:nvPr>
+            <p:ph type="body"/>
+          </p:nvPr>
+        </p:nvSpPr>
+        <p:spPr>
+          <a:xfrm>
+            <a:off x="4648320" y="1600200"/>
+            <a:ext cx="4037760" cy="4525200"/>
+          </a:xfrm>
+          <a:prstGeom prst="rect">
+            <a:avLst/>
+          </a:prstGeom>
+          <a:noFill/>
+          <a:ln w="0">
+            <a:noFill/>
+          </a:ln>
+        </p:spPr>
+        <p:txBody>
+          <a:bodyPr lIns="91440" rIns="91440" tIns="45720" bIns="45720" anchor="t">
+            <a:noAutofit/>
+          </a:bodyPr>
+          <a:p>
+            <a:pPr marL="343080" indent="-343080" defTabSz="457200">
+              <a:lnSpc>
+                <a:spcPct val="100000"/>
+              </a:lnSpc>
+              <a:spcBef>
+                <a:spcPts val="561"/>
+              </a:spcBef>
+              <a:buClr>
+                <a:srgbClr val="000000"/>
+              </a:buClr>
+              <a:buFont typeface="Arial"/>
+              <a:buChar char="•"/>
+            </a:pPr>
+            <a:r>
+              <a:rPr b="0" lang="en-US" sz="2800" strike="noStrike" u="none">
+                <a:solidFill>
+                  <a:schemeClr val="dk1"/>
+                </a:solidFill>
+                <a:effectLst/>
+                <a:uFillTx/>
+                <a:latin typeface="Calibri"/>
+              </a:rPr>
+              <a:t>Click to edit Master text styles</a:t>
+            </a:r>
+            <a:endParaRPr b="0" lang="de-AT" sz="2800" strike="noStrike" u="none">
+              <a:solidFill>
+                <a:srgbClr val="000000"/>
+              </a:solidFill>
+              <a:effectLst/>
+              <a:uFillTx/>
+              <a:latin typeface="Arial"/>
+            </a:endParaRPr>
+          </a:p>
+          <a:p>
+            <a:pPr lvl="1" marL="743040" indent="-285840" defTabSz="457200">
+              <a:lnSpc>
+                <a:spcPct val="100000"/>
+              </a:lnSpc>
+              <a:spcBef>
+                <a:spcPts val="479"/>
+              </a:spcBef>
+              <a:buClr>
+                <a:srgbClr val="000000"/>
+              </a:buClr>
+              <a:buFont typeface="Arial"/>
+              <a:buChar char="–"/>
+            </a:pPr>
+            <a:r>
+              <a:rPr b="0" lang="en-US" sz="2400" strike="noStrike" u="none">
+                <a:solidFill>
+                  <a:schemeClr val="dk1"/>
+                </a:solidFill>
+                <a:effectLst/>
+                <a:uFillTx/>
+                <a:latin typeface="Calibri"/>
+              </a:rPr>
+              <a:t>Second level</a:t>
+            </a:r>
+            <a:endParaRPr b="0" lang="de-AT" sz="2400" strike="noStrike" u="none">
+              <a:solidFill>
+                <a:srgbClr val="000000"/>
+              </a:solidFill>
+              <a:effectLst/>
+              <a:uFillTx/>
+              <a:latin typeface="Arial"/>
+            </a:endParaRPr>
+          </a:p>
+          <a:p>
+            <a:pPr lvl="2" marL="1143000" indent="-228600" defTabSz="457200">
+              <a:lnSpc>
+                <a:spcPct val="100000"/>
+              </a:lnSpc>
+              <a:spcBef>
+                <a:spcPts val="400"/>
+              </a:spcBef>
+              <a:buClr>
+                <a:srgbClr val="000000"/>
+              </a:buClr>
+              <a:buFont typeface="Arial"/>
+              <a:buChar char="•"/>
+            </a:pPr>
+            <a:r>
+              <a:rPr b="0" lang="en-US" sz="2000" strike="noStrike" u="none">
+                <a:solidFill>
+                  <a:schemeClr val="dk1"/>
+                </a:solidFill>
+                <a:effectLst/>
+                <a:uFillTx/>
+                <a:latin typeface="Calibri"/>
+              </a:rPr>
+              <a:t>Third level</a:t>
+            </a:r>
+            <a:endParaRPr b="0" lang="de-AT" sz="2000" strike="noStrike" u="none">
+              <a:solidFill>
+                <a:srgbClr val="000000"/>
+              </a:solidFill>
+              <a:effectLst/>
+              <a:uFillTx/>
+              <a:latin typeface="Arial"/>
+            </a:endParaRPr>
+          </a:p>
+          <a:p>
+            <a:pPr lvl="3" marL="1600200" indent="-228600" defTabSz="457200">
+              <a:lnSpc>
+                <a:spcPct val="100000"/>
+              </a:lnSpc>
+              <a:spcBef>
+                <a:spcPts val="360"/>
+              </a:spcBef>
+              <a:buClr>
+                <a:srgbClr val="000000"/>
+              </a:buClr>
+              <a:buFont typeface="Arial"/>
+              <a:buChar char="–"/>
+            </a:pPr>
+            <a:r>
+              <a:rPr b="0" lang="en-US" sz="1800" strike="noStrike" u="none">
+                <a:solidFill>
+                  <a:schemeClr val="dk1"/>
+                </a:solidFill>
+                <a:effectLst/>
+                <a:uFillTx/>
+                <a:latin typeface="Calibri"/>
+              </a:rPr>
+              <a:t>Fourth level</a:t>
+            </a:r>
+            <a:endParaRPr b="0" lang="de-AT" sz="1800" strike="noStrike" u="none">
+              <a:solidFill>
+                <a:srgbClr val="000000"/>
+              </a:solidFill>
+              <a:effectLst/>
+              <a:uFillTx/>
+              <a:latin typeface="Arial"/>
+            </a:endParaRPr>
+          </a:p>
+          <a:p>
+            <a:pPr lvl="4" marL="2057400" indent="-228600" defTabSz="457200">
+              <a:lnSpc>
+                <a:spcPct val="100000"/>
+              </a:lnSpc>
+              <a:spcBef>
+                <a:spcPts val="360"/>
+              </a:spcBef>
+              <a:buClr>
+                <a:srgbClr val="000000"/>
+              </a:buClr>
+              <a:buFont typeface="Arial"/>
+              <a:buChar char="»"/>
+            </a:pPr>
+            <a:r>
+              <a:rPr b="0" lang="en-US" sz="1800" strike="noStrike" u="none">
+                <a:solidFill>
+                  <a:schemeClr val="dk1"/>
+                </a:solidFill>
+                <a:effectLst/>
+                <a:uFillTx/>
+                <a:latin typeface="Calibri"/>
+              </a:rPr>
+              <a:t>Fifth level</a:t>
+            </a:r>
+            <a:endParaRPr b="0" lang="de-AT" sz="1800" strike="noStrike" u="none">
+              <a:solidFill>
+                <a:srgbClr val="000000"/>
+              </a:solidFill>
+              <a:effectLst/>
+              <a:uFillTx/>
+              <a:latin typeface="Arial"/>
+            </a:endParaRPr>
+          </a:p>
+        </p:txBody>
+      </p:sp>
+      <p:sp>
+        <p:nvSpPr>
+          <p:cNvPr id="43" name="PlaceHolder 4"/>
           <p:cNvSpPr>
             <a:spLocks noGrp="1"/>
           </p:cNvSpPr>
@@ -5493,7 +5805,7 @@
         <p:spPr>
           <a:xfrm>
             <a:off x="457200" y="6356520"/>
-            <a:ext cx="2133360" cy="364680"/>
+            <a:ext cx="2133000" cy="364320"/>
           </a:xfrm>
           <a:prstGeom prst="rect">
             <a:avLst/>
@@ -5513,6 +5825,9 @@
                 <a:spcPct val="100000"/>
               </a:lnSpc>
               <a:buNone/>
+              <a:tabLst>
+                <a:tab algn="l" pos="0"/>
+              </a:tabLst>
               <a:defRPr b="0" lang="en-US" sz="1200" strike="noStrike" u="none">
                 <a:solidFill>
                   <a:schemeClr val="dk1">
@@ -5531,6 +5846,9 @@
                 <a:spcPct val="100000"/>
               </a:lnSpc>
               <a:buNone/>
+              <a:tabLst>
+                <a:tab algn="l" pos="0"/>
+              </a:tabLst>
             </a:pPr>
             <a:r>
               <a:rPr b="0" lang="en-US" sz="1200" strike="noStrike" u="none">
@@ -5558,7 +5876,7 @@
       </p:sp>
       <p:sp>
         <p:nvSpPr>
-          <p:cNvPr id="44" name="PlaceHolder 2"/>
+          <p:cNvPr id="44" name="PlaceHolder 5"/>
           <p:cNvSpPr>
             <a:spLocks noGrp="1"/>
           </p:cNvSpPr>
@@ -5569,7 +5887,7 @@
         <p:spPr>
           <a:xfrm>
             <a:off x="3124080" y="6356520"/>
-            <a:ext cx="2895120" cy="364680"/>
+            <a:ext cx="2894760" cy="364320"/>
           </a:xfrm>
           <a:prstGeom prst="rect">
             <a:avLst/>
@@ -5585,7 +5903,13 @@
           </a:bodyPr>
           <a:lstStyle>
             <a:lvl1pPr indent="0" algn="ctr">
-              <a:buNone/>
+              <a:lnSpc>
+                <a:spcPct val="100000"/>
+              </a:lnSpc>
+              <a:buNone/>
+              <a:tabLst>
+                <a:tab algn="l" pos="0"/>
+              </a:tabLst>
               <a:defRPr b="0" lang="de-AT" sz="1400" strike="noStrike" u="none">
                 <a:solidFill>
                   <a:srgbClr val="000000"/>
@@ -5598,7 +5922,13 @@
           </a:lstStyle>
           <a:p>
             <a:pPr indent="0" algn="ctr">
-              <a:buNone/>
+              <a:lnSpc>
+                <a:spcPct val="100000"/>
+              </a:lnSpc>
+              <a:buNone/>
+              <a:tabLst>
+                <a:tab algn="l" pos="0"/>
+              </a:tabLst>
             </a:pPr>
             <a:r>
               <a:rPr b="0" lang="de-AT" sz="1400" strike="noStrike" u="none">
@@ -5624,7 +5954,7 @@
       </p:sp>
       <p:sp>
         <p:nvSpPr>
-          <p:cNvPr id="45" name="PlaceHolder 3"/>
+          <p:cNvPr id="45" name="PlaceHolder 6"/>
           <p:cNvSpPr>
             <a:spLocks noGrp="1"/>
           </p:cNvSpPr>
@@ -5635,7 +5965,7 @@
         <p:spPr>
           <a:xfrm>
             <a:off x="6553080" y="6356520"/>
-            <a:ext cx="2133360" cy="364680"/>
+            <a:ext cx="2133000" cy="364320"/>
           </a:xfrm>
           <a:prstGeom prst="rect">
             <a:avLst/>
@@ -5655,6 +5985,9 @@
                 <a:spcPct val="100000"/>
               </a:lnSpc>
               <a:buNone/>
+              <a:tabLst>
+                <a:tab algn="l" pos="0"/>
+              </a:tabLst>
               <a:defRPr b="0" lang="en-US" sz="1200" strike="noStrike" u="none">
                 <a:solidFill>
                   <a:schemeClr val="dk1">
@@ -5673,8 +6006,11 @@
                 <a:spcPct val="100000"/>
               </a:lnSpc>
               <a:buNone/>
-            </a:pPr>
-            <a:fld id="{9272645F-981D-4BBA-BF16-59281C5C603A}" type="slidenum">
+              <a:tabLst>
+                <a:tab algn="l" pos="0"/>
+              </a:tabLst>
+            </a:pPr>
+            <a:fld id="{99EA2B8B-C7FD-4036-AA87-1B299CED8D84}" type="slidenum">
               <a:rPr b="0" lang="en-US" sz="1200" strike="noStrike" u="none">
                 <a:solidFill>
                   <a:schemeClr val="dk1">
@@ -5768,8 +6104,8 @@
         </p:nvSpPr>
         <p:spPr>
           <a:xfrm>
-            <a:off x="685800" y="2130480"/>
-            <a:ext cx="7772040" cy="1469520"/>
+            <a:off x="685800" y="1800000"/>
+            <a:ext cx="7771680" cy="1469160"/>
           </a:xfrm>
           <a:prstGeom prst="rect">
             <a:avLst/>
@@ -5789,6 +6125,9 @@
                 <a:spcPct val="100000"/>
               </a:lnSpc>
               <a:buNone/>
+              <a:tabLst>
+                <a:tab algn="l" pos="0"/>
+              </a:tabLst>
             </a:pPr>
             <a:r>
               <a:rPr b="0" lang="en-US" sz="4000" strike="noStrike" u="none">
@@ -5799,15 +6138,15 @@
                 <a:uFillTx/>
                 <a:latin typeface="Calibri"/>
               </a:rPr>
-              <a:t>🎉 FunMap 🎉</a:t>
-            </a:r>
-            <a:endParaRPr b="0" lang="en-US" sz="4000" strike="noStrike" u="none">
-              <a:solidFill>
-                <a:schemeClr val="dk1"/>
-              </a:solidFill>
-              <a:effectLst/>
-              <a:uFillTx/>
-              <a:latin typeface="Calibri"/>
+              <a:t>🎉 Wien Talks 🎉</a:t>
+            </a:r>
+            <a:endParaRPr b="0" lang="de-AT" sz="4000" strike="noStrike" u="none">
+              <a:solidFill>
+                <a:srgbClr val="000000"/>
+              </a:solidFill>
+              <a:effectLst/>
+              <a:uFillTx/>
+              <a:latin typeface="Arial"/>
             </a:endParaRPr>
           </a:p>
         </p:txBody>
@@ -5825,7 +6164,7 @@
         <p:spPr>
           <a:xfrm>
             <a:off x="1371600" y="3886200"/>
-            <a:ext cx="6400440" cy="1752120"/>
+            <a:ext cx="6400080" cy="1751760"/>
           </a:xfrm>
           <a:prstGeom prst="rect">
             <a:avLst/>
@@ -5870,6 +6209,53 @@
               <a:effectLst/>
               <a:uFillTx/>
               <a:latin typeface="Arial"/>
+            </a:endParaRPr>
+          </a:p>
+        </p:txBody>
+      </p:sp>
+      <p:sp>
+        <p:nvSpPr>
+          <p:cNvPr id="60" name=""/>
+          <p:cNvSpPr txBox="1"/>
+          <p:nvPr/>
+        </p:nvSpPr>
+        <p:spPr>
+          <a:xfrm>
+            <a:off x="3420000" y="6120000"/>
+            <a:ext cx="5580000" cy="540000"/>
+          </a:xfrm>
+          <a:prstGeom prst="rect">
+            <a:avLst/>
+          </a:prstGeom>
+          <a:noFill/>
+          <a:ln w="0">
+            <a:noFill/>
+          </a:ln>
+        </p:spPr>
+        <p:txBody>
+          <a:bodyPr lIns="90000" rIns="90000" tIns="45000" bIns="45000" anchor="t">
+            <a:spAutoFit/>
+          </a:bodyPr>
+          <a:p>
+            <a:r>
+              <a:rPr b="0" lang="de-AT" sz="1100" strike="noStrike" u="none">
+                <a:solidFill>
+                  <a:srgbClr val="000000"/>
+                </a:solidFill>
+                <a:effectLst/>
+                <a:uFillTx/>
+                <a:latin typeface="Liberation Mono;Courier New;DejaVu Sans Mono;Lucida Sans Typewriter"/>
+              </a:rPr>
+              <a:t>Because the world’s a lot more fun when we laugh together!</a:t>
+            </a:r>
+            <a:endParaRPr b="0" lang="de-AT" sz="1100" strike="noStrike" u="none">
+              <a:solidFill>
+                <a:srgbClr val="000000"/>
+              </a:solidFill>
+              <a:effectLst/>
+              <a:uFillTx/>
+              <a:latin typeface="Liberation Mono;Courier New;DejaVu Sans Mono;Lucida Sans Typewriter"/>
+              <a:ea typeface="Liberation Mono;Courier New;DejaVu Sans Mono;Lucida Sans Typewriter"/>
             </a:endParaRPr>
           </a:p>
         </p:txBody>
@@ -5906,7 +6292,7 @@
       </p:grpSpPr>
       <p:sp>
         <p:nvSpPr>
-          <p:cNvPr id="60" name="PlaceHolder 1"/>
+          <p:cNvPr id="61" name="PlaceHolder 1"/>
           <p:cNvSpPr>
             <a:spLocks noGrp="1"/>
           </p:cNvSpPr>
@@ -5917,7 +6303,7 @@
         <p:spPr>
           <a:xfrm>
             <a:off x="457200" y="274680"/>
-            <a:ext cx="8229240" cy="1142640"/>
+            <a:ext cx="8228880" cy="1142280"/>
           </a:xfrm>
           <a:prstGeom prst="rect">
             <a:avLst/>
@@ -5937,6 +6323,9 @@
                 <a:spcPct val="100000"/>
               </a:lnSpc>
               <a:buNone/>
+              <a:tabLst>
+                <a:tab algn="l" pos="0"/>
+              </a:tabLst>
             </a:pPr>
             <a:r>
               <a:rPr b="0" lang="en-US" sz="4400" strike="noStrike" u="none">
@@ -5947,22 +6336,22 @@
                 <a:uFillTx/>
                 <a:latin typeface="Calibri"/>
               </a:rPr>
-              <a:t>🤔 What is FunMap?</a:t>
-            </a:r>
-            <a:endParaRPr b="0" lang="en-US" sz="4400" strike="noStrike" u="none">
-              <a:solidFill>
-                <a:schemeClr val="dk1"/>
-              </a:solidFill>
-              <a:effectLst/>
-              <a:uFillTx/>
-              <a:latin typeface="Calibri"/>
+              <a:t>🤔 What is Wien Talks?</a:t>
+            </a:r>
+            <a:endParaRPr b="0" lang="de-AT" sz="4400" strike="noStrike" u="none">
+              <a:solidFill>
+                <a:srgbClr val="000000"/>
+              </a:solidFill>
+              <a:effectLst/>
+              <a:uFillTx/>
+              <a:latin typeface="Arial"/>
             </a:endParaRPr>
           </a:p>
         </p:txBody>
       </p:sp>
       <p:sp>
         <p:nvSpPr>
-          <p:cNvPr id="61" name="PlaceHolder 2"/>
+          <p:cNvPr id="62" name="PlaceHolder 2"/>
           <p:cNvSpPr>
             <a:spLocks noGrp="1"/>
           </p:cNvSpPr>
@@ -5973,7 +6362,7 @@
         <p:spPr>
           <a:xfrm>
             <a:off x="457200" y="1600200"/>
-            <a:ext cx="8229240" cy="4525560"/>
+            <a:ext cx="8228880" cy="4525200"/>
           </a:xfrm>
           <a:prstGeom prst="rect">
             <a:avLst/>
@@ -6010,15 +6399,15 @@
                 <a:uFillTx/>
                 <a:latin typeface="Calibri"/>
               </a:rPr>
-              <a:t>FunMap is a playful app where you can:</a:t>
-            </a:r>
-            <a:endParaRPr b="0" lang="en-US" sz="2000" strike="noStrike" u="none">
-              <a:solidFill>
-                <a:schemeClr val="dk1"/>
-              </a:solidFill>
-              <a:effectLst/>
-              <a:uFillTx/>
-              <a:latin typeface="Calibri"/>
+              <a:t>Wien Talks is a playful app where you can:</a:t>
+            </a:r>
+            <a:endParaRPr b="0" lang="de-AT" sz="2000" strike="noStrike" u="none">
+              <a:solidFill>
+                <a:srgbClr val="000000"/>
+              </a:solidFill>
+              <a:effectLst/>
+              <a:uFillTx/>
+              <a:latin typeface="Arial"/>
             </a:endParaRPr>
           </a:p>
           <a:p>
@@ -6046,13 +6435,13 @@
               </a:rPr>
               <a:t>✨ Share funny events you encounter</a:t>
             </a:r>
-            <a:endParaRPr b="0" lang="en-US" sz="2000" strike="noStrike" u="none">
-              <a:solidFill>
-                <a:schemeClr val="dk1"/>
-              </a:solidFill>
-              <a:effectLst/>
-              <a:uFillTx/>
-              <a:latin typeface="Calibri"/>
+            <a:endParaRPr b="0" lang="de-AT" sz="2000" strike="noStrike" u="none">
+              <a:solidFill>
+                <a:srgbClr val="000000"/>
+              </a:solidFill>
+              <a:effectLst/>
+              <a:uFillTx/>
+              <a:latin typeface="Arial"/>
             </a:endParaRPr>
           </a:p>
           <a:p>
@@ -6080,13 +6469,13 @@
               </a:rPr>
               <a:t>✨ Pin them on a live map</a:t>
             </a:r>
-            <a:endParaRPr b="0" lang="en-US" sz="2000" strike="noStrike" u="none">
-              <a:solidFill>
-                <a:schemeClr val="dk1"/>
-              </a:solidFill>
-              <a:effectLst/>
-              <a:uFillTx/>
-              <a:latin typeface="Calibri"/>
+            <a:endParaRPr b="0" lang="de-AT" sz="2000" strike="noStrike" u="none">
+              <a:solidFill>
+                <a:srgbClr val="000000"/>
+              </a:solidFill>
+              <a:effectLst/>
+              <a:uFillTx/>
+              <a:latin typeface="Arial"/>
             </a:endParaRPr>
           </a:p>
           <a:p>
@@ -6114,13 +6503,13 @@
               </a:rPr>
               <a:t>✨ Explore laughs from people nearby</a:t>
             </a:r>
-            <a:endParaRPr b="0" lang="en-US" sz="2000" strike="noStrike" u="none">
-              <a:solidFill>
-                <a:schemeClr val="dk1"/>
-              </a:solidFill>
-              <a:effectLst/>
-              <a:uFillTx/>
-              <a:latin typeface="Calibri"/>
+            <a:endParaRPr b="0" lang="de-AT" sz="2000" strike="noStrike" u="none">
+              <a:solidFill>
+                <a:srgbClr val="000000"/>
+              </a:solidFill>
+              <a:effectLst/>
+              <a:uFillTx/>
+              <a:latin typeface="Arial"/>
             </a:endParaRPr>
           </a:p>
           <a:p>
@@ -6132,28 +6521,31 @@
                 <a:spcPts val="641"/>
               </a:spcBef>
               <a:buNone/>
-            </a:pPr>
-            <a:endParaRPr b="0" lang="en-US" sz="3200" strike="noStrike" u="none">
-              <a:solidFill>
-                <a:schemeClr val="dk1"/>
-              </a:solidFill>
-              <a:effectLst/>
-              <a:uFillTx/>
-              <a:latin typeface="Calibri"/>
+              <a:tabLst>
+                <a:tab algn="l" pos="0"/>
+              </a:tabLst>
+            </a:pPr>
+            <a:endParaRPr b="0" lang="de-AT" sz="3200" strike="noStrike" u="none">
+              <a:solidFill>
+                <a:srgbClr val="000000"/>
+              </a:solidFill>
+              <a:effectLst/>
+              <a:uFillTx/>
+              <a:latin typeface="Arial"/>
             </a:endParaRPr>
           </a:p>
         </p:txBody>
       </p:sp>
       <p:sp>
         <p:nvSpPr>
-          <p:cNvPr id="62" name=""/>
-          <p:cNvSpPr txBox="1"/>
+          <p:cNvPr id="63" name=""/>
+          <p:cNvSpPr/>
           <p:nvPr/>
         </p:nvSpPr>
         <p:spPr>
           <a:xfrm>
             <a:off x="1531080" y="3884040"/>
-            <a:ext cx="4588920" cy="1515960"/>
+            <a:ext cx="4588560" cy="1515600"/>
           </a:xfrm>
           <a:prstGeom prst="rect">
             <a:avLst/>
@@ -6163,11 +6555,22 @@
             <a:noFill/>
           </a:ln>
         </p:spPr>
+        <p:style>
+          <a:lnRef idx="0"/>
+          <a:fillRef idx="0"/>
+          <a:effectRef idx="0"/>
+          <a:fontRef idx="minor"/>
+        </p:style>
         <p:txBody>
           <a:bodyPr lIns="90000" rIns="90000" tIns="45000" bIns="45000" anchor="t">
             <a:spAutoFit/>
           </a:bodyPr>
           <a:p>
+            <a:pPr>
+              <a:lnSpc>
+                <a:spcPct val="100000"/>
+              </a:lnSpc>
+            </a:pPr>
             <a:r>
               <a:rPr b="0" lang="de-AT" sz="2000" strike="noStrike" u="none">
                 <a:solidFill>
@@ -6189,6 +6592,11 @@
             </a:endParaRPr>
           </a:p>
           <a:p>
+            <a:pPr>
+              <a:lnSpc>
+                <a:spcPct val="100000"/>
+              </a:lnSpc>
+            </a:pPr>
             <a:endParaRPr b="0" lang="de-AT" sz="3200" strike="noStrike" u="none">
               <a:solidFill>
                 <a:srgbClr val="000000"/>
@@ -6199,6 +6607,11 @@
             </a:endParaRPr>
           </a:p>
           <a:p>
+            <a:pPr>
+              <a:lnSpc>
+                <a:spcPct val="100000"/>
+              </a:lnSpc>
+            </a:pPr>
             <a:r>
               <a:rPr b="0" lang="de-AT" sz="2000" strike="noStrike" u="none">
                 <a:solidFill>
@@ -6220,6 +6633,11 @@
             </a:endParaRPr>
           </a:p>
           <a:p>
+            <a:pPr>
+              <a:lnSpc>
+                <a:spcPct val="100000"/>
+              </a:lnSpc>
+            </a:pPr>
             <a:r>
               <a:rPr b="0" lang="de-AT" sz="2000" strike="noStrike" u="none">
                 <a:solidFill>
@@ -6241,6 +6659,11 @@
             </a:endParaRPr>
           </a:p>
           <a:p>
+            <a:pPr>
+              <a:lnSpc>
+                <a:spcPct val="100000"/>
+              </a:lnSpc>
+            </a:pPr>
             <a:r>
               <a:rPr b="0" lang="de-AT" sz="2000" strike="noStrike" u="none">
                 <a:solidFill>
@@ -6295,7 +6718,7 @@
       </p:grpSpPr>
       <p:sp>
         <p:nvSpPr>
-          <p:cNvPr id="63" name="PlaceHolder 1"/>
+          <p:cNvPr id="64" name="PlaceHolder 1"/>
           <p:cNvSpPr>
             <a:spLocks noGrp="1"/>
           </p:cNvSpPr>
@@ -6306,7 +6729,7 @@
         <p:spPr>
           <a:xfrm>
             <a:off x="2304000" y="274680"/>
-            <a:ext cx="6840000" cy="1142640"/>
+            <a:ext cx="6839640" cy="1142280"/>
           </a:xfrm>
           <a:prstGeom prst="rect">
             <a:avLst/>
@@ -6326,6 +6749,9 @@
                 <a:spcPct val="100000"/>
               </a:lnSpc>
               <a:buNone/>
+              <a:tabLst>
+                <a:tab algn="l" pos="0"/>
+              </a:tabLst>
             </a:pPr>
             <a:r>
               <a:rPr b="0" lang="en-US" sz="4400" strike="noStrike" u="none">
@@ -6338,20 +6764,20 @@
               </a:rPr>
               <a:t>Die Grätzl-Goblins</a:t>
             </a:r>
-            <a:endParaRPr b="0" lang="en-US" sz="4400" strike="noStrike" u="none">
-              <a:solidFill>
-                <a:schemeClr val="dk1"/>
-              </a:solidFill>
-              <a:effectLst/>
-              <a:uFillTx/>
-              <a:latin typeface="Calibri"/>
+            <a:endParaRPr b="0" lang="de-AT" sz="4400" strike="noStrike" u="none">
+              <a:solidFill>
+                <a:srgbClr val="000000"/>
+              </a:solidFill>
+              <a:effectLst/>
+              <a:uFillTx/>
+              <a:latin typeface="Arial"/>
             </a:endParaRPr>
           </a:p>
         </p:txBody>
       </p:sp>
       <p:sp>
         <p:nvSpPr>
-          <p:cNvPr id="64" name="PlaceHolder 2"/>
+          <p:cNvPr id="65" name="PlaceHolder 2"/>
           <p:cNvSpPr>
             <a:spLocks noGrp="1"/>
           </p:cNvSpPr>
@@ -6361,8 +6787,8 @@
         </p:nvSpPr>
         <p:spPr>
           <a:xfrm>
-            <a:off x="457200" y="1600200"/>
-            <a:ext cx="8229240" cy="4525560"/>
+            <a:off x="540000" y="1800000"/>
+            <a:ext cx="7163280" cy="858960"/>
           </a:xfrm>
           <a:prstGeom prst="rect">
             <a:avLst/>
@@ -6385,14 +6811,17 @@
                 <a:spcPts val="400"/>
               </a:spcBef>
               <a:buNone/>
-            </a:pPr>
-            <a:endParaRPr b="0" lang="en-US" sz="2000" strike="noStrike" u="none">
-              <a:solidFill>
-                <a:schemeClr val="dk1"/>
-              </a:solidFill>
-              <a:effectLst/>
-              <a:uFillTx/>
-              <a:latin typeface="Calibri"/>
+              <a:tabLst>
+                <a:tab algn="l" pos="0"/>
+              </a:tabLst>
+            </a:pPr>
+            <a:endParaRPr b="0" lang="de-AT" sz="2000" strike="noStrike" u="none">
+              <a:solidFill>
+                <a:srgbClr val="000000"/>
+              </a:solidFill>
+              <a:effectLst/>
+              <a:uFillTx/>
+              <a:latin typeface="Arial"/>
             </a:endParaRPr>
           </a:p>
           <a:p>
@@ -6404,6 +6833,9 @@
                 <a:spcPts val="400"/>
               </a:spcBef>
               <a:buNone/>
+              <a:tabLst>
+                <a:tab algn="l" pos="0"/>
+              </a:tabLst>
             </a:pPr>
             <a:r>
               <a:rPr b="0" lang="en-US" sz="2000" strike="noStrike" u="none">
@@ -6416,17 +6848,17 @@
               </a:rPr>
               <a:t>Github: https://github.com/timokz/flutter-vienna-hackathon-25</a:t>
             </a:r>
-            <a:endParaRPr b="0" lang="en-US" sz="2000" strike="noStrike" u="none">
-              <a:solidFill>
-                <a:schemeClr val="dk1"/>
-              </a:solidFill>
-              <a:effectLst/>
-              <a:uFillTx/>
-              <a:latin typeface="Calibri"/>
-            </a:endParaRPr>
-          </a:p>
-          <a:p>
-            <a:pPr indent="0" defTabSz="457200">
+            <a:endParaRPr b="0" lang="de-AT" sz="2000" strike="noStrike" u="none">
+              <a:solidFill>
+                <a:srgbClr val="000000"/>
+              </a:solidFill>
+              <a:effectLst/>
+              <a:uFillTx/>
+              <a:latin typeface="Arial"/>
+            </a:endParaRPr>
+          </a:p>
+          <a:p>
+            <a:pPr marL="343080" indent="0" defTabSz="457200">
               <a:lnSpc>
                 <a:spcPct val="100000"/>
               </a:lnSpc>
@@ -6434,14 +6866,17 @@
                 <a:spcPts val="641"/>
               </a:spcBef>
               <a:buNone/>
-            </a:pPr>
-            <a:endParaRPr b="0" lang="en-US" sz="3200" strike="noStrike" u="none">
-              <a:solidFill>
-                <a:schemeClr val="dk1"/>
-              </a:solidFill>
-              <a:effectLst/>
-              <a:uFillTx/>
-              <a:latin typeface="Calibri"/>
+              <a:tabLst>
+                <a:tab algn="l" pos="0"/>
+              </a:tabLst>
+            </a:pPr>
+            <a:endParaRPr b="0" lang="de-AT" sz="3200" strike="noStrike" u="none">
+              <a:solidFill>
+                <a:srgbClr val="000000"/>
+              </a:solidFill>
+              <a:effectLst/>
+              <a:uFillTx/>
+              <a:latin typeface="Arial"/>
             </a:endParaRPr>
           </a:p>
           <a:p>
@@ -6453,21 +6888,24 @@
                 <a:spcPts val="400"/>
               </a:spcBef>
               <a:buNone/>
-            </a:pPr>
-            <a:endParaRPr b="0" lang="en-US" sz="2000" strike="noStrike" u="none">
-              <a:solidFill>
-                <a:schemeClr val="dk1"/>
-              </a:solidFill>
-              <a:effectLst/>
-              <a:uFillTx/>
-              <a:latin typeface="Calibri"/>
+              <a:tabLst>
+                <a:tab algn="l" pos="0"/>
+              </a:tabLst>
+            </a:pPr>
+            <a:endParaRPr b="0" lang="de-AT" sz="2000" strike="noStrike" u="none">
+              <a:solidFill>
+                <a:srgbClr val="000000"/>
+              </a:solidFill>
+              <a:effectLst/>
+              <a:uFillTx/>
+              <a:latin typeface="Arial"/>
             </a:endParaRPr>
           </a:p>
         </p:txBody>
       </p:sp>
       <p:pic>
         <p:nvPicPr>
-          <p:cNvPr id="65" name="" descr=""/>
+          <p:cNvPr id="66" name="" descr=""/>
           <p:cNvPicPr/>
           <p:nvPr/>
         </p:nvPicPr>
@@ -6477,8 +6915,32 @@
         </p:blipFill>
         <p:spPr>
           <a:xfrm>
-            <a:off x="900000" y="82440"/>
-            <a:ext cx="2340000" cy="1517760"/>
+            <a:off x="900000" y="540000"/>
+            <a:ext cx="2339640" cy="1517400"/>
+          </a:xfrm>
+          <a:prstGeom prst="rect">
+            <a:avLst/>
+          </a:prstGeom>
+          <a:noFill/>
+          <a:ln w="0">
+            <a:noFill/>
+          </a:ln>
+        </p:spPr>
+      </p:pic>
+      <p:pic>
+        <p:nvPicPr>
+          <p:cNvPr id="67" name="" descr=""/>
+          <p:cNvPicPr/>
+          <p:nvPr/>
+        </p:nvPicPr>
+        <p:blipFill>
+          <a:blip r:embed="rId2"/>
+          <a:stretch/>
+        </p:blipFill>
+        <p:spPr>
+          <a:xfrm>
+            <a:off x="900000" y="2658960"/>
+            <a:ext cx="6983280" cy="4001040"/>
           </a:xfrm>
           <a:prstGeom prst="rect">
             <a:avLst/>
@@ -6521,7 +6983,7 @@
       </p:grpSpPr>
       <p:sp>
         <p:nvSpPr>
-          <p:cNvPr id="66" name="PlaceHolder 1"/>
+          <p:cNvPr id="68" name="PlaceHolder 1"/>
           <p:cNvSpPr>
             <a:spLocks noGrp="1"/>
           </p:cNvSpPr>
@@ -6532,7 +6994,7 @@
         <p:spPr>
           <a:xfrm>
             <a:off x="457200" y="274680"/>
-            <a:ext cx="8229240" cy="1142640"/>
+            <a:ext cx="8228880" cy="1142280"/>
           </a:xfrm>
           <a:prstGeom prst="rect">
             <a:avLst/>
@@ -6552,6 +7014,9 @@
                 <a:spcPct val="100000"/>
               </a:lnSpc>
               <a:buNone/>
+              <a:tabLst>
+                <a:tab algn="l" pos="0"/>
+              </a:tabLst>
             </a:pPr>
             <a:r>
               <a:rPr b="0" lang="en-US" sz="4400" strike="noStrike" u="none">
@@ -6562,22 +7027,22 @@
                 <a:uFillTx/>
                 <a:latin typeface="Calibri"/>
               </a:rPr>
-              <a:t>🌍 Concept</a:t>
-            </a:r>
-            <a:endParaRPr b="0" lang="en-US" sz="4400" strike="noStrike" u="none">
-              <a:solidFill>
-                <a:schemeClr val="dk1"/>
-              </a:solidFill>
-              <a:effectLst/>
-              <a:uFillTx/>
-              <a:latin typeface="Calibri"/>
+              <a:t>🌍 Stack</a:t>
+            </a:r>
+            <a:endParaRPr b="0" lang="de-AT" sz="4400" strike="noStrike" u="none">
+              <a:solidFill>
+                <a:srgbClr val="000000"/>
+              </a:solidFill>
+              <a:effectLst/>
+              <a:uFillTx/>
+              <a:latin typeface="Arial"/>
             </a:endParaRPr>
           </a:p>
         </p:txBody>
       </p:sp>
       <p:sp>
         <p:nvSpPr>
-          <p:cNvPr id="67" name="PlaceHolder 2"/>
+          <p:cNvPr id="69" name="PlaceHolder 2"/>
           <p:cNvSpPr>
             <a:spLocks noGrp="1"/>
           </p:cNvSpPr>
@@ -6587,8 +7052,8 @@
         </p:nvSpPr>
         <p:spPr>
           <a:xfrm>
-            <a:off x="457200" y="1600200"/>
-            <a:ext cx="8229240" cy="4525560"/>
+            <a:off x="457200" y="1278000"/>
+            <a:ext cx="8182800" cy="5580000"/>
           </a:xfrm>
           <a:prstGeom prst="rect">
             <a:avLst/>
@@ -6604,13 +7069,19 @@
           </a:bodyPr>
           <a:p>
             <a:pPr marL="432000" indent="0">
+              <a:lnSpc>
+                <a:spcPct val="100000"/>
+              </a:lnSpc>
               <a:spcBef>
                 <a:spcPts val="1417"/>
               </a:spcBef>
               <a:buNone/>
-            </a:pPr>
-            <a:r>
-              <a:rPr b="1" lang="en-US" sz="3200" strike="noStrike" u="none">
+              <a:tabLst>
+                <a:tab algn="l" pos="0"/>
+              </a:tabLst>
+            </a:pPr>
+            <a:r>
+              <a:rPr b="1" lang="en-US" sz="2800" strike="noStrike" u="none">
                 <a:solidFill>
                   <a:schemeClr val="dk1"/>
                 </a:solidFill>
@@ -6621,7 +7092,7 @@
               <a:t>Server</a:t>
             </a:r>
             <a:r>
-              <a:rPr b="0" lang="en-US" sz="3200" strike="noStrike" u="none">
+              <a:rPr b="0" lang="en-US" sz="2800" strike="noStrike" u="none">
                 <a:solidFill>
                   <a:schemeClr val="dk1"/>
                 </a:solidFill>
@@ -6631,17 +7102,20 @@
               </a:rPr>
               <a:t>:</a:t>
             </a:r>
-            <a:endParaRPr b="0" lang="en-US" sz="3200" strike="noStrike" u="none">
-              <a:solidFill>
-                <a:schemeClr val="dk1"/>
-              </a:solidFill>
-              <a:effectLst/>
-              <a:uFillTx/>
-              <a:latin typeface="Calibri"/>
+            <a:endParaRPr b="0" lang="de-AT" sz="2800" strike="noStrike" u="none">
+              <a:solidFill>
+                <a:srgbClr val="000000"/>
+              </a:solidFill>
+              <a:effectLst/>
+              <a:uFillTx/>
+              <a:latin typeface="Arial"/>
             </a:endParaRPr>
           </a:p>
           <a:p>
             <a:pPr marL="432000" indent="-324000">
+              <a:lnSpc>
+                <a:spcPct val="100000"/>
+              </a:lnSpc>
               <a:spcBef>
                 <a:spcPts val="1417"/>
               </a:spcBef>
@@ -6651,9 +7125,12 @@
               <a:buSzPct val="45000"/>
               <a:buFont typeface="Wingdings" charset="2"/>
               <a:buChar char=""/>
-            </a:pPr>
-            <a:r>
-              <a:rPr b="0" lang="en-US" sz="3200" strike="noStrike" u="none">
+              <a:tabLst>
+                <a:tab algn="l" pos="0"/>
+              </a:tabLst>
+            </a:pPr>
+            <a:r>
+              <a:rPr b="0" lang="en-US" sz="2800" strike="noStrike" u="none">
                 <a:solidFill>
                   <a:schemeClr val="dk1"/>
                 </a:solidFill>
@@ -6663,71 +7140,58 @@
               </a:rPr>
               <a:t>Serverpod</a:t>
             </a:r>
-            <a:endParaRPr b="0" lang="en-US" sz="3200" strike="noStrike" u="none">
-              <a:solidFill>
-                <a:schemeClr val="dk1"/>
-              </a:solidFill>
-              <a:effectLst/>
-              <a:uFillTx/>
-              <a:latin typeface="Calibri"/>
-            </a:endParaRPr>
-          </a:p>
-          <a:p>
-            <a:pPr marL="432000" indent="0">
+            <a:endParaRPr b="0" lang="de-AT" sz="2800" strike="noStrike" u="none">
+              <a:solidFill>
+                <a:srgbClr val="000000"/>
+              </a:solidFill>
+              <a:effectLst/>
+              <a:uFillTx/>
+              <a:latin typeface="Arial"/>
+            </a:endParaRPr>
+          </a:p>
+          <a:p>
+            <a:pPr lvl="1" marL="864000" indent="-324000">
+              <a:lnSpc>
+                <a:spcPct val="100000"/>
+              </a:lnSpc>
               <a:spcBef>
-                <a:spcPts val="1417"/>
+                <a:spcPts val="1134"/>
               </a:spcBef>
-              <a:buNone/>
-            </a:pPr>
-            <a:endParaRPr b="0" lang="en-US" sz="3200" strike="noStrike" u="none">
-              <a:solidFill>
-                <a:schemeClr val="dk1"/>
-              </a:solidFill>
-              <a:effectLst/>
-              <a:uFillTx/>
-              <a:latin typeface="Calibri"/>
-            </a:endParaRPr>
-          </a:p>
-          <a:p>
-            <a:pPr marL="432000" indent="0">
-              <a:spcBef>
-                <a:spcPts val="1417"/>
-              </a:spcBef>
-              <a:buNone/>
-            </a:pPr>
-            <a:r>
-              <a:rPr b="1" lang="en-US" sz="3200" strike="noStrike" u="none">
-                <a:solidFill>
-                  <a:schemeClr val="dk1"/>
-                </a:solidFill>
-                <a:effectLst/>
-                <a:uFillTx/>
-                <a:latin typeface="Calibri"/>
-              </a:rPr>
-              <a:t>Client</a:t>
-            </a:r>
-            <a:r>
-              <a:rPr b="0" lang="en-US" sz="3200" strike="noStrike" u="none">
-                <a:solidFill>
-                  <a:schemeClr val="dk1"/>
-                </a:solidFill>
-                <a:effectLst/>
-                <a:uFillTx/>
-                <a:latin typeface="Calibri"/>
-              </a:rPr>
-              <a:t>:</a:t>
-            </a:r>
-            <a:endParaRPr b="0" lang="en-US" sz="3200" strike="noStrike" u="none">
-              <a:solidFill>
-                <a:schemeClr val="dk1"/>
-              </a:solidFill>
-              <a:effectLst/>
-              <a:uFillTx/>
-              <a:latin typeface="Calibri"/>
+              <a:buClr>
+                <a:srgbClr val="000000"/>
+              </a:buClr>
+              <a:buSzPct val="75000"/>
+              <a:buFont typeface="Symbol" charset="2"/>
+              <a:buChar char=""/>
+              <a:tabLst>
+                <a:tab algn="l" pos="0"/>
+              </a:tabLst>
+            </a:pPr>
+            <a:r>
+              <a:rPr b="0" lang="en-US" sz="2800" strike="noStrike" u="none">
+                <a:solidFill>
+                  <a:schemeClr val="dk1"/>
+                </a:solidFill>
+                <a:effectLst/>
+                <a:uFillTx/>
+                <a:latin typeface="Calibri"/>
+              </a:rPr>
+              <a:t>streams, codegen</a:t>
+            </a:r>
+            <a:endParaRPr b="0" lang="de-AT" sz="2800" strike="noStrike" u="none">
+              <a:solidFill>
+                <a:srgbClr val="000000"/>
+              </a:solidFill>
+              <a:effectLst/>
+              <a:uFillTx/>
+              <a:latin typeface="Arial"/>
             </a:endParaRPr>
           </a:p>
           <a:p>
             <a:pPr marL="432000" indent="-324000">
+              <a:lnSpc>
+                <a:spcPct val="100000"/>
+              </a:lnSpc>
               <a:spcBef>
                 <a:spcPts val="1417"/>
               </a:spcBef>
@@ -6737,9 +7201,116 @@
               <a:buSzPct val="45000"/>
               <a:buFont typeface="Wingdings" charset="2"/>
               <a:buChar char=""/>
-            </a:pPr>
-            <a:r>
-              <a:rPr b="0" lang="en-US" sz="3200" strike="noStrike" u="none">
+              <a:tabLst>
+                <a:tab algn="l" pos="0"/>
+              </a:tabLst>
+            </a:pPr>
+            <a:r>
+              <a:rPr b="0" lang="en-US" sz="2800" strike="noStrike" u="none">
+                <a:solidFill>
+                  <a:schemeClr val="dk1"/>
+                </a:solidFill>
+                <a:effectLst/>
+                <a:uFillTx/>
+                <a:latin typeface="Calibri"/>
+              </a:rPr>
+              <a:t>Docker, PostgreSQL, Proxmox VE, Traefik, GNU make</a:t>
+            </a:r>
+            <a:endParaRPr b="0" lang="de-AT" sz="2800" strike="noStrike" u="none">
+              <a:solidFill>
+                <a:srgbClr val="000000"/>
+              </a:solidFill>
+              <a:effectLst/>
+              <a:uFillTx/>
+              <a:latin typeface="Arial"/>
+            </a:endParaRPr>
+          </a:p>
+          <a:p>
+            <a:pPr marL="432000" indent="0">
+              <a:lnSpc>
+                <a:spcPct val="100000"/>
+              </a:lnSpc>
+              <a:spcBef>
+                <a:spcPts val="1417"/>
+              </a:spcBef>
+              <a:buNone/>
+              <a:tabLst>
+                <a:tab algn="l" pos="0"/>
+              </a:tabLst>
+            </a:pPr>
+            <a:endParaRPr b="0" lang="de-AT" sz="3200" strike="noStrike" u="none">
+              <a:solidFill>
+                <a:srgbClr val="000000"/>
+              </a:solidFill>
+              <a:effectLst/>
+              <a:uFillTx/>
+              <a:latin typeface="Arial"/>
+            </a:endParaRPr>
+          </a:p>
+          <a:p>
+            <a:pPr marL="432000" indent="0">
+              <a:lnSpc>
+                <a:spcPct val="100000"/>
+              </a:lnSpc>
+              <a:spcBef>
+                <a:spcPts val="1417"/>
+              </a:spcBef>
+              <a:buNone/>
+              <a:tabLst>
+                <a:tab algn="l" pos="0"/>
+              </a:tabLst>
+            </a:pPr>
+            <a:r>
+              <a:rPr b="1" lang="en-US" sz="2800" strike="noStrike" u="none">
+                <a:solidFill>
+                  <a:schemeClr val="dk1"/>
+                </a:solidFill>
+                <a:effectLst/>
+                <a:uFillTx/>
+                <a:latin typeface="Calibri"/>
+              </a:rPr>
+              <a:t>Client</a:t>
+            </a:r>
+            <a:r>
+              <a:rPr b="0" lang="en-US" sz="2800" strike="noStrike" u="none">
+                <a:solidFill>
+                  <a:schemeClr val="dk1"/>
+                </a:solidFill>
+                <a:effectLst/>
+                <a:uFillTx/>
+                <a:latin typeface="Calibri"/>
+              </a:rPr>
+              <a:t>:</a:t>
+            </a:r>
+            <a:endParaRPr b="0" lang="de-AT" sz="2800" strike="noStrike" u="none">
+              <a:solidFill>
+                <a:srgbClr val="000000"/>
+              </a:solidFill>
+              <a:effectLst/>
+              <a:uFillTx/>
+              <a:latin typeface="Arial"/>
+            </a:endParaRPr>
+          </a:p>
+          <a:p>
+            <a:pPr marL="432000" indent="-324000">
+              <a:lnSpc>
+                <a:spcPct val="100000"/>
+              </a:lnSpc>
+              <a:spcBef>
+                <a:spcPts val="1417"/>
+              </a:spcBef>
+              <a:buClr>
+                <a:srgbClr val="000000"/>
+              </a:buClr>
+              <a:buSzPct val="45000"/>
+              <a:buFont typeface="Wingdings" charset="2"/>
+              <a:buChar char=""/>
+              <a:tabLst>
+                <a:tab algn="l" pos="0"/>
+              </a:tabLst>
+            </a:pPr>
+            <a:r>
+              <a:rPr b="0" lang="en-US" sz="2800" strike="noStrike" u="none">
                 <a:solidFill>
                   <a:schemeClr val="dk1"/>
                 </a:solidFill>
@@ -6749,17 +7320,20 @@
               </a:rPr>
               <a:t>Flutter</a:t>
             </a:r>
-            <a:endParaRPr b="0" lang="en-US" sz="3200" strike="noStrike" u="none">
-              <a:solidFill>
-                <a:schemeClr val="dk1"/>
-              </a:solidFill>
-              <a:effectLst/>
-              <a:uFillTx/>
-              <a:latin typeface="Calibri"/>
+            <a:endParaRPr b="0" lang="de-AT" sz="2800" strike="noStrike" u="none">
+              <a:solidFill>
+                <a:srgbClr val="000000"/>
+              </a:solidFill>
+              <a:effectLst/>
+              <a:uFillTx/>
+              <a:latin typeface="Arial"/>
             </a:endParaRPr>
           </a:p>
           <a:p>
             <a:pPr lvl="1" marL="864000" indent="-324000">
+              <a:lnSpc>
+                <a:spcPct val="100000"/>
+              </a:lnSpc>
               <a:spcBef>
                 <a:spcPts val="1134"/>
               </a:spcBef>
@@ -6769,25 +7343,28 @@
               <a:buSzPct val="75000"/>
               <a:buFont typeface="Symbol" charset="2"/>
               <a:buChar char=""/>
-            </a:pPr>
-            <a:r>
-              <a:rPr b="0" lang="en-US" sz="2400" strike="noStrike" u="none">
-                <a:solidFill>
-                  <a:schemeClr val="dk1"/>
-                </a:solidFill>
-                <a:effectLst/>
-                <a:uFillTx/>
-                <a:latin typeface="Calibri"/>
-              </a:rPr>
-              <a:t>carousel_slider, go_router, loader_overlay, location, mapsforge_flutter, rxdart</a:t>
-            </a:r>
-            <a:endParaRPr b="0" lang="en-US" sz="2400" strike="noStrike" u="none">
-              <a:solidFill>
-                <a:schemeClr val="dk1"/>
-              </a:solidFill>
-              <a:effectLst/>
-              <a:uFillTx/>
-              <a:latin typeface="Calibri"/>
+              <a:tabLst>
+                <a:tab algn="l" pos="0"/>
+              </a:tabLst>
+            </a:pPr>
+            <a:r>
+              <a:rPr b="0" lang="en-US" sz="2200" strike="noStrike" u="none">
+                <a:solidFill>
+                  <a:schemeClr val="dk1"/>
+                </a:solidFill>
+                <a:effectLst/>
+                <a:uFillTx/>
+                <a:latin typeface="Calibri"/>
+              </a:rPr>
+              <a:t>carousel_slider, go_router, location, mapsforge_flutter, rxdart, google-cloud-api</a:t>
+            </a:r>
+            <a:endParaRPr b="0" lang="de-AT" sz="2200" strike="noStrike" u="none">
+              <a:solidFill>
+                <a:srgbClr val="000000"/>
+              </a:solidFill>
+              <a:effectLst/>
+              <a:uFillTx/>
+              <a:latin typeface="Arial"/>
             </a:endParaRPr>
           </a:p>
         </p:txBody>
@@ -6824,7 +7401,7 @@
       </p:grpSpPr>
       <p:sp>
         <p:nvSpPr>
-          <p:cNvPr id="68" name="PlaceHolder 1"/>
+          <p:cNvPr id="70" name="PlaceHolder 1"/>
           <p:cNvSpPr>
             <a:spLocks noGrp="1"/>
           </p:cNvSpPr>
@@ -6834,8 +7411,8 @@
         </p:nvSpPr>
         <p:spPr>
           <a:xfrm>
-            <a:off x="457200" y="274680"/>
-            <a:ext cx="8229240" cy="1142640"/>
+            <a:off x="360000" y="1440000"/>
+            <a:ext cx="8228880" cy="1142280"/>
           </a:xfrm>
           <a:prstGeom prst="rect">
             <a:avLst/>
@@ -6855,6 +7432,9 @@
                 <a:spcPct val="100000"/>
               </a:lnSpc>
               <a:buNone/>
+              <a:tabLst>
+                <a:tab algn="l" pos="0"/>
+              </a:tabLst>
             </a:pPr>
             <a:r>
               <a:rPr b="0" lang="en-US" sz="4400" strike="noStrike" u="none">
@@ -6867,31 +7447,27 @@
               </a:rPr>
               <a:t>🤔 What we learned?</a:t>
             </a:r>
-            <a:endParaRPr b="0" lang="en-US" sz="4400" strike="noStrike" u="none">
-              <a:solidFill>
-                <a:schemeClr val="dk1"/>
-              </a:solidFill>
-              <a:effectLst/>
-              <a:uFillTx/>
-              <a:latin typeface="Calibri"/>
+            <a:endParaRPr b="0" lang="de-AT" sz="4400" strike="noStrike" u="none">
+              <a:solidFill>
+                <a:srgbClr val="000000"/>
+              </a:solidFill>
+              <a:effectLst/>
+              <a:uFillTx/>
+              <a:latin typeface="Arial"/>
             </a:endParaRPr>
           </a:p>
         </p:txBody>
       </p:sp>
       <p:sp>
         <p:nvSpPr>
-          <p:cNvPr id="69" name="PlaceHolder 2"/>
-          <p:cNvSpPr>
-            <a:spLocks noGrp="1"/>
-          </p:cNvSpPr>
-          <p:nvPr>
-            <p:ph/>
-          </p:nvPr>
+          <p:cNvPr id="71" name=""/>
+          <p:cNvSpPr txBox="1"/>
+          <p:nvPr/>
         </p:nvSpPr>
         <p:spPr>
           <a:xfrm>
-            <a:off x="457200" y="1600200"/>
-            <a:ext cx="8229240" cy="4525560"/>
+            <a:off x="4239360" y="4248000"/>
+            <a:ext cx="180720" cy="232560"/>
           </a:xfrm>
           <a:prstGeom prst="rect">
             <a:avLst/>
@@ -6902,132 +7478,45 @@
           </a:ln>
         </p:spPr>
         <p:txBody>
-          <a:bodyPr lIns="91440" rIns="91440" tIns="45720" bIns="45720" anchor="t">
-            <a:noAutofit/>
+          <a:bodyPr lIns="90000" rIns="90000" tIns="45000" bIns="45000" anchor="t">
+            <a:spAutoFit/>
           </a:bodyPr>
           <a:p>
-            <a:pPr marL="343080" indent="-343080" defTabSz="457200">
-              <a:lnSpc>
-                <a:spcPct val="100000"/>
-              </a:lnSpc>
-              <a:spcBef>
-                <a:spcPts val="400"/>
-              </a:spcBef>
-              <a:buClr>
-                <a:srgbClr val="0080ff"/>
-              </a:buClr>
-              <a:buFont typeface="Arial"/>
-              <a:buChar char="•"/>
-            </a:pPr>
-            <a:r>
-              <a:rPr b="0" lang="en-US" sz="2000" strike="noStrike" u="none">
-                <a:solidFill>
-                  <a:srgbClr val="0080ff"/>
-                </a:solidFill>
-                <a:effectLst/>
-                <a:uFillTx/>
-                <a:latin typeface="Calibri"/>
-              </a:rPr>
-              <a:t>Everything takes longer than expected</a:t>
-            </a:r>
-            <a:endParaRPr b="0" lang="en-US" sz="2000" strike="noStrike" u="none">
-              <a:solidFill>
-                <a:schemeClr val="dk1"/>
-              </a:solidFill>
-              <a:effectLst/>
-              <a:uFillTx/>
-              <a:latin typeface="Calibri"/>
-            </a:endParaRPr>
-          </a:p>
-          <a:p>
-            <a:pPr marL="343080" indent="-343080" defTabSz="457200">
-              <a:lnSpc>
-                <a:spcPct val="100000"/>
-              </a:lnSpc>
-              <a:spcBef>
-                <a:spcPts val="400"/>
-              </a:spcBef>
-              <a:buClr>
-                <a:srgbClr val="0080ff"/>
-              </a:buClr>
-              <a:buFont typeface="Arial"/>
-              <a:buChar char="•"/>
-            </a:pPr>
-            <a:r>
-              <a:rPr b="0" lang="en-US" sz="2000" strike="noStrike" u="none">
-                <a:solidFill>
-                  <a:srgbClr val="0080ff"/>
-                </a:solidFill>
-                <a:effectLst/>
-                <a:uFillTx/>
-                <a:latin typeface="Calibri"/>
-              </a:rPr>
-              <a:t>Serverpod looks easy but the devil is – as always – in the details</a:t>
-            </a:r>
-            <a:endParaRPr b="0" lang="en-US" sz="2000" strike="noStrike" u="none">
-              <a:solidFill>
-                <a:schemeClr val="dk1"/>
-              </a:solidFill>
-              <a:effectLst/>
-              <a:uFillTx/>
-              <a:latin typeface="Calibri"/>
-            </a:endParaRPr>
-          </a:p>
-          <a:p>
-            <a:pPr marL="343080" indent="-343080" defTabSz="457200">
-              <a:lnSpc>
-                <a:spcPct val="100000"/>
-              </a:lnSpc>
-              <a:spcBef>
-                <a:spcPts val="400"/>
-              </a:spcBef>
-              <a:buClr>
-                <a:srgbClr val="0080ff"/>
-              </a:buClr>
-              <a:buFont typeface="Arial"/>
-              <a:buChar char="•"/>
-            </a:pPr>
-            <a:r>
-              <a:rPr b="0" lang="en-US" sz="2000" strike="noStrike" u="none">
-                <a:solidFill>
-                  <a:srgbClr val="0080ff"/>
-                </a:solidFill>
-                <a:effectLst/>
-                <a:uFillTx/>
-                <a:latin typeface="Calibri"/>
-              </a:rPr>
-              <a:t>Programming is hard, integration is harder</a:t>
-            </a:r>
-            <a:endParaRPr b="0" lang="en-US" sz="2000" strike="noStrike" u="none">
-              <a:solidFill>
-                <a:schemeClr val="dk1"/>
-              </a:solidFill>
-              <a:effectLst/>
-              <a:uFillTx/>
-              <a:latin typeface="Calibri"/>
-            </a:endParaRPr>
-          </a:p>
-          <a:p>
-            <a:pPr indent="0" defTabSz="457200">
-              <a:lnSpc>
-                <a:spcPct val="100000"/>
-              </a:lnSpc>
-              <a:spcBef>
-                <a:spcPts val="641"/>
-              </a:spcBef>
-              <a:buNone/>
-            </a:pPr>
-            <a:endParaRPr b="0" lang="en-US" sz="3200" strike="noStrike" u="none">
-              <a:solidFill>
-                <a:schemeClr val="dk1"/>
-              </a:solidFill>
-              <a:effectLst/>
-              <a:uFillTx/>
-              <a:latin typeface="Calibri"/>
+            <a:endParaRPr b="0" lang="de-AT" sz="1000" strike="noStrike" u="none">
+              <a:solidFill>
+                <a:srgbClr val="000000"/>
+              </a:solidFill>
+              <a:effectLst/>
+              <a:uFillTx/>
+              <a:latin typeface="Arial"/>
             </a:endParaRPr>
           </a:p>
         </p:txBody>
       </p:sp>
+      <p:pic>
+        <p:nvPicPr>
+          <p:cNvPr id="72" name="" descr=""/>
+          <p:cNvPicPr/>
+          <p:nvPr/>
+        </p:nvPicPr>
+        <p:blipFill>
+          <a:blip r:embed="rId1"/>
+          <a:stretch/>
+        </p:blipFill>
+        <p:spPr>
+          <a:xfrm>
+            <a:off x="4109760" y="3600000"/>
+            <a:ext cx="2190240" cy="2085480"/>
+          </a:xfrm>
+          <a:prstGeom prst="rect">
+            <a:avLst/>
+          </a:prstGeom>
+          <a:noFill/>
+          <a:ln w="0">
+            <a:noFill/>
+          </a:ln>
+        </p:spPr>
+      </p:pic>
     </p:spTree>
   </p:cSld>
   <mc:AlternateContent>
